--- a/lecons/F3/19_FORM4_LESSON16_Physical_Weathering.pptx
+++ b/lecons/F3/19_FORM4_LESSON16_Physical_Weathering.pptx
@@ -49,9 +49,17 @@
     <p:sldId id="297" r:id="rId43"/>
     <p:sldId id="298" r:id="rId44"/>
     <p:sldId id="299" r:id="rId45"/>
+    <p:sldId id="300" r:id="rId46"/>
+    <p:sldId id="301" r:id="rId47"/>
+    <p:sldId id="302" r:id="rId48"/>
+    <p:sldId id="303" r:id="rId49"/>
+    <p:sldId id="304" r:id="rId50"/>
+    <p:sldId id="305" r:id="rId51"/>
+    <p:sldId id="306" r:id="rId52"/>
+    <p:sldId id="307" r:id="rId53"/>
   </p:sldIdLst>
   <p:notesMasterIdLst>
-    <p:notesMasterId r:id="rId46"/>
+    <p:notesMasterId r:id="rId54"/>
   </p:notesMasterIdLst>
   <p:sldSz cx="12192000" cy="6858000"/>
   <p:notesSz cx="6858000" cy="12192000"/>
@@ -721,7 +729,7 @@
           <a:p>
             <a:r>
               <a:rPr lang="en-US" dirty="0"/>
-              <a:t>Good. Yaya does not know why the rock peels off.</a:t>
+              <a:t>Good. Yaya does not understand how a hard rock breaks without being carried away.</a:t>
             </a:r>
             <a:endParaRPr lang="en-US" dirty="0"/>
           </a:p>
@@ -809,7 +817,7 @@
           <a:p>
             <a:r>
               <a:rPr lang="en-US" dirty="0"/>
-              <a:t>Question 2: When is the rock very hot? Think for a moment, then raise your hand to answer.</a:t>
+              <a:t>Question 2: What happens to the outer surface of the rock? Think for a moment, then raise your hand to answer.</a:t>
             </a:r>
             <a:endParaRPr lang="en-US" dirty="0"/>
           </a:p>
@@ -897,7 +905,7 @@
           <a:p>
             <a:r>
               <a:rPr lang="en-US" dirty="0"/>
-              <a:t>Good. At midday, in the dry season.</a:t>
+              <a:t>Good. It peels off in thin layers.</a:t>
             </a:r>
             <a:endParaRPr lang="en-US" dirty="0"/>
           </a:p>
@@ -985,7 +993,7 @@
           <a:p>
             <a:r>
               <a:rPr lang="en-US" dirty="0"/>
-              <a:t>Question 3: What happens at night? Think for a moment, then raise your hand to answer.</a:t>
+              <a:t>Question 3: What changes between midday and night? Think for a moment, then raise your hand to answer.</a:t>
             </a:r>
             <a:endParaRPr lang="en-US" dirty="0"/>
           </a:p>
@@ -1073,7 +1081,7 @@
           <a:p>
             <a:r>
               <a:rPr lang="en-US" dirty="0"/>
-              <a:t>Good. The rock cools down.</a:t>
+              <a:t>Good. The temperature: the rock is hot by day and cool at night.</a:t>
             </a:r>
             <a:endParaRPr lang="en-US" dirty="0"/>
           </a:p>
@@ -1337,7 +1345,7 @@
           <a:p>
             <a:r>
               <a:rPr lang="en-US" dirty="0"/>
-              <a:t>Activity 1. Look carefully at this animation: animation: heating by day, cooling at night. Watch the animation to the end; it will play again.</a:t>
+              <a:t>Activity 1. Look carefully at this animation: animation: heating by day, cooling by night. Watch the animation to the end; it will play again.</a:t>
             </a:r>
             <a:endParaRPr lang="en-US" dirty="0"/>
           </a:p>
@@ -1689,7 +1697,7 @@
           <a:p>
             <a:r>
               <a:rPr lang="en-US" dirty="0"/>
-              <a:t>Activity 2. Look carefully at this picture: round granite rocks in a hot, dry area. Observe every detail before I ask the question.</a:t>
+              <a:t>Activity 2. Look carefully at this picture: rounded granite rocks. Observe every detail before I ask the question.</a:t>
             </a:r>
             <a:endParaRPr lang="en-US" dirty="0"/>
           </a:p>
@@ -1777,7 +1785,7 @@
           <a:p>
             <a:r>
               <a:rPr lang="en-US" dirty="0"/>
-              <a:t>Here is the question for Activity 2: These granite rocks lost their outer layers again and again. What do we call this peeling of rock? Take one minute to think and write your answer in your rough notebook.</a:t>
+              <a:t>Here is the question for Activity 2: What do we call this peeling of rock in curved layers? Take one minute to think and write your answer in your rough notebook.</a:t>
             </a:r>
             <a:endParaRPr lang="en-US" dirty="0"/>
           </a:p>
@@ -1953,7 +1961,7 @@
           <a:p>
             <a:r>
               <a:rPr lang="en-US" dirty="0"/>
-              <a:t>Activity 3. Look carefully at this picture: tree roots in a cracked rock. Observe every detail before I ask the question.</a:t>
+              <a:t>Activity 3. Look carefully at this picture: roots in a rock. Observe every detail before I ask the question.</a:t>
             </a:r>
             <a:endParaRPr lang="en-US" dirty="0"/>
           </a:p>
@@ -2305,7 +2313,7 @@
           <a:p>
             <a:r>
               <a:rPr lang="en-US" dirty="0"/>
-              <a:t>Let us copy the definitions. The key terms of this lesson are defined as follows. On this slide we have Physical weathering and Exfoliation. Write each point on a new line, with the key term first, and explain it in your own words when we revise.</a:t>
+              <a:t>Let us copy the definitions. The key terms of this lesson are defined as follows. On this slide we have Physical weathering. Write each point on a new line, with the key term first, and explain it in your own words when we revise. When you finish, we go to the next slide.</a:t>
             </a:r>
             <a:endParaRPr lang="en-US" dirty="0"/>
           </a:p>
@@ -2393,7 +2401,7 @@
           <a:p>
             <a:r>
               <a:rPr lang="en-US" dirty="0"/>
-              <a:t>Let us copy Processes and Products of Physical Weathering. Physical weathering takes place through the following processes. On this slide we have Thermal shattering and Frost shattering. Write each point on a new line, with the key term first, and explain it in your own words when we revise. When you finish, we go to the next slide.</a:t>
+              <a:t>We continue with the definitions. On this slide we have Exfoliation. Write each point on a new line, with the key term first, and explain it in your own words when we revise.</a:t>
             </a:r>
             <a:endParaRPr lang="en-US" dirty="0"/>
           </a:p>
@@ -2569,7 +2577,7 @@
           <a:p>
             <a:r>
               <a:rPr lang="en-US" dirty="0"/>
-              <a:t>We continue with Processes and Products of Physical Weathering. On this slide we have Wetting and drying, Pressure release and Biological action. Write each point on a new line, with the key term first, and explain it in your own words when we revise.</a:t>
+              <a:t>Let us copy Thermal Shattering. Thermal shattering works as follows. Copy the point on Process on the left, then draw the diagram on the right: exfoliation. Give it a title and label it clearly.</a:t>
             </a:r>
             <a:endParaRPr lang="en-US" dirty="0"/>
           </a:p>
@@ -2657,7 +2665,7 @@
           <a:p>
             <a:r>
               <a:rPr lang="en-US" dirty="0"/>
-              <a:t>Now draw this illustration in your notebook: exfoliation. Give it a title and label it clearly.</a:t>
+              <a:t>Copy the point on Products on the left, then draw the diagram on the right: rounded granite rocks. Give it a title and label it clearly.</a:t>
             </a:r>
             <a:endParaRPr lang="en-US" dirty="0"/>
           </a:p>
@@ -2745,7 +2753,7 @@
           <a:p>
             <a:r>
               <a:rPr lang="en-US" dirty="0"/>
-              <a:t>Now let us check what you have understood. Question 1: Why does granite peel off in hot deserts? Answer in your exercise book.</a:t>
+              <a:t>Let us copy Frost Shattering. Frost shattering works as follows. Copy the point on Process on the left, then draw the diagram on the right: frost on rock. Give it a title and label it clearly.</a:t>
             </a:r>
             <a:endParaRPr lang="en-US" dirty="0"/>
           </a:p>
@@ -2833,7 +2841,7 @@
           <a:p>
             <a:r>
               <a:rPr lang="en-US" dirty="0"/>
-              <a:t>The expected answer is: it gets hot by day and cold at night, again and again. If you got it right, well done.</a:t>
+              <a:t>We continue with Frost Shattering. On this slide we have Products. Write each point on a new line, with the key term first, and explain it in your own words when we revise.</a:t>
             </a:r>
             <a:endParaRPr lang="en-US" dirty="0"/>
           </a:p>
@@ -2921,7 +2929,7 @@
           <a:p>
             <a:r>
               <a:rPr lang="en-US" dirty="0"/>
-              <a:t>Now let us check what you have understood. Question 2: How do roots break rocks? Answer in your exercise book.</a:t>
+              <a:t>Let us copy Alternate Wetting and Drying (Slaking). Alternate wetting and drying works as follows. On this slide we have Process. Write each point on a new line, with the key term first, and explain it in your own words when we revise.</a:t>
             </a:r>
             <a:endParaRPr lang="en-US" dirty="0"/>
           </a:p>
@@ -3009,7 +3017,7 @@
           <a:p>
             <a:r>
               <a:rPr lang="en-US" dirty="0"/>
-              <a:t>The expected answer is: they grow in cracks and push the rock apart. If you got it right, well done.</a:t>
+              <a:t>Copy the point on Products on the left, then draw the diagram on the right: cracked soil. Give it a title and label it clearly.</a:t>
             </a:r>
             <a:endParaRPr lang="en-US" dirty="0"/>
           </a:p>
@@ -3097,7 +3105,7 @@
           <a:p>
             <a:r>
               <a:rPr lang="en-US" dirty="0"/>
-              <a:t>Take your time to copy this part; we will continue together.</a:t>
+              <a:t>Let us copy Pressure Release (Unloading). Pressure release works as follows. Copy the point on Process on the left, then draw the diagram on the right: processes of physical weathering. Give it a title and label it clearly.</a:t>
             </a:r>
             <a:endParaRPr lang="en-US" dirty="0"/>
           </a:p>
@@ -3185,7 +3193,7 @@
           <a:p>
             <a:r>
               <a:rPr lang="en-US" dirty="0"/>
-              <a:t>For those who need more practice, fill in the blanks in your exercise book. The answers are: number 1, exfoliation; number 2, frost; number 3, minerals.</a:t>
+              <a:t>We continue with Pressure Release (Unloading). On this slide we have Products. Write each point on a new line, with the key term first, and explain it in your own words when we revise.</a:t>
             </a:r>
             <a:endParaRPr lang="en-US" dirty="0"/>
           </a:p>
@@ -3273,7 +3281,7 @@
           <a:p>
             <a:r>
               <a:rPr lang="en-US" dirty="0"/>
-              <a:t>For your homework: Look at an old iron gate, a roofing sheet or a nail left in the rain. Write what happened to it and what colour it became. We shall correct it at the beginning of our next lesson.</a:t>
+              <a:t>Let us copy Physically Induced Biological Weathering. Living things break rocks physically as follows. Copy the point on Plant roots on the left, then draw the diagram on the right: roots in a rock. Give it a title and label it clearly.</a:t>
             </a:r>
             <a:endParaRPr lang="en-US" dirty="0"/>
           </a:p>
@@ -3361,7 +3369,7 @@
           <a:p>
             <a:r>
               <a:rPr lang="en-US" dirty="0"/>
-              <a:t>Our next lesson will be on Lesson 17: Chemical Weathering Processes and Products. Thank you for your attention, and see you next time.</a:t>
+              <a:t>We continue with Physically Induced Biological Weathering. On this slide we have Burrowing animals and Products. Write each point on a new line, with the key term first, and explain it in your own words when we revise.</a:t>
             </a:r>
             <a:endParaRPr lang="en-US" dirty="0"/>
           </a:p>
@@ -3537,7 +3545,7 @@
           <a:p>
             <a:r>
               <a:rPr lang="en-US" dirty="0"/>
-              <a:t>Let us play the bilingual game. I say a word in English, and you give me the French word. Then we do the reverse.</a:t>
+              <a:t>Now let us check what you have understood. Question 1: Why does granite peel off in hot deserts? Answer in your exercise book.</a:t>
             </a:r>
             <a:endParaRPr lang="en-US" dirty="0"/>
           </a:p>
@@ -3625,7 +3633,7 @@
           <a:p>
             <a:r>
               <a:rPr lang="en-US" dirty="0"/>
-              <a:t>I record this information in the official logbook of the class after the lesson.</a:t>
+              <a:t>The expected answer is: it gets hot by day and cold at night, again and again. If you got it right, well done.</a:t>
             </a:r>
             <a:endParaRPr lang="en-US" dirty="0"/>
           </a:p>
@@ -3713,7 +3721,7 @@
           <a:p>
             <a:r>
               <a:rPr lang="en-US" dirty="0"/>
-              <a:t>I complete the second page of the logbook: the matter taught, the evaluation, the homework and the attendance.</a:t>
+              <a:t>Now let us check what you have understood. Question 2: How do roots break rocks? Answer in your exercise book.</a:t>
             </a:r>
             <a:endParaRPr lang="en-US" dirty="0"/>
           </a:p>
@@ -3801,7 +3809,7 @@
           <a:p>
             <a:r>
               <a:rPr lang="en-US" dirty="0"/>
-              <a:t>This slide is for me, the teacher: it gives the timing of the lesson and what to do if the projector is not available.</a:t>
+              <a:t>The expected answer is: they grow in cracks and push the rock apart. If you got it right, well done.</a:t>
             </a:r>
             <a:endParaRPr lang="en-US" dirty="0"/>
           </a:p>
@@ -3889,7 +3897,7 @@
           <a:p>
             <a:r>
               <a:rPr lang="en-US" dirty="0"/>
-              <a:t>These are the references and picture credits used to prepare this lesson.</a:t>
+              <a:t>Take your time to copy this part; we will continue together.</a:t>
             </a:r>
             <a:endParaRPr lang="en-US" dirty="0"/>
           </a:p>
@@ -3913,6 +3921,446 @@
             <a:fld id="{F7021451-1387-4CA6-816F-3879F97B5CBC}" type="slidenum">
               <a:rPr lang="en-US"/>
               <a:t>44</a:t>
+            </a:fld>
+            <a:endParaRPr lang="en-US"/>
+          </a:p>
+        </p:txBody>
+      </p:sp>
+    </p:spTree>
+    <p:extLst>
+      <p:ext uri="{BB962C8B-B14F-4D97-AF65-F5344CB8AC3E}">
+        <p14:creationId xmlns:p14="http://schemas.microsoft.com/office/powerpoint/2010/main" val="1024086991"/>
+      </p:ext>
+    </p:extLst>
+  </p:cSld>
+  <p:clrMapOvr>
+    <a:masterClrMapping/>
+  </p:clrMapOvr>
+</p:notes>
+</file>
+
+<file path=ppt/notesSlides/notesSlide45.xml><?xml version="1.0" encoding="utf-8"?>
+<p:notes xmlns:a="http://schemas.openxmlformats.org/drawingml/2006/main" xmlns:r="http://schemas.openxmlformats.org/officeDocument/2006/relationships" xmlns:p="http://schemas.openxmlformats.org/presentationml/2006/main">
+  <p:cSld>
+    <p:spTree>
+      <p:nvGrpSpPr>
+        <p:cNvPr id="1" name=""/>
+        <p:cNvGrpSpPr/>
+        <p:nvPr/>
+      </p:nvGrpSpPr>
+      <p:grpSpPr>
+        <a:xfrm>
+          <a:off x="0" y="0"/>
+          <a:ext cx="0" cy="0"/>
+          <a:chOff x="0" y="0"/>
+          <a:chExt cx="0" cy="0"/>
+        </a:xfrm>
+      </p:grpSpPr>
+      <p:sp>
+        <p:nvSpPr>
+          <p:cNvPr id="2" name="Slide Image Placeholder 1"/>
+          <p:cNvSpPr>
+            <a:spLocks noGrp="1" noRot="1" noChangeAspect="1"/>
+          </p:cNvSpPr>
+          <p:nvPr>
+            <p:ph type="sldImg"/>
+          </p:nvPr>
+        </p:nvSpPr>
+        <p:spPr/>
+      </p:sp>
+      <p:sp>
+        <p:nvSpPr>
+          <p:cNvPr id="3" name="Notes Placeholder 2"/>
+          <p:cNvSpPr>
+            <a:spLocks noGrp="1"/>
+          </p:cNvSpPr>
+          <p:nvPr>
+            <p:ph type="body" idx="1"/>
+          </p:nvPr>
+        </p:nvSpPr>
+        <p:spPr/>
+        <p:txBody>
+          <a:bodyPr/>
+          <a:lstStyle/>
+          <a:p>
+            <a:r>
+              <a:rPr lang="en-US" dirty="0"/>
+              <a:t>For those who need more practice, fill in the blanks in your exercise book. The answers are: number 1, exfoliation; number 2, frost; number 3, minerals.</a:t>
+            </a:r>
+            <a:endParaRPr lang="en-US" dirty="0"/>
+          </a:p>
+        </p:txBody>
+      </p:sp>
+      <p:sp>
+        <p:nvSpPr>
+          <p:cNvPr id="4" name="Slide Number Placeholder 3"/>
+          <p:cNvSpPr>
+            <a:spLocks noGrp="1"/>
+          </p:cNvSpPr>
+          <p:nvPr>
+            <p:ph type="sldNum" sz="quarter" idx="10"/>
+          </p:nvPr>
+        </p:nvSpPr>
+        <p:spPr/>
+        <p:txBody>
+          <a:bodyPr/>
+          <a:lstStyle/>
+          <a:p>
+            <a:fld id="{F7021451-1387-4CA6-816F-3879F97B5CBC}" type="slidenum">
+              <a:rPr lang="en-US"/>
+              <a:t>45</a:t>
+            </a:fld>
+            <a:endParaRPr lang="en-US"/>
+          </a:p>
+        </p:txBody>
+      </p:sp>
+    </p:spTree>
+    <p:extLst>
+      <p:ext uri="{BB962C8B-B14F-4D97-AF65-F5344CB8AC3E}">
+        <p14:creationId xmlns:p14="http://schemas.microsoft.com/office/powerpoint/2010/main" val="1024086991"/>
+      </p:ext>
+    </p:extLst>
+  </p:cSld>
+  <p:clrMapOvr>
+    <a:masterClrMapping/>
+  </p:clrMapOvr>
+</p:notes>
+</file>
+
+<file path=ppt/notesSlides/notesSlide46.xml><?xml version="1.0" encoding="utf-8"?>
+<p:notes xmlns:a="http://schemas.openxmlformats.org/drawingml/2006/main" xmlns:r="http://schemas.openxmlformats.org/officeDocument/2006/relationships" xmlns:p="http://schemas.openxmlformats.org/presentationml/2006/main">
+  <p:cSld>
+    <p:spTree>
+      <p:nvGrpSpPr>
+        <p:cNvPr id="1" name=""/>
+        <p:cNvGrpSpPr/>
+        <p:nvPr/>
+      </p:nvGrpSpPr>
+      <p:grpSpPr>
+        <a:xfrm>
+          <a:off x="0" y="0"/>
+          <a:ext cx="0" cy="0"/>
+          <a:chOff x="0" y="0"/>
+          <a:chExt cx="0" cy="0"/>
+        </a:xfrm>
+      </p:grpSpPr>
+      <p:sp>
+        <p:nvSpPr>
+          <p:cNvPr id="2" name="Slide Image Placeholder 1"/>
+          <p:cNvSpPr>
+            <a:spLocks noGrp="1" noRot="1" noChangeAspect="1"/>
+          </p:cNvSpPr>
+          <p:nvPr>
+            <p:ph type="sldImg"/>
+          </p:nvPr>
+        </p:nvSpPr>
+        <p:spPr/>
+      </p:sp>
+      <p:sp>
+        <p:nvSpPr>
+          <p:cNvPr id="3" name="Notes Placeholder 2"/>
+          <p:cNvSpPr>
+            <a:spLocks noGrp="1"/>
+          </p:cNvSpPr>
+          <p:nvPr>
+            <p:ph type="body" idx="1"/>
+          </p:nvPr>
+        </p:nvSpPr>
+        <p:spPr/>
+        <p:txBody>
+          <a:bodyPr/>
+          <a:lstStyle/>
+          <a:p>
+            <a:r>
+              <a:rPr lang="en-US" dirty="0"/>
+              <a:t>For your homework: Look at an old iron gate, a roofing sheet or a nail left in the rain. Write what happened to it and what colour it became. We shall correct it at the beginning of our next lesson.</a:t>
+            </a:r>
+            <a:endParaRPr lang="en-US" dirty="0"/>
+          </a:p>
+        </p:txBody>
+      </p:sp>
+      <p:sp>
+        <p:nvSpPr>
+          <p:cNvPr id="4" name="Slide Number Placeholder 3"/>
+          <p:cNvSpPr>
+            <a:spLocks noGrp="1"/>
+          </p:cNvSpPr>
+          <p:nvPr>
+            <p:ph type="sldNum" sz="quarter" idx="10"/>
+          </p:nvPr>
+        </p:nvSpPr>
+        <p:spPr/>
+        <p:txBody>
+          <a:bodyPr/>
+          <a:lstStyle/>
+          <a:p>
+            <a:fld id="{F7021451-1387-4CA6-816F-3879F97B5CBC}" type="slidenum">
+              <a:rPr lang="en-US"/>
+              <a:t>46</a:t>
+            </a:fld>
+            <a:endParaRPr lang="en-US"/>
+          </a:p>
+        </p:txBody>
+      </p:sp>
+    </p:spTree>
+    <p:extLst>
+      <p:ext uri="{BB962C8B-B14F-4D97-AF65-F5344CB8AC3E}">
+        <p14:creationId xmlns:p14="http://schemas.microsoft.com/office/powerpoint/2010/main" val="1024086991"/>
+      </p:ext>
+    </p:extLst>
+  </p:cSld>
+  <p:clrMapOvr>
+    <a:masterClrMapping/>
+  </p:clrMapOvr>
+</p:notes>
+</file>
+
+<file path=ppt/notesSlides/notesSlide47.xml><?xml version="1.0" encoding="utf-8"?>
+<p:notes xmlns:a="http://schemas.openxmlformats.org/drawingml/2006/main" xmlns:r="http://schemas.openxmlformats.org/officeDocument/2006/relationships" xmlns:p="http://schemas.openxmlformats.org/presentationml/2006/main">
+  <p:cSld>
+    <p:spTree>
+      <p:nvGrpSpPr>
+        <p:cNvPr id="1" name=""/>
+        <p:cNvGrpSpPr/>
+        <p:nvPr/>
+      </p:nvGrpSpPr>
+      <p:grpSpPr>
+        <a:xfrm>
+          <a:off x="0" y="0"/>
+          <a:ext cx="0" cy="0"/>
+          <a:chOff x="0" y="0"/>
+          <a:chExt cx="0" cy="0"/>
+        </a:xfrm>
+      </p:grpSpPr>
+      <p:sp>
+        <p:nvSpPr>
+          <p:cNvPr id="2" name="Slide Image Placeholder 1"/>
+          <p:cNvSpPr>
+            <a:spLocks noGrp="1" noRot="1" noChangeAspect="1"/>
+          </p:cNvSpPr>
+          <p:nvPr>
+            <p:ph type="sldImg"/>
+          </p:nvPr>
+        </p:nvSpPr>
+        <p:spPr/>
+      </p:sp>
+      <p:sp>
+        <p:nvSpPr>
+          <p:cNvPr id="3" name="Notes Placeholder 2"/>
+          <p:cNvSpPr>
+            <a:spLocks noGrp="1"/>
+          </p:cNvSpPr>
+          <p:nvPr>
+            <p:ph type="body" idx="1"/>
+          </p:nvPr>
+        </p:nvSpPr>
+        <p:spPr/>
+        <p:txBody>
+          <a:bodyPr/>
+          <a:lstStyle/>
+          <a:p>
+            <a:r>
+              <a:rPr lang="en-US" dirty="0"/>
+              <a:t>Our next lesson will be on Lesson 17: Chemical Weathering Processes and Products. Thank you for your attention, and see you next time.</a:t>
+            </a:r>
+            <a:endParaRPr lang="en-US" dirty="0"/>
+          </a:p>
+        </p:txBody>
+      </p:sp>
+      <p:sp>
+        <p:nvSpPr>
+          <p:cNvPr id="4" name="Slide Number Placeholder 3"/>
+          <p:cNvSpPr>
+            <a:spLocks noGrp="1"/>
+          </p:cNvSpPr>
+          <p:nvPr>
+            <p:ph type="sldNum" sz="quarter" idx="10"/>
+          </p:nvPr>
+        </p:nvSpPr>
+        <p:spPr/>
+        <p:txBody>
+          <a:bodyPr/>
+          <a:lstStyle/>
+          <a:p>
+            <a:fld id="{F7021451-1387-4CA6-816F-3879F97B5CBC}" type="slidenum">
+              <a:rPr lang="en-US"/>
+              <a:t>47</a:t>
+            </a:fld>
+            <a:endParaRPr lang="en-US"/>
+          </a:p>
+        </p:txBody>
+      </p:sp>
+    </p:spTree>
+    <p:extLst>
+      <p:ext uri="{BB962C8B-B14F-4D97-AF65-F5344CB8AC3E}">
+        <p14:creationId xmlns:p14="http://schemas.microsoft.com/office/powerpoint/2010/main" val="1024086991"/>
+      </p:ext>
+    </p:extLst>
+  </p:cSld>
+  <p:clrMapOvr>
+    <a:masterClrMapping/>
+  </p:clrMapOvr>
+</p:notes>
+</file>
+
+<file path=ppt/notesSlides/notesSlide48.xml><?xml version="1.0" encoding="utf-8"?>
+<p:notes xmlns:a="http://schemas.openxmlformats.org/drawingml/2006/main" xmlns:r="http://schemas.openxmlformats.org/officeDocument/2006/relationships" xmlns:p="http://schemas.openxmlformats.org/presentationml/2006/main">
+  <p:cSld>
+    <p:spTree>
+      <p:nvGrpSpPr>
+        <p:cNvPr id="1" name=""/>
+        <p:cNvGrpSpPr/>
+        <p:nvPr/>
+      </p:nvGrpSpPr>
+      <p:grpSpPr>
+        <a:xfrm>
+          <a:off x="0" y="0"/>
+          <a:ext cx="0" cy="0"/>
+          <a:chOff x="0" y="0"/>
+          <a:chExt cx="0" cy="0"/>
+        </a:xfrm>
+      </p:grpSpPr>
+      <p:sp>
+        <p:nvSpPr>
+          <p:cNvPr id="2" name="Slide Image Placeholder 1"/>
+          <p:cNvSpPr>
+            <a:spLocks noGrp="1" noRot="1" noChangeAspect="1"/>
+          </p:cNvSpPr>
+          <p:nvPr>
+            <p:ph type="sldImg"/>
+          </p:nvPr>
+        </p:nvSpPr>
+        <p:spPr/>
+      </p:sp>
+      <p:sp>
+        <p:nvSpPr>
+          <p:cNvPr id="3" name="Notes Placeholder 2"/>
+          <p:cNvSpPr>
+            <a:spLocks noGrp="1"/>
+          </p:cNvSpPr>
+          <p:nvPr>
+            <p:ph type="body" idx="1"/>
+          </p:nvPr>
+        </p:nvSpPr>
+        <p:spPr/>
+        <p:txBody>
+          <a:bodyPr/>
+          <a:lstStyle/>
+          <a:p>
+            <a:r>
+              <a:rPr lang="en-US" dirty="0"/>
+              <a:t>Let us play the bilingual game. I say a word in English, and you give me the French word. Then we do the reverse.</a:t>
+            </a:r>
+            <a:endParaRPr lang="en-US" dirty="0"/>
+          </a:p>
+        </p:txBody>
+      </p:sp>
+      <p:sp>
+        <p:nvSpPr>
+          <p:cNvPr id="4" name="Slide Number Placeholder 3"/>
+          <p:cNvSpPr>
+            <a:spLocks noGrp="1"/>
+          </p:cNvSpPr>
+          <p:nvPr>
+            <p:ph type="sldNum" sz="quarter" idx="10"/>
+          </p:nvPr>
+        </p:nvSpPr>
+        <p:spPr/>
+        <p:txBody>
+          <a:bodyPr/>
+          <a:lstStyle/>
+          <a:p>
+            <a:fld id="{F7021451-1387-4CA6-816F-3879F97B5CBC}" type="slidenum">
+              <a:rPr lang="en-US"/>
+              <a:t>48</a:t>
+            </a:fld>
+            <a:endParaRPr lang="en-US"/>
+          </a:p>
+        </p:txBody>
+      </p:sp>
+    </p:spTree>
+    <p:extLst>
+      <p:ext uri="{BB962C8B-B14F-4D97-AF65-F5344CB8AC3E}">
+        <p14:creationId xmlns:p14="http://schemas.microsoft.com/office/powerpoint/2010/main" val="1024086991"/>
+      </p:ext>
+    </p:extLst>
+  </p:cSld>
+  <p:clrMapOvr>
+    <a:masterClrMapping/>
+  </p:clrMapOvr>
+</p:notes>
+</file>
+
+<file path=ppt/notesSlides/notesSlide49.xml><?xml version="1.0" encoding="utf-8"?>
+<p:notes xmlns:a="http://schemas.openxmlformats.org/drawingml/2006/main" xmlns:r="http://schemas.openxmlformats.org/officeDocument/2006/relationships" xmlns:p="http://schemas.openxmlformats.org/presentationml/2006/main">
+  <p:cSld>
+    <p:spTree>
+      <p:nvGrpSpPr>
+        <p:cNvPr id="1" name=""/>
+        <p:cNvGrpSpPr/>
+        <p:nvPr/>
+      </p:nvGrpSpPr>
+      <p:grpSpPr>
+        <a:xfrm>
+          <a:off x="0" y="0"/>
+          <a:ext cx="0" cy="0"/>
+          <a:chOff x="0" y="0"/>
+          <a:chExt cx="0" cy="0"/>
+        </a:xfrm>
+      </p:grpSpPr>
+      <p:sp>
+        <p:nvSpPr>
+          <p:cNvPr id="2" name="Slide Image Placeholder 1"/>
+          <p:cNvSpPr>
+            <a:spLocks noGrp="1" noRot="1" noChangeAspect="1"/>
+          </p:cNvSpPr>
+          <p:nvPr>
+            <p:ph type="sldImg"/>
+          </p:nvPr>
+        </p:nvSpPr>
+        <p:spPr/>
+      </p:sp>
+      <p:sp>
+        <p:nvSpPr>
+          <p:cNvPr id="3" name="Notes Placeholder 2"/>
+          <p:cNvSpPr>
+            <a:spLocks noGrp="1"/>
+          </p:cNvSpPr>
+          <p:nvPr>
+            <p:ph type="body" idx="1"/>
+          </p:nvPr>
+        </p:nvSpPr>
+        <p:spPr/>
+        <p:txBody>
+          <a:bodyPr/>
+          <a:lstStyle/>
+          <a:p>
+            <a:r>
+              <a:rPr lang="en-US" dirty="0"/>
+              <a:t>I record this information in the official logbook of the class after the lesson.</a:t>
+            </a:r>
+            <a:endParaRPr lang="en-US" dirty="0"/>
+          </a:p>
+        </p:txBody>
+      </p:sp>
+      <p:sp>
+        <p:nvSpPr>
+          <p:cNvPr id="4" name="Slide Number Placeholder 3"/>
+          <p:cNvSpPr>
+            <a:spLocks noGrp="1"/>
+          </p:cNvSpPr>
+          <p:nvPr>
+            <p:ph type="sldNum" sz="quarter" idx="10"/>
+          </p:nvPr>
+        </p:nvSpPr>
+        <p:spPr/>
+        <p:txBody>
+          <a:bodyPr/>
+          <a:lstStyle/>
+          <a:p>
+            <a:fld id="{F7021451-1387-4CA6-816F-3879F97B5CBC}" type="slidenum">
+              <a:rPr lang="en-US"/>
+              <a:t>49</a:t>
             </a:fld>
             <a:endParaRPr lang="en-US"/>
           </a:p>
@@ -4019,6 +4467,270 @@
 </p:notes>
 </file>
 
+<file path=ppt/notesSlides/notesSlide50.xml><?xml version="1.0" encoding="utf-8"?>
+<p:notes xmlns:a="http://schemas.openxmlformats.org/drawingml/2006/main" xmlns:r="http://schemas.openxmlformats.org/officeDocument/2006/relationships" xmlns:p="http://schemas.openxmlformats.org/presentationml/2006/main">
+  <p:cSld>
+    <p:spTree>
+      <p:nvGrpSpPr>
+        <p:cNvPr id="1" name=""/>
+        <p:cNvGrpSpPr/>
+        <p:nvPr/>
+      </p:nvGrpSpPr>
+      <p:grpSpPr>
+        <a:xfrm>
+          <a:off x="0" y="0"/>
+          <a:ext cx="0" cy="0"/>
+          <a:chOff x="0" y="0"/>
+          <a:chExt cx="0" cy="0"/>
+        </a:xfrm>
+      </p:grpSpPr>
+      <p:sp>
+        <p:nvSpPr>
+          <p:cNvPr id="2" name="Slide Image Placeholder 1"/>
+          <p:cNvSpPr>
+            <a:spLocks noGrp="1" noRot="1" noChangeAspect="1"/>
+          </p:cNvSpPr>
+          <p:nvPr>
+            <p:ph type="sldImg"/>
+          </p:nvPr>
+        </p:nvSpPr>
+        <p:spPr/>
+      </p:sp>
+      <p:sp>
+        <p:nvSpPr>
+          <p:cNvPr id="3" name="Notes Placeholder 2"/>
+          <p:cNvSpPr>
+            <a:spLocks noGrp="1"/>
+          </p:cNvSpPr>
+          <p:nvPr>
+            <p:ph type="body" idx="1"/>
+          </p:nvPr>
+        </p:nvSpPr>
+        <p:spPr/>
+        <p:txBody>
+          <a:bodyPr/>
+          <a:lstStyle/>
+          <a:p>
+            <a:r>
+              <a:rPr lang="en-US" dirty="0"/>
+              <a:t>I complete the second page of the logbook: the matter taught, the evaluation, the homework and the attendance.</a:t>
+            </a:r>
+            <a:endParaRPr lang="en-US" dirty="0"/>
+          </a:p>
+        </p:txBody>
+      </p:sp>
+      <p:sp>
+        <p:nvSpPr>
+          <p:cNvPr id="4" name="Slide Number Placeholder 3"/>
+          <p:cNvSpPr>
+            <a:spLocks noGrp="1"/>
+          </p:cNvSpPr>
+          <p:nvPr>
+            <p:ph type="sldNum" sz="quarter" idx="10"/>
+          </p:nvPr>
+        </p:nvSpPr>
+        <p:spPr/>
+        <p:txBody>
+          <a:bodyPr/>
+          <a:lstStyle/>
+          <a:p>
+            <a:fld id="{F7021451-1387-4CA6-816F-3879F97B5CBC}" type="slidenum">
+              <a:rPr lang="en-US"/>
+              <a:t>50</a:t>
+            </a:fld>
+            <a:endParaRPr lang="en-US"/>
+          </a:p>
+        </p:txBody>
+      </p:sp>
+    </p:spTree>
+    <p:extLst>
+      <p:ext uri="{BB962C8B-B14F-4D97-AF65-F5344CB8AC3E}">
+        <p14:creationId xmlns:p14="http://schemas.microsoft.com/office/powerpoint/2010/main" val="1024086991"/>
+      </p:ext>
+    </p:extLst>
+  </p:cSld>
+  <p:clrMapOvr>
+    <a:masterClrMapping/>
+  </p:clrMapOvr>
+</p:notes>
+</file>
+
+<file path=ppt/notesSlides/notesSlide51.xml><?xml version="1.0" encoding="utf-8"?>
+<p:notes xmlns:a="http://schemas.openxmlformats.org/drawingml/2006/main" xmlns:r="http://schemas.openxmlformats.org/officeDocument/2006/relationships" xmlns:p="http://schemas.openxmlformats.org/presentationml/2006/main">
+  <p:cSld>
+    <p:spTree>
+      <p:nvGrpSpPr>
+        <p:cNvPr id="1" name=""/>
+        <p:cNvGrpSpPr/>
+        <p:nvPr/>
+      </p:nvGrpSpPr>
+      <p:grpSpPr>
+        <a:xfrm>
+          <a:off x="0" y="0"/>
+          <a:ext cx="0" cy="0"/>
+          <a:chOff x="0" y="0"/>
+          <a:chExt cx="0" cy="0"/>
+        </a:xfrm>
+      </p:grpSpPr>
+      <p:sp>
+        <p:nvSpPr>
+          <p:cNvPr id="2" name="Slide Image Placeholder 1"/>
+          <p:cNvSpPr>
+            <a:spLocks noGrp="1" noRot="1" noChangeAspect="1"/>
+          </p:cNvSpPr>
+          <p:nvPr>
+            <p:ph type="sldImg"/>
+          </p:nvPr>
+        </p:nvSpPr>
+        <p:spPr/>
+      </p:sp>
+      <p:sp>
+        <p:nvSpPr>
+          <p:cNvPr id="3" name="Notes Placeholder 2"/>
+          <p:cNvSpPr>
+            <a:spLocks noGrp="1"/>
+          </p:cNvSpPr>
+          <p:nvPr>
+            <p:ph type="body" idx="1"/>
+          </p:nvPr>
+        </p:nvSpPr>
+        <p:spPr/>
+        <p:txBody>
+          <a:bodyPr/>
+          <a:lstStyle/>
+          <a:p>
+            <a:r>
+              <a:rPr lang="en-US" dirty="0"/>
+              <a:t>This slide is for me, the teacher: it gives the timing of the lesson and what to do if the projector is not available.</a:t>
+            </a:r>
+            <a:endParaRPr lang="en-US" dirty="0"/>
+          </a:p>
+        </p:txBody>
+      </p:sp>
+      <p:sp>
+        <p:nvSpPr>
+          <p:cNvPr id="4" name="Slide Number Placeholder 3"/>
+          <p:cNvSpPr>
+            <a:spLocks noGrp="1"/>
+          </p:cNvSpPr>
+          <p:nvPr>
+            <p:ph type="sldNum" sz="quarter" idx="10"/>
+          </p:nvPr>
+        </p:nvSpPr>
+        <p:spPr/>
+        <p:txBody>
+          <a:bodyPr/>
+          <a:lstStyle/>
+          <a:p>
+            <a:fld id="{F7021451-1387-4CA6-816F-3879F97B5CBC}" type="slidenum">
+              <a:rPr lang="en-US"/>
+              <a:t>51</a:t>
+            </a:fld>
+            <a:endParaRPr lang="en-US"/>
+          </a:p>
+        </p:txBody>
+      </p:sp>
+    </p:spTree>
+    <p:extLst>
+      <p:ext uri="{BB962C8B-B14F-4D97-AF65-F5344CB8AC3E}">
+        <p14:creationId xmlns:p14="http://schemas.microsoft.com/office/powerpoint/2010/main" val="1024086991"/>
+      </p:ext>
+    </p:extLst>
+  </p:cSld>
+  <p:clrMapOvr>
+    <a:masterClrMapping/>
+  </p:clrMapOvr>
+</p:notes>
+</file>
+
+<file path=ppt/notesSlides/notesSlide52.xml><?xml version="1.0" encoding="utf-8"?>
+<p:notes xmlns:a="http://schemas.openxmlformats.org/drawingml/2006/main" xmlns:r="http://schemas.openxmlformats.org/officeDocument/2006/relationships" xmlns:p="http://schemas.openxmlformats.org/presentationml/2006/main">
+  <p:cSld>
+    <p:spTree>
+      <p:nvGrpSpPr>
+        <p:cNvPr id="1" name=""/>
+        <p:cNvGrpSpPr/>
+        <p:nvPr/>
+      </p:nvGrpSpPr>
+      <p:grpSpPr>
+        <a:xfrm>
+          <a:off x="0" y="0"/>
+          <a:ext cx="0" cy="0"/>
+          <a:chOff x="0" y="0"/>
+          <a:chExt cx="0" cy="0"/>
+        </a:xfrm>
+      </p:grpSpPr>
+      <p:sp>
+        <p:nvSpPr>
+          <p:cNvPr id="2" name="Slide Image Placeholder 1"/>
+          <p:cNvSpPr>
+            <a:spLocks noGrp="1" noRot="1" noChangeAspect="1"/>
+          </p:cNvSpPr>
+          <p:nvPr>
+            <p:ph type="sldImg"/>
+          </p:nvPr>
+        </p:nvSpPr>
+        <p:spPr/>
+      </p:sp>
+      <p:sp>
+        <p:nvSpPr>
+          <p:cNvPr id="3" name="Notes Placeholder 2"/>
+          <p:cNvSpPr>
+            <a:spLocks noGrp="1"/>
+          </p:cNvSpPr>
+          <p:nvPr>
+            <p:ph type="body" idx="1"/>
+          </p:nvPr>
+        </p:nvSpPr>
+        <p:spPr/>
+        <p:txBody>
+          <a:bodyPr/>
+          <a:lstStyle/>
+          <a:p>
+            <a:r>
+              <a:rPr lang="en-US" dirty="0"/>
+              <a:t>These are the references and picture credits used to prepare this lesson.</a:t>
+            </a:r>
+            <a:endParaRPr lang="en-US" dirty="0"/>
+          </a:p>
+        </p:txBody>
+      </p:sp>
+      <p:sp>
+        <p:nvSpPr>
+          <p:cNvPr id="4" name="Slide Number Placeholder 3"/>
+          <p:cNvSpPr>
+            <a:spLocks noGrp="1"/>
+          </p:cNvSpPr>
+          <p:nvPr>
+            <p:ph type="sldNum" sz="quarter" idx="10"/>
+          </p:nvPr>
+        </p:nvSpPr>
+        <p:spPr/>
+        <p:txBody>
+          <a:bodyPr/>
+          <a:lstStyle/>
+          <a:p>
+            <a:fld id="{F7021451-1387-4CA6-816F-3879F97B5CBC}" type="slidenum">
+              <a:rPr lang="en-US"/>
+              <a:t>52</a:t>
+            </a:fld>
+            <a:endParaRPr lang="en-US"/>
+          </a:p>
+        </p:txBody>
+      </p:sp>
+    </p:spTree>
+    <p:extLst>
+      <p:ext uri="{BB962C8B-B14F-4D97-AF65-F5344CB8AC3E}">
+        <p14:creationId xmlns:p14="http://schemas.microsoft.com/office/powerpoint/2010/main" val="1024086991"/>
+      </p:ext>
+    </p:extLst>
+  </p:cSld>
+  <p:clrMapOvr>
+    <a:masterClrMapping/>
+  </p:clrMapOvr>
+</p:notes>
+</file>
+
 <file path=ppt/notesSlides/notesSlide6.xml><?xml version="1.0" encoding="utf-8"?>
 <p:notes xmlns:a="http://schemas.openxmlformats.org/drawingml/2006/main" xmlns:r="http://schemas.openxmlformats.org/officeDocument/2006/relationships" xmlns:p="http://schemas.openxmlformats.org/presentationml/2006/main">
   <p:cSld>
@@ -4329,7 +5041,7 @@
           <a:p>
             <a:r>
               <a:rPr lang="en-US" dirty="0"/>
-              <a:t>Listen carefully to this situation from real life. In the dry season, Yaya walks past a big granite rock. At midday, it is too hot to touch. Its outer surface peels off in thin layers, like an onion. Think about it, because I am going to ask you some questions.</a:t>
+              <a:t>Listen carefully to this situation from real life. In the dry season, Yaya walks past a big granite rock. At midday it is too hot to touch, and at night it is cool; its outer surface peels off in thin layers, like an onion. He asks: "How can the Sun alone break such a hard rock?" Think about it, because I am going to ask you some questions.</a:t>
             </a:r>
             <a:endParaRPr lang="en-US" dirty="0"/>
           </a:p>
@@ -6012,7 +6724,7 @@
                 <a:ea typeface="Times New Roman" pitchFamily="34" charset="-122"/>
                 <a:cs typeface="Times New Roman" pitchFamily="34" charset="-120"/>
               </a:rPr>
-              <a:t>Yaya does not know why the rock peels off.</a:t>
+              <a:t>Yaya does not understand how a hard rock breaks without being carried away.</a:t>
             </a:r>
             <a:endParaRPr lang="en-US" sz="4000" dirty="0"/>
           </a:p>
@@ -6231,7 +6943,7 @@
                 <a:ea typeface="Times New Roman" pitchFamily="34" charset="-122"/>
                 <a:cs typeface="Times New Roman" pitchFamily="34" charset="-120"/>
               </a:rPr>
-              <a:t>When is the rock very hot?</a:t>
+              <a:t>What happens to the outer surface of the rock?</a:t>
             </a:r>
             <a:endParaRPr lang="en-US" sz="4000" dirty="0"/>
           </a:p>
@@ -6450,7 +7162,7 @@
                 <a:ea typeface="Times New Roman" pitchFamily="34" charset="-122"/>
                 <a:cs typeface="Times New Roman" pitchFamily="34" charset="-120"/>
               </a:rPr>
-              <a:t>At midday, in the dry season.</a:t>
+              <a:t>It peels off in thin layers.</a:t>
             </a:r>
             <a:endParaRPr lang="en-US" sz="4000" dirty="0"/>
           </a:p>
@@ -6669,7 +7381,7 @@
                 <a:ea typeface="Times New Roman" pitchFamily="34" charset="-122"/>
                 <a:cs typeface="Times New Roman" pitchFamily="34" charset="-120"/>
               </a:rPr>
-              <a:t>What happens at night?</a:t>
+              <a:t>What changes between midday and night?</a:t>
             </a:r>
             <a:endParaRPr lang="en-US" sz="4000" dirty="0"/>
           </a:p>
@@ -6888,7 +7600,7 @@
                 <a:ea typeface="Times New Roman" pitchFamily="34" charset="-122"/>
                 <a:cs typeface="Times New Roman" pitchFamily="34" charset="-120"/>
               </a:rPr>
-              <a:t>The rock cools down.</a:t>
+              <a:t>The temperature: the rock is hot by day and cool at night.</a:t>
             </a:r>
             <a:endParaRPr lang="en-US" sz="4000" dirty="0"/>
           </a:p>
@@ -7540,7 +8252,7 @@
                 <a:ea typeface="Times New Roman" pitchFamily="34" charset="-122"/>
                 <a:cs typeface="Times New Roman" pitchFamily="34" charset="-120"/>
               </a:rPr>
-              <a:t>Animation: heating by day, cooling at night.</a:t>
+              <a:t>Animation: heating by day, cooling by night.</a:t>
             </a:r>
             <a:endParaRPr lang="en-US" sz="1800" dirty="0"/>
           </a:p>
@@ -8787,7 +9499,7 @@
                 <a:ea typeface="Times New Roman" pitchFamily="34" charset="-122"/>
                 <a:cs typeface="Times New Roman" pitchFamily="34" charset="-120"/>
               </a:rPr>
-              <a:t>Round granite rocks in a hot, dry area.</a:t>
+              <a:t>Rounded granite rocks.</a:t>
             </a:r>
             <a:endParaRPr lang="en-US" sz="1800" dirty="0"/>
           </a:p>
@@ -9006,7 +9718,7 @@
                 <a:ea typeface="Times New Roman" pitchFamily="34" charset="-122"/>
                 <a:cs typeface="Times New Roman" pitchFamily="34" charset="-120"/>
               </a:rPr>
-              <a:t>These granite rocks lost their outer layers again and again. What do we call this peeling of rock?</a:t>
+              <a:t>What do we call this peeling of rock in curved layers?</a:t>
             </a:r>
             <a:endParaRPr lang="en-US" sz="4000" dirty="0"/>
           </a:p>
@@ -9337,7 +10049,7 @@
                 <a:ea typeface="Calibri" pitchFamily="34" charset="-122"/>
                 <a:cs typeface="Calibri" pitchFamily="34" charset="-120"/>
               </a:rPr>
-              <a:t>2. OTHER PROCESSES</a:t>
+              <a:t>5. PHYSICALLY INDUCED BIOLOGICAL WEATHERING</a:t>
             </a:r>
             <a:endParaRPr lang="en-US" sz="1400" dirty="0"/>
           </a:p>
@@ -9439,7 +10151,7 @@
                 <a:ea typeface="Times New Roman" pitchFamily="34" charset="-122"/>
                 <a:cs typeface="Times New Roman" pitchFamily="34" charset="-120"/>
               </a:rPr>
-              <a:t>Tree roots in a cracked rock.</a:t>
+              <a:t>Roots in a rock.</a:t>
             </a:r>
             <a:endParaRPr lang="en-US" sz="1800" dirty="0"/>
           </a:p>
@@ -9551,7 +10263,7 @@
                 <a:ea typeface="Calibri" pitchFamily="34" charset="-122"/>
                 <a:cs typeface="Calibri" pitchFamily="34" charset="-120"/>
               </a:rPr>
-              <a:t>2. OTHER PROCESSES</a:t>
+              <a:t>5. PHYSICALLY INDUCED BIOLOGICAL WEATHERING</a:t>
             </a:r>
             <a:endParaRPr lang="en-US" sz="1400" dirty="0"/>
           </a:p>
@@ -9770,7 +10482,7 @@
                 <a:ea typeface="Calibri" pitchFamily="34" charset="-122"/>
                 <a:cs typeface="Calibri" pitchFamily="34" charset="-120"/>
               </a:rPr>
-              <a:t>2. OTHER PROCESSES</a:t>
+              <a:t>5. PHYSICALLY INDUCED BIOLOGICAL WEATHERING</a:t>
             </a:r>
             <a:endParaRPr lang="en-US" sz="1400" dirty="0"/>
           </a:p>
@@ -10271,7 +10983,7 @@
         <p:spPr>
           <a:xfrm>
             <a:off x="0" y="658368"/>
-            <a:ext cx="3840480" cy="5833872"/>
+            <a:ext cx="5120640" cy="5833872"/>
           </a:xfrm>
           <a:prstGeom prst="rect">
             <a:avLst/>
@@ -10286,8 +10998,8 @@
         </p:nvSpPr>
         <p:spPr>
           <a:xfrm>
-            <a:off x="4069080" y="1005840"/>
-            <a:ext cx="7802575" cy="731520"/>
+            <a:off x="5349240" y="1005840"/>
+            <a:ext cx="6522415" cy="731520"/>
           </a:xfrm>
           <a:prstGeom prst="rect">
             <a:avLst/>
@@ -10327,8 +11039,8 @@
         </p:nvSpPr>
         <p:spPr>
           <a:xfrm>
-            <a:off x="4069080" y="1783080"/>
-            <a:ext cx="7802575" cy="4663440"/>
+            <a:off x="5349240" y="1783080"/>
+            <a:ext cx="6522415" cy="4663440"/>
           </a:xfrm>
           <a:prstGeom prst="rect">
             <a:avLst/>
@@ -10392,44 +11104,7 @@
                 <a:ea typeface="Times New Roman" pitchFamily="34" charset="-122"/>
                 <a:cs typeface="Times New Roman" pitchFamily="34" charset="-120"/>
               </a:rPr>
-              <a:t>It is the breaking of rocks into pieces without changing their minerals.</a:t>
-            </a:r>
-            <a:endParaRPr lang="en-US" sz="4000" dirty="0"/>
-          </a:p>
-          <a:p>
-            <a:pPr algn="l" indent="0" marL="0">
-              <a:spcAft>
-                <a:spcPts val="800"/>
-              </a:spcAft>
-              <a:buNone/>
-            </a:pPr>
-            <a:r>
-              <a:rPr lang="en-US" sz="4000" b="1" dirty="0">
-                <a:solidFill>
-                  <a:srgbClr val="111111"/>
-                </a:solidFill>
-                <a:latin typeface="Times New Roman" pitchFamily="34" charset="0"/>
-                <a:ea typeface="Times New Roman" pitchFamily="34" charset="-122"/>
-                <a:cs typeface="Times New Roman" pitchFamily="34" charset="-120"/>
-              </a:rPr>
-              <a:t>Exfoliation: </a:t>
-            </a:r>
-            <a:pPr algn="l" indent="0" marL="0">
-              <a:spcAft>
-                <a:spcPts val="800"/>
-              </a:spcAft>
-              <a:buNone/>
-            </a:pPr>
-            <a:r>
-              <a:rPr lang="en-US" sz="4000" dirty="0">
-                <a:solidFill>
-                  <a:srgbClr val="111111"/>
-                </a:solidFill>
-                <a:latin typeface="Times New Roman" pitchFamily="34" charset="0"/>
-                <a:ea typeface="Times New Roman" pitchFamily="34" charset="-122"/>
-                <a:cs typeface="Times New Roman" pitchFamily="34" charset="-120"/>
-              </a:rPr>
-              <a:t>It is the peeling of rock in thin, curved layers.</a:t>
+              <a:t>It is the breaking of rocks into smaller pieces without any change in their minerals.</a:t>
             </a:r>
             <a:endParaRPr lang="en-US" sz="4000" dirty="0"/>
           </a:p>
@@ -10564,7 +11239,7 @@
         <p:spPr>
           <a:xfrm>
             <a:off x="0" y="658368"/>
-            <a:ext cx="1463040" cy="5833872"/>
+            <a:ext cx="5120640" cy="5833872"/>
           </a:xfrm>
           <a:prstGeom prst="rect">
             <a:avLst/>
@@ -10579,8 +11254,8 @@
         </p:nvSpPr>
         <p:spPr>
           <a:xfrm>
-            <a:off x="1691640" y="1005840"/>
-            <a:ext cx="10180015" cy="731520"/>
+            <a:off x="5349240" y="1005840"/>
+            <a:ext cx="6522415" cy="731520"/>
           </a:xfrm>
           <a:prstGeom prst="rect">
             <a:avLst/>
@@ -10606,7 +11281,7 @@
                 <a:ea typeface="Times New Roman" pitchFamily="34" charset="-122"/>
                 <a:cs typeface="Times New Roman" pitchFamily="34" charset="-120"/>
               </a:rPr>
-              <a:t>1. Processes and Products of Physical Weathering</a:t>
+              <a:t>DEFINITIONS (continued)</a:t>
             </a:r>
             <a:endParaRPr lang="en-US" sz="3600" dirty="0"/>
           </a:p>
@@ -10620,8 +11295,8 @@
         </p:nvSpPr>
         <p:spPr>
           <a:xfrm>
-            <a:off x="1691640" y="1783080"/>
-            <a:ext cx="10180015" cy="4663440"/>
+            <a:off x="5349240" y="1783080"/>
+            <a:ext cx="6522415" cy="4663440"/>
           </a:xfrm>
           <a:prstGeom prst="rect">
             <a:avLst/>
@@ -10640,7 +11315,7 @@
               <a:buNone/>
             </a:pPr>
             <a:r>
-              <a:rPr lang="en-US" sz="4000" i="1" dirty="0">
+              <a:rPr lang="en-US" sz="4000" b="1" dirty="0">
                 <a:solidFill>
                   <a:srgbClr val="111111"/>
                 </a:solidFill>
@@ -10648,11 +11323,8 @@
                 <a:ea typeface="Times New Roman" pitchFamily="34" charset="-122"/>
                 <a:cs typeface="Times New Roman" pitchFamily="34" charset="-120"/>
               </a:rPr>
-              <a:t>Physical weathering takes place through the following processes:</a:t>
-            </a:r>
-            <a:endParaRPr lang="en-US" sz="4000" dirty="0"/>
-          </a:p>
-          <a:p>
+              <a:t>Exfoliation: </a:t>
+            </a:r>
             <a:pPr algn="l" indent="0" marL="0">
               <a:spcAft>
                 <a:spcPts val="800"/>
@@ -10660,7 +11332,7 @@
               <a:buNone/>
             </a:pPr>
             <a:r>
-              <a:rPr lang="en-US" sz="4000" b="1" dirty="0">
+              <a:rPr lang="en-US" sz="4000" dirty="0">
                 <a:solidFill>
                   <a:srgbClr val="111111"/>
                 </a:solidFill>
@@ -10668,61 +11340,7 @@
                 <a:ea typeface="Times New Roman" pitchFamily="34" charset="-122"/>
                 <a:cs typeface="Times New Roman" pitchFamily="34" charset="-120"/>
               </a:rPr>
-              <a:t>Thermal shattering: </a:t>
-            </a:r>
-            <a:pPr algn="l" indent="0" marL="0">
-              <a:spcAft>
-                <a:spcPts val="800"/>
-              </a:spcAft>
-              <a:buNone/>
-            </a:pPr>
-            <a:r>
-              <a:rPr lang="en-US" sz="4000" dirty="0">
-                <a:solidFill>
-                  <a:srgbClr val="111111"/>
-                </a:solidFill>
-                <a:latin typeface="Times New Roman" pitchFamily="34" charset="0"/>
-                <a:ea typeface="Times New Roman" pitchFamily="34" charset="-122"/>
-                <a:cs typeface="Times New Roman" pitchFamily="34" charset="-120"/>
-              </a:rPr>
-              <a:t>Daily heating and cooling make rocks expand and contract until they peel off (exfoliation).</a:t>
-            </a:r>
-            <a:endParaRPr lang="en-US" sz="4000" dirty="0"/>
-          </a:p>
-          <a:p>
-            <a:pPr algn="l" indent="0" marL="0">
-              <a:spcAft>
-                <a:spcPts val="800"/>
-              </a:spcAft>
-              <a:buNone/>
-            </a:pPr>
-            <a:r>
-              <a:rPr lang="en-US" sz="4000" b="1" dirty="0">
-                <a:solidFill>
-                  <a:srgbClr val="111111"/>
-                </a:solidFill>
-                <a:latin typeface="Times New Roman" pitchFamily="34" charset="0"/>
-                <a:ea typeface="Times New Roman" pitchFamily="34" charset="-122"/>
-                <a:cs typeface="Times New Roman" pitchFamily="34" charset="-120"/>
-              </a:rPr>
-              <a:t>Frost shattering: </a:t>
-            </a:r>
-            <a:pPr algn="l" indent="0" marL="0">
-              <a:spcAft>
-                <a:spcPts val="800"/>
-              </a:spcAft>
-              <a:buNone/>
-            </a:pPr>
-            <a:r>
-              <a:rPr lang="en-US" sz="4000" dirty="0">
-                <a:solidFill>
-                  <a:srgbClr val="111111"/>
-                </a:solidFill>
-                <a:latin typeface="Times New Roman" pitchFamily="34" charset="0"/>
-                <a:ea typeface="Times New Roman" pitchFamily="34" charset="-122"/>
-                <a:cs typeface="Times New Roman" pitchFamily="34" charset="-120"/>
-              </a:rPr>
-              <a:t>Water freezes in cracks, expands and breaks rocks into sharp pieces.</a:t>
+              <a:t>It is the peeling of rock in thin, curved layers, like the layers of an onion.</a:t>
             </a:r>
             <a:endParaRPr lang="en-US" sz="4000" dirty="0"/>
           </a:p>
@@ -11849,9 +12467,129 @@
           </a:p>
         </p:txBody>
       </p:sp>
+      <p:sp>
+        <p:nvSpPr>
+          <p:cNvPr id="3" name="Text 1"/>
+          <p:cNvSpPr/>
+          <p:nvPr/>
+        </p:nvSpPr>
+        <p:spPr>
+          <a:xfrm>
+            <a:off x="365760" y="1005840"/>
+            <a:ext cx="11460175" cy="731520"/>
+          </a:xfrm>
+          <a:prstGeom prst="rect">
+            <a:avLst/>
+          </a:prstGeom>
+          <a:noFill/>
+          <a:ln/>
+        </p:spPr>
+        <p:txBody>
+          <a:bodyPr wrap="square" lIns="0" tIns="0" rIns="0" bIns="0" rtlCol="0" anchor="ctr">
+            <a:normAutofit/>
+          </a:bodyPr>
+          <a:lstStyle/>
+          <a:p>
+            <a:pPr algn="ctr" indent="0" marL="0">
+              <a:buNone/>
+            </a:pPr>
+            <a:r>
+              <a:rPr lang="en-US" sz="3600" b="1" dirty="0">
+                <a:solidFill>
+                  <a:srgbClr val="990011"/>
+                </a:solidFill>
+                <a:latin typeface="Times New Roman" pitchFamily="34" charset="0"/>
+                <a:ea typeface="Times New Roman" pitchFamily="34" charset="-122"/>
+                <a:cs typeface="Times New Roman" pitchFamily="34" charset="-120"/>
+              </a:rPr>
+              <a:t>1. Thermal Shattering</a:t>
+            </a:r>
+            <a:endParaRPr lang="en-US" sz="3600" dirty="0"/>
+          </a:p>
+        </p:txBody>
+      </p:sp>
+      <p:sp>
+        <p:nvSpPr>
+          <p:cNvPr id="4" name="Text 2"/>
+          <p:cNvSpPr/>
+          <p:nvPr/>
+        </p:nvSpPr>
+        <p:spPr>
+          <a:xfrm>
+            <a:off x="365760" y="1783080"/>
+            <a:ext cx="4846320" cy="4617720"/>
+          </a:xfrm>
+          <a:prstGeom prst="rect">
+            <a:avLst/>
+          </a:prstGeom>
+          <a:noFill/>
+          <a:ln/>
+        </p:spPr>
+        <p:txBody>
+          <a:bodyPr wrap="square" lIns="0" tIns="0" rIns="0" bIns="0" rtlCol="0" anchor="t"/>
+          <a:lstStyle/>
+          <a:p>
+            <a:pPr algn="l" indent="0" marL="0">
+              <a:spcAft>
+                <a:spcPts val="800"/>
+              </a:spcAft>
+              <a:buNone/>
+            </a:pPr>
+            <a:r>
+              <a:rPr lang="en-US" sz="3200" i="1" dirty="0">
+                <a:solidFill>
+                  <a:srgbClr val="111111"/>
+                </a:solidFill>
+                <a:latin typeface="Times New Roman" pitchFamily="34" charset="0"/>
+                <a:ea typeface="Times New Roman" pitchFamily="34" charset="-122"/>
+                <a:cs typeface="Times New Roman" pitchFamily="34" charset="-120"/>
+              </a:rPr>
+              <a:t>Thermal shattering works as follows:</a:t>
+            </a:r>
+            <a:endParaRPr lang="en-US" sz="3200" dirty="0"/>
+          </a:p>
+          <a:p>
+            <a:pPr algn="l" indent="0" marL="0">
+              <a:spcAft>
+                <a:spcPts val="800"/>
+              </a:spcAft>
+              <a:buNone/>
+            </a:pPr>
+            <a:r>
+              <a:rPr lang="en-US" sz="3200" b="1" dirty="0">
+                <a:solidFill>
+                  <a:srgbClr val="111111"/>
+                </a:solidFill>
+                <a:latin typeface="Times New Roman" pitchFamily="34" charset="0"/>
+                <a:ea typeface="Times New Roman" pitchFamily="34" charset="-122"/>
+                <a:cs typeface="Times New Roman" pitchFamily="34" charset="-120"/>
+              </a:rPr>
+              <a:t>Process: </a:t>
+            </a:r>
+            <a:pPr algn="l" indent="0" marL="0">
+              <a:spcAft>
+                <a:spcPts val="800"/>
+              </a:spcAft>
+              <a:buNone/>
+            </a:pPr>
+            <a:r>
+              <a:rPr lang="en-US" sz="3200" dirty="0">
+                <a:solidFill>
+                  <a:srgbClr val="111111"/>
+                </a:solidFill>
+                <a:latin typeface="Times New Roman" pitchFamily="34" charset="0"/>
+                <a:ea typeface="Times New Roman" pitchFamily="34" charset="-122"/>
+                <a:cs typeface="Times New Roman" pitchFamily="34" charset="-120"/>
+              </a:rPr>
+              <a:t>By day the Sun heats the outer layer of the rock, which expands, and at night it cools and contracts. After many years, the outer layer cracks and peels off.</a:t>
+            </a:r>
+            <a:endParaRPr lang="en-US" sz="3200" dirty="0"/>
+          </a:p>
+        </p:txBody>
+      </p:sp>
       <p:pic>
         <p:nvPicPr>
-          <p:cNvPr id="3" name="Image 0" descr="/home/claude/f4/img/minesec_sheet.png">    </p:cNvPr>
+          <p:cNvPr id="5" name="Image 0" descr="/home/claude/f4/img/v2/exfoliation_last.png">    </p:cNvPr>
           <p:cNvPicPr>
             <a:picLocks noChangeAspect="1"/>
           </p:cNvPicPr>
@@ -11865,8 +12603,8 @@
         </p:blipFill>
         <p:spPr>
           <a:xfrm>
-            <a:off x="0" y="658368"/>
-            <a:ext cx="1463040" cy="5833872"/>
+            <a:off x="5349240" y="2617506"/>
+            <a:ext cx="6659575" cy="2601397"/>
           </a:xfrm>
           <a:prstGeom prst="rect">
             <a:avLst/>
@@ -11875,14 +12613,14 @@
       </p:pic>
       <p:sp>
         <p:nvSpPr>
-          <p:cNvPr id="4" name="Text 1"/>
+          <p:cNvPr id="6" name="Text 3"/>
           <p:cNvSpPr/>
           <p:nvPr/>
         </p:nvSpPr>
         <p:spPr>
           <a:xfrm>
-            <a:off x="1691640" y="1005840"/>
-            <a:ext cx="10180015" cy="731520"/>
+            <a:off x="5349240" y="6089904"/>
+            <a:ext cx="6659575" cy="347472"/>
           </a:xfrm>
           <a:prstGeom prst="rect">
             <a:avLst/>
@@ -11891,159 +12629,24 @@
           <a:ln/>
         </p:spPr>
         <p:txBody>
-          <a:bodyPr wrap="square" lIns="0" tIns="0" rIns="0" bIns="0" rtlCol="0" anchor="ctr">
-            <a:normAutofit/>
-          </a:bodyPr>
+          <a:bodyPr wrap="square" lIns="0" tIns="0" rIns="0" bIns="0" rtlCol="0" anchor="ctr"/>
           <a:lstStyle/>
           <a:p>
             <a:pPr algn="ctr" indent="0" marL="0">
               <a:buNone/>
             </a:pPr>
             <a:r>
-              <a:rPr lang="en-US" sz="3600" b="1" dirty="0">
-                <a:solidFill>
-                  <a:srgbClr val="990011"/>
+              <a:rPr lang="en-US" sz="1600" i="1" dirty="0">
+                <a:solidFill>
+                  <a:srgbClr val="555555"/>
                 </a:solidFill>
                 <a:latin typeface="Times New Roman" pitchFamily="34" charset="0"/>
                 <a:ea typeface="Times New Roman" pitchFamily="34" charset="-122"/>
                 <a:cs typeface="Times New Roman" pitchFamily="34" charset="-120"/>
               </a:rPr>
-              <a:t>1. Processes and Products of Physical Weathering (continued)</a:t>
-            </a:r>
-            <a:endParaRPr lang="en-US" sz="3600" dirty="0"/>
-          </a:p>
-        </p:txBody>
-      </p:sp>
-      <p:sp>
-        <p:nvSpPr>
-          <p:cNvPr id="5" name="Text 2"/>
-          <p:cNvSpPr/>
-          <p:nvPr/>
-        </p:nvSpPr>
-        <p:spPr>
-          <a:xfrm>
-            <a:off x="1691640" y="1783080"/>
-            <a:ext cx="10180015" cy="4663440"/>
-          </a:xfrm>
-          <a:prstGeom prst="rect">
-            <a:avLst/>
-          </a:prstGeom>
-          <a:noFill/>
-          <a:ln/>
-        </p:spPr>
-        <p:txBody>
-          <a:bodyPr wrap="square" lIns="0" tIns="0" rIns="0" bIns="0" rtlCol="0" anchor="t"/>
-          <a:lstStyle/>
-          <a:p>
-            <a:pPr algn="l" indent="0" marL="0">
-              <a:spcAft>
-                <a:spcPts val="800"/>
-              </a:spcAft>
-              <a:buNone/>
-            </a:pPr>
-            <a:r>
-              <a:rPr lang="en-US" sz="4000" b="1" dirty="0">
-                <a:solidFill>
-                  <a:srgbClr val="111111"/>
-                </a:solidFill>
-                <a:latin typeface="Times New Roman" pitchFamily="34" charset="0"/>
-                <a:ea typeface="Times New Roman" pitchFamily="34" charset="-122"/>
-                <a:cs typeface="Times New Roman" pitchFamily="34" charset="-120"/>
-              </a:rPr>
-              <a:t>Wetting and drying: </a:t>
-            </a:r>
-            <a:pPr algn="l" indent="0" marL="0">
-              <a:spcAft>
-                <a:spcPts val="800"/>
-              </a:spcAft>
-              <a:buNone/>
-            </a:pPr>
-            <a:r>
-              <a:rPr lang="en-US" sz="4000" dirty="0">
-                <a:solidFill>
-                  <a:srgbClr val="111111"/>
-                </a:solidFill>
-                <a:latin typeface="Times New Roman" pitchFamily="34" charset="0"/>
-                <a:ea typeface="Times New Roman" pitchFamily="34" charset="-122"/>
-                <a:cs typeface="Times New Roman" pitchFamily="34" charset="-120"/>
-              </a:rPr>
-              <a:t>Clay rocks swell when wet and shrink when dry, so they crumble.</a:t>
-            </a:r>
-            <a:endParaRPr lang="en-US" sz="4000" dirty="0"/>
-          </a:p>
-          <a:p>
-            <a:pPr algn="l" indent="0" marL="0">
-              <a:spcAft>
-                <a:spcPts val="800"/>
-              </a:spcAft>
-              <a:buNone/>
-            </a:pPr>
-            <a:r>
-              <a:rPr lang="en-US" sz="4000" b="1" dirty="0">
-                <a:solidFill>
-                  <a:srgbClr val="111111"/>
-                </a:solidFill>
-                <a:latin typeface="Times New Roman" pitchFamily="34" charset="0"/>
-                <a:ea typeface="Times New Roman" pitchFamily="34" charset="-122"/>
-                <a:cs typeface="Times New Roman" pitchFamily="34" charset="-120"/>
-              </a:rPr>
-              <a:t>Pressure release: </a:t>
-            </a:r>
-            <a:pPr algn="l" indent="0" marL="0">
-              <a:spcAft>
-                <a:spcPts val="800"/>
-              </a:spcAft>
-              <a:buNone/>
-            </a:pPr>
-            <a:r>
-              <a:rPr lang="en-US" sz="4000" dirty="0">
-                <a:solidFill>
-                  <a:srgbClr val="111111"/>
-                </a:solidFill>
-                <a:latin typeface="Times New Roman" pitchFamily="34" charset="0"/>
-                <a:ea typeface="Times New Roman" pitchFamily="34" charset="-122"/>
-                <a:cs typeface="Times New Roman" pitchFamily="34" charset="-120"/>
-              </a:rPr>
-              <a:t>When overlying rocks are removed, granite cracks in layers parallel to the surface.</a:t>
-            </a:r>
-            <a:endParaRPr lang="en-US" sz="4000" dirty="0"/>
-          </a:p>
-          <a:p>
-            <a:pPr algn="l" indent="0" marL="0">
-              <a:spcAft>
-                <a:spcPts val="800"/>
-              </a:spcAft>
-              <a:buNone/>
-            </a:pPr>
-            <a:r>
-              <a:rPr lang="en-US" sz="4000" b="1" dirty="0">
-                <a:solidFill>
-                  <a:srgbClr val="111111"/>
-                </a:solidFill>
-                <a:latin typeface="Times New Roman" pitchFamily="34" charset="0"/>
-                <a:ea typeface="Times New Roman" pitchFamily="34" charset="-122"/>
-                <a:cs typeface="Times New Roman" pitchFamily="34" charset="-120"/>
-              </a:rPr>
-              <a:t>Biological action: </a:t>
-            </a:r>
-            <a:pPr algn="l" indent="0" marL="0">
-              <a:spcAft>
-                <a:spcPts val="800"/>
-              </a:spcAft>
-              <a:buNone/>
-            </a:pPr>
-            <a:r>
-              <a:rPr lang="en-US" sz="4000" dirty="0">
-                <a:solidFill>
-                  <a:srgbClr val="111111"/>
-                </a:solidFill>
-                <a:latin typeface="Times New Roman" pitchFamily="34" charset="0"/>
-                <a:ea typeface="Times New Roman" pitchFamily="34" charset="-122"/>
-                <a:cs typeface="Times New Roman" pitchFamily="34" charset="-120"/>
-              </a:rPr>
-              <a:t>Roots and burrowing animals widen cracks and break rocks.</a:t>
-            </a:r>
-            <a:endParaRPr lang="en-US" sz="4000" dirty="0"/>
+              <a:t>Illustration: exfoliation</a:t>
+            </a:r>
+            <a:endParaRPr lang="en-US" sz="1600" dirty="0"/>
           </a:p>
         </p:txBody>
       </p:sp>
@@ -12167,8 +12770,8 @@
         </p:nvSpPr>
         <p:spPr>
           <a:xfrm>
-            <a:off x="457200" y="1005840"/>
-            <a:ext cx="11277295" cy="731520"/>
+            <a:off x="365760" y="1005840"/>
+            <a:ext cx="11460175" cy="731520"/>
           </a:xfrm>
           <a:prstGeom prst="rect">
             <a:avLst/>
@@ -12177,7 +12780,9 @@
           <a:ln/>
         </p:spPr>
         <p:txBody>
-          <a:bodyPr wrap="square" lIns="0" tIns="0" rIns="0" bIns="0" rtlCol="0" anchor="ctr"/>
+          <a:bodyPr wrap="square" lIns="0" tIns="0" rIns="0" bIns="0" rtlCol="0" anchor="ctr">
+            <a:normAutofit/>
+          </a:bodyPr>
           <a:lstStyle/>
           <a:p>
             <a:pPr algn="ctr" indent="0" marL="0">
@@ -12192,7 +12797,66 @@
                 <a:ea typeface="Times New Roman" pitchFamily="34" charset="-122"/>
                 <a:cs typeface="Times New Roman" pitchFamily="34" charset="-120"/>
               </a:rPr>
-              <a:t>1. Processes and Products of Physical Weathering</a:t>
+              <a:t>1. Thermal Shattering</a:t>
+            </a:r>
+            <a:endParaRPr lang="en-US" sz="3600" dirty="0"/>
+          </a:p>
+        </p:txBody>
+      </p:sp>
+      <p:sp>
+        <p:nvSpPr>
+          <p:cNvPr id="4" name="Text 2"/>
+          <p:cNvSpPr/>
+          <p:nvPr/>
+        </p:nvSpPr>
+        <p:spPr>
+          <a:xfrm>
+            <a:off x="365760" y="1783080"/>
+            <a:ext cx="4846320" cy="4617720"/>
+          </a:xfrm>
+          <a:prstGeom prst="rect">
+            <a:avLst/>
+          </a:prstGeom>
+          <a:noFill/>
+          <a:ln/>
+        </p:spPr>
+        <p:txBody>
+          <a:bodyPr wrap="square" lIns="0" tIns="0" rIns="0" bIns="0" rtlCol="0" anchor="t"/>
+          <a:lstStyle/>
+          <a:p>
+            <a:pPr algn="l" indent="0" marL="0">
+              <a:spcAft>
+                <a:spcPts val="800"/>
+              </a:spcAft>
+              <a:buNone/>
+            </a:pPr>
+            <a:r>
+              <a:rPr lang="en-US" sz="3600" b="1" dirty="0">
+                <a:solidFill>
+                  <a:srgbClr val="111111"/>
+                </a:solidFill>
+                <a:latin typeface="Times New Roman" pitchFamily="34" charset="0"/>
+                <a:ea typeface="Times New Roman" pitchFamily="34" charset="-122"/>
+                <a:cs typeface="Times New Roman" pitchFamily="34" charset="-120"/>
+              </a:rPr>
+              <a:t>Products: </a:t>
+            </a:r>
+            <a:pPr algn="l" indent="0" marL="0">
+              <a:spcAft>
+                <a:spcPts val="800"/>
+              </a:spcAft>
+              <a:buNone/>
+            </a:pPr>
+            <a:r>
+              <a:rPr lang="en-US" sz="3600" dirty="0">
+                <a:solidFill>
+                  <a:srgbClr val="111111"/>
+                </a:solidFill>
+                <a:latin typeface="Times New Roman" pitchFamily="34" charset="0"/>
+                <a:ea typeface="Times New Roman" pitchFamily="34" charset="-122"/>
+                <a:cs typeface="Times New Roman" pitchFamily="34" charset="-120"/>
+              </a:rPr>
+              <a:t>Curved sheets of rock (exfoliation), rounded rocks called exfoliation domes, and angular pieces (block disintegration).</a:t>
             </a:r>
             <a:endParaRPr lang="en-US" sz="3600" dirty="0"/>
           </a:p>
@@ -12200,7 +12864,7 @@
       </p:sp>
       <p:pic>
         <p:nvPicPr>
-          <p:cNvPr id="4" name="Image 0" descr="/home/claude/f4/img/v2/exfoliation_last.png">    </p:cNvPr>
+          <p:cNvPr id="5" name="Image 0" descr="/home/claude/f4/img/v2/f4_granite.jpg">    </p:cNvPr>
           <p:cNvPicPr>
             <a:picLocks noChangeAspect="1"/>
           </p:cNvPicPr>
@@ -12214,8 +12878,8 @@
         </p:blipFill>
         <p:spPr>
           <a:xfrm>
-            <a:off x="629930" y="1783080"/>
-            <a:ext cx="10931835" cy="4270248"/>
+            <a:off x="5349240" y="2071212"/>
+            <a:ext cx="6659575" cy="3693983"/>
           </a:xfrm>
           <a:prstGeom prst="rect">
             <a:avLst/>
@@ -12224,14 +12888,14 @@
       </p:pic>
       <p:sp>
         <p:nvSpPr>
-          <p:cNvPr id="5" name="Text 2"/>
+          <p:cNvPr id="6" name="Text 3"/>
           <p:cNvSpPr/>
           <p:nvPr/>
         </p:nvSpPr>
         <p:spPr>
           <a:xfrm>
-            <a:off x="457200" y="6089904"/>
-            <a:ext cx="11277295" cy="347472"/>
+            <a:off x="5349240" y="6089904"/>
+            <a:ext cx="6659575" cy="347472"/>
           </a:xfrm>
           <a:prstGeom prst="rect">
             <a:avLst/>
@@ -12247,7 +12911,7 @@
               <a:buNone/>
             </a:pPr>
             <a:r>
-              <a:rPr lang="en-US" sz="1800" i="1" dirty="0">
+              <a:rPr lang="en-US" sz="1600" i="1" dirty="0">
                 <a:solidFill>
                   <a:srgbClr val="555555"/>
                 </a:solidFill>
@@ -12255,9 +12919,9 @@
                 <a:ea typeface="Times New Roman" pitchFamily="34" charset="-122"/>
                 <a:cs typeface="Times New Roman" pitchFamily="34" charset="-120"/>
               </a:rPr>
-              <a:t>Illustration: exfoliation</a:t>
-            </a:r>
-            <a:endParaRPr lang="en-US" sz="1800" dirty="0"/>
+              <a:t>Illustration: rounded granite rocks</a:t>
+            </a:r>
+            <a:endParaRPr lang="en-US" sz="1600" dirty="0"/>
           </a:p>
         </p:txBody>
       </p:sp>
@@ -12367,15 +13031,135 @@
                 <a:ea typeface="Calibri" pitchFamily="34" charset="-122"/>
                 <a:cs typeface="Calibri" pitchFamily="34" charset="-120"/>
               </a:rPr>
-              <a:t>FORMATIVE EVALUATION</a:t>
+              <a:t>BOARD SUMMARY</a:t>
             </a:r>
             <a:endParaRPr lang="en-US" sz="1400" dirty="0"/>
+          </a:p>
+        </p:txBody>
+      </p:sp>
+      <p:sp>
+        <p:nvSpPr>
+          <p:cNvPr id="3" name="Text 1"/>
+          <p:cNvSpPr/>
+          <p:nvPr/>
+        </p:nvSpPr>
+        <p:spPr>
+          <a:xfrm>
+            <a:off x="365760" y="1005840"/>
+            <a:ext cx="11460175" cy="731520"/>
+          </a:xfrm>
+          <a:prstGeom prst="rect">
+            <a:avLst/>
+          </a:prstGeom>
+          <a:noFill/>
+          <a:ln/>
+        </p:spPr>
+        <p:txBody>
+          <a:bodyPr wrap="square" lIns="0" tIns="0" rIns="0" bIns="0" rtlCol="0" anchor="ctr">
+            <a:normAutofit/>
+          </a:bodyPr>
+          <a:lstStyle/>
+          <a:p>
+            <a:pPr algn="ctr" indent="0" marL="0">
+              <a:buNone/>
+            </a:pPr>
+            <a:r>
+              <a:rPr lang="en-US" sz="3600" b="1" dirty="0">
+                <a:solidFill>
+                  <a:srgbClr val="990011"/>
+                </a:solidFill>
+                <a:latin typeface="Times New Roman" pitchFamily="34" charset="0"/>
+                <a:ea typeface="Times New Roman" pitchFamily="34" charset="-122"/>
+                <a:cs typeface="Times New Roman" pitchFamily="34" charset="-120"/>
+              </a:rPr>
+              <a:t>2. Frost Shattering</a:t>
+            </a:r>
+            <a:endParaRPr lang="en-US" sz="3600" dirty="0"/>
+          </a:p>
+        </p:txBody>
+      </p:sp>
+      <p:sp>
+        <p:nvSpPr>
+          <p:cNvPr id="4" name="Text 2"/>
+          <p:cNvSpPr/>
+          <p:nvPr/>
+        </p:nvSpPr>
+        <p:spPr>
+          <a:xfrm>
+            <a:off x="365760" y="1783080"/>
+            <a:ext cx="4846320" cy="4617720"/>
+          </a:xfrm>
+          <a:prstGeom prst="rect">
+            <a:avLst/>
+          </a:prstGeom>
+          <a:noFill/>
+          <a:ln/>
+        </p:spPr>
+        <p:txBody>
+          <a:bodyPr wrap="square" lIns="0" tIns="0" rIns="0" bIns="0" rtlCol="0" anchor="t"/>
+          <a:lstStyle/>
+          <a:p>
+            <a:pPr algn="l" indent="0" marL="0">
+              <a:spcAft>
+                <a:spcPts val="800"/>
+              </a:spcAft>
+              <a:buNone/>
+            </a:pPr>
+            <a:r>
+              <a:rPr lang="en-US" sz="3600" i="1" dirty="0">
+                <a:solidFill>
+                  <a:srgbClr val="111111"/>
+                </a:solidFill>
+                <a:latin typeface="Times New Roman" pitchFamily="34" charset="0"/>
+                <a:ea typeface="Times New Roman" pitchFamily="34" charset="-122"/>
+                <a:cs typeface="Times New Roman" pitchFamily="34" charset="-120"/>
+              </a:rPr>
+              <a:t>Frost shattering works as follows:</a:t>
+            </a:r>
+            <a:endParaRPr lang="en-US" sz="3600" dirty="0"/>
+          </a:p>
+          <a:p>
+            <a:pPr algn="l" indent="0" marL="0">
+              <a:spcAft>
+                <a:spcPts val="800"/>
+              </a:spcAft>
+              <a:buNone/>
+            </a:pPr>
+            <a:r>
+              <a:rPr lang="en-US" sz="3600" b="1" dirty="0">
+                <a:solidFill>
+                  <a:srgbClr val="111111"/>
+                </a:solidFill>
+                <a:latin typeface="Times New Roman" pitchFamily="34" charset="0"/>
+                <a:ea typeface="Times New Roman" pitchFamily="34" charset="-122"/>
+                <a:cs typeface="Times New Roman" pitchFamily="34" charset="-120"/>
+              </a:rPr>
+              <a:t>Process: </a:t>
+            </a:r>
+            <a:pPr algn="l" indent="0" marL="0">
+              <a:spcAft>
+                <a:spcPts val="800"/>
+              </a:spcAft>
+              <a:buNone/>
+            </a:pPr>
+            <a:r>
+              <a:rPr lang="en-US" sz="3600" dirty="0">
+                <a:solidFill>
+                  <a:srgbClr val="111111"/>
+                </a:solidFill>
+                <a:latin typeface="Times New Roman" pitchFamily="34" charset="0"/>
+                <a:ea typeface="Times New Roman" pitchFamily="34" charset="-122"/>
+                <a:cs typeface="Times New Roman" pitchFamily="34" charset="-120"/>
+              </a:rPr>
+              <a:t>Water enters cracks and freezes at night; ice takes more space than water, so it widens the cracks until the rock breaks.</a:t>
+            </a:r>
+            <a:endParaRPr lang="en-US" sz="3600" dirty="0"/>
           </a:p>
         </p:txBody>
       </p:sp>
       <p:pic>
         <p:nvPicPr>
-          <p:cNvPr id="3" name="Image 0" descr="/home/claude/f4/img/minesec_sheet.png">    </p:cNvPr>
+          <p:cNvPr id="5" name="Image 0" descr="/home/claude/f4/img/v2/lsa_frost.jpg">    </p:cNvPr>
           <p:cNvPicPr>
             <a:picLocks noChangeAspect="1"/>
           </p:cNvPicPr>
@@ -12389,8 +13173,8 @@
         </p:blipFill>
         <p:spPr>
           <a:xfrm>
-            <a:off x="0" y="658368"/>
-            <a:ext cx="5120640" cy="5833872"/>
+            <a:off x="5349240" y="2071212"/>
+            <a:ext cx="6659575" cy="3693983"/>
           </a:xfrm>
           <a:prstGeom prst="rect">
             <a:avLst/>
@@ -12399,14 +13183,14 @@
       </p:pic>
       <p:sp>
         <p:nvSpPr>
-          <p:cNvPr id="4" name="Text 1"/>
+          <p:cNvPr id="6" name="Text 3"/>
           <p:cNvSpPr/>
           <p:nvPr/>
         </p:nvSpPr>
         <p:spPr>
           <a:xfrm>
-            <a:off x="5349240" y="1005840"/>
-            <a:ext cx="6522415" cy="731520"/>
+            <a:off x="5349240" y="6089904"/>
+            <a:ext cx="6659575" cy="347472"/>
           </a:xfrm>
           <a:prstGeom prst="rect">
             <a:avLst/>
@@ -12415,68 +13199,24 @@
           <a:ln/>
         </p:spPr>
         <p:txBody>
-          <a:bodyPr wrap="square" lIns="0" tIns="0" rIns="0" bIns="0" rtlCol="0" anchor="ctr">
-            <a:normAutofit/>
-          </a:bodyPr>
+          <a:bodyPr wrap="square" lIns="0" tIns="0" rIns="0" bIns="0" rtlCol="0" anchor="ctr"/>
           <a:lstStyle/>
           <a:p>
             <a:pPr algn="ctr" indent="0" marL="0">
               <a:buNone/>
             </a:pPr>
             <a:r>
-              <a:rPr lang="en-US" sz="3600" b="1" dirty="0">
-                <a:solidFill>
-                  <a:srgbClr val="990011"/>
+              <a:rPr lang="en-US" sz="1600" i="1" dirty="0">
+                <a:solidFill>
+                  <a:srgbClr val="555555"/>
                 </a:solidFill>
                 <a:latin typeface="Times New Roman" pitchFamily="34" charset="0"/>
                 <a:ea typeface="Times New Roman" pitchFamily="34" charset="-122"/>
                 <a:cs typeface="Times New Roman" pitchFamily="34" charset="-120"/>
               </a:rPr>
-              <a:t>Evaluation 1</a:t>
-            </a:r>
-            <a:endParaRPr lang="en-US" sz="3600" dirty="0"/>
-          </a:p>
-        </p:txBody>
-      </p:sp>
-      <p:sp>
-        <p:nvSpPr>
-          <p:cNvPr id="5" name="Text 2"/>
-          <p:cNvSpPr/>
-          <p:nvPr/>
-        </p:nvSpPr>
-        <p:spPr>
-          <a:xfrm>
-            <a:off x="5349240" y="1783080"/>
-            <a:ext cx="6522415" cy="4663440"/>
-          </a:xfrm>
-          <a:prstGeom prst="rect">
-            <a:avLst/>
-          </a:prstGeom>
-          <a:noFill/>
-          <a:ln/>
-        </p:spPr>
-        <p:txBody>
-          <a:bodyPr wrap="square" lIns="0" tIns="0" rIns="0" bIns="0" rtlCol="0" anchor="t"/>
-          <a:lstStyle/>
-          <a:p>
-            <a:pPr algn="l" indent="0" marL="0">
-              <a:spcAft>
-                <a:spcPts val="800"/>
-              </a:spcAft>
-              <a:buNone/>
-            </a:pPr>
-            <a:r>
-              <a:rPr lang="en-US" sz="4000" dirty="0">
-                <a:solidFill>
-                  <a:srgbClr val="111111"/>
-                </a:solidFill>
-                <a:latin typeface="Times New Roman" pitchFamily="34" charset="0"/>
-                <a:ea typeface="Times New Roman" pitchFamily="34" charset="-122"/>
-                <a:cs typeface="Times New Roman" pitchFamily="34" charset="-120"/>
-              </a:rPr>
-              <a:t>Why does granite peel off in hot deserts?</a:t>
-            </a:r>
-            <a:endParaRPr lang="en-US" sz="4000" dirty="0"/>
+              <a:t>Illustration: frost on rock</a:t>
+            </a:r>
+            <a:endParaRPr lang="en-US" sz="1600" dirty="0"/>
           </a:p>
         </p:txBody>
       </p:sp>
@@ -12586,7 +13326,7 @@
                 <a:ea typeface="Calibri" pitchFamily="34" charset="-122"/>
                 <a:cs typeface="Calibri" pitchFamily="34" charset="-120"/>
               </a:rPr>
-              <a:t>FORMATIVE EVALUATION</a:t>
+              <a:t>BOARD SUMMARY</a:t>
             </a:r>
             <a:endParaRPr lang="en-US" sz="1400" dirty="0"/>
           </a:p>
@@ -12651,7 +13391,7 @@
                 <a:ea typeface="Times New Roman" pitchFamily="34" charset="-122"/>
                 <a:cs typeface="Times New Roman" pitchFamily="34" charset="-120"/>
               </a:rPr>
-              <a:t>Expected Answer</a:t>
+              <a:t>2. Frost Shattering</a:t>
             </a:r>
             <a:endParaRPr lang="en-US" sz="3600" dirty="0"/>
           </a:p>
@@ -12685,7 +13425,7 @@
               <a:buNone/>
             </a:pPr>
             <a:r>
-              <a:rPr lang="en-US" sz="4000" dirty="0">
+              <a:rPr lang="en-US" sz="4000" b="1" dirty="0">
                 <a:solidFill>
                   <a:srgbClr val="111111"/>
                 </a:solidFill>
@@ -12693,7 +13433,24 @@
                 <a:ea typeface="Times New Roman" pitchFamily="34" charset="-122"/>
                 <a:cs typeface="Times New Roman" pitchFamily="34" charset="-120"/>
               </a:rPr>
-              <a:t>It gets hot by day and cold at night, again and again.</a:t>
+              <a:t>Products: </a:t>
+            </a:r>
+            <a:pPr algn="l" indent="0" marL="0">
+              <a:spcAft>
+                <a:spcPts val="800"/>
+              </a:spcAft>
+              <a:buNone/>
+            </a:pPr>
+            <a:r>
+              <a:rPr lang="en-US" sz="4000" dirty="0">
+                <a:solidFill>
+                  <a:srgbClr val="111111"/>
+                </a:solidFill>
+                <a:latin typeface="Times New Roman" pitchFamily="34" charset="0"/>
+                <a:ea typeface="Times New Roman" pitchFamily="34" charset="-122"/>
+                <a:cs typeface="Times New Roman" pitchFamily="34" charset="-120"/>
+              </a:rPr>
+              <a:t>Sharp, angular pieces of rock that collect at the foot of slopes as scree, in cold mountains.</a:t>
             </a:r>
             <a:endParaRPr lang="en-US" sz="4000" dirty="0"/>
           </a:p>
@@ -12805,7 +13562,7 @@
                 <a:ea typeface="Calibri" pitchFamily="34" charset="-122"/>
                 <a:cs typeface="Calibri" pitchFamily="34" charset="-120"/>
               </a:rPr>
-              <a:t>FORMATIVE EVALUATION</a:t>
+              <a:t>BOARD SUMMARY</a:t>
             </a:r>
             <a:endParaRPr lang="en-US" sz="1400" dirty="0"/>
           </a:p>
@@ -12870,7 +13627,7 @@
                 <a:ea typeface="Times New Roman" pitchFamily="34" charset="-122"/>
                 <a:cs typeface="Times New Roman" pitchFamily="34" charset="-120"/>
               </a:rPr>
-              <a:t>Evaluation 2</a:t>
+              <a:t>3. Alternate Wetting and Drying (Slaking)</a:t>
             </a:r>
             <a:endParaRPr lang="en-US" sz="3600" dirty="0"/>
           </a:p>
@@ -12904,7 +13661,7 @@
               <a:buNone/>
             </a:pPr>
             <a:r>
-              <a:rPr lang="en-US" sz="4000" dirty="0">
+              <a:rPr lang="en-US" sz="4000" i="1" dirty="0">
                 <a:solidFill>
                   <a:srgbClr val="111111"/>
                 </a:solidFill>
@@ -12912,7 +13669,44 @@
                 <a:ea typeface="Times New Roman" pitchFamily="34" charset="-122"/>
                 <a:cs typeface="Times New Roman" pitchFamily="34" charset="-120"/>
               </a:rPr>
-              <a:t>How do roots break rocks?</a:t>
+              <a:t>Alternate wetting and drying works as follows:</a:t>
+            </a:r>
+            <a:endParaRPr lang="en-US" sz="4000" dirty="0"/>
+          </a:p>
+          <a:p>
+            <a:pPr algn="l" indent="0" marL="0">
+              <a:spcAft>
+                <a:spcPts val="800"/>
+              </a:spcAft>
+              <a:buNone/>
+            </a:pPr>
+            <a:r>
+              <a:rPr lang="en-US" sz="4000" b="1" dirty="0">
+                <a:solidFill>
+                  <a:srgbClr val="111111"/>
+                </a:solidFill>
+                <a:latin typeface="Times New Roman" pitchFamily="34" charset="0"/>
+                <a:ea typeface="Times New Roman" pitchFamily="34" charset="-122"/>
+                <a:cs typeface="Times New Roman" pitchFamily="34" charset="-120"/>
+              </a:rPr>
+              <a:t>Process: </a:t>
+            </a:r>
+            <a:pPr algn="l" indent="0" marL="0">
+              <a:spcAft>
+                <a:spcPts val="800"/>
+              </a:spcAft>
+              <a:buNone/>
+            </a:pPr>
+            <a:r>
+              <a:rPr lang="en-US" sz="4000" dirty="0">
+                <a:solidFill>
+                  <a:srgbClr val="111111"/>
+                </a:solidFill>
+                <a:latin typeface="Times New Roman" pitchFamily="34" charset="0"/>
+                <a:ea typeface="Times New Roman" pitchFamily="34" charset="-122"/>
+                <a:cs typeface="Times New Roman" pitchFamily="34" charset="-120"/>
+              </a:rPr>
+              <a:t>Clay rocks swell when they are wet and shrink when they dry, so they crack.</a:t>
             </a:r>
             <a:endParaRPr lang="en-US" sz="4000" dirty="0"/>
           </a:p>
@@ -13024,15 +13818,115 @@
                 <a:ea typeface="Calibri" pitchFamily="34" charset="-122"/>
                 <a:cs typeface="Calibri" pitchFamily="34" charset="-120"/>
               </a:rPr>
-              <a:t>FORMATIVE EVALUATION</a:t>
+              <a:t>BOARD SUMMARY</a:t>
             </a:r>
             <a:endParaRPr lang="en-US" sz="1400" dirty="0"/>
+          </a:p>
+        </p:txBody>
+      </p:sp>
+      <p:sp>
+        <p:nvSpPr>
+          <p:cNvPr id="3" name="Text 1"/>
+          <p:cNvSpPr/>
+          <p:nvPr/>
+        </p:nvSpPr>
+        <p:spPr>
+          <a:xfrm>
+            <a:off x="365760" y="1005840"/>
+            <a:ext cx="11460175" cy="731520"/>
+          </a:xfrm>
+          <a:prstGeom prst="rect">
+            <a:avLst/>
+          </a:prstGeom>
+          <a:noFill/>
+          <a:ln/>
+        </p:spPr>
+        <p:txBody>
+          <a:bodyPr wrap="square" lIns="0" tIns="0" rIns="0" bIns="0" rtlCol="0" anchor="ctr">
+            <a:normAutofit/>
+          </a:bodyPr>
+          <a:lstStyle/>
+          <a:p>
+            <a:pPr algn="ctr" indent="0" marL="0">
+              <a:buNone/>
+            </a:pPr>
+            <a:r>
+              <a:rPr lang="en-US" sz="3600" b="1" dirty="0">
+                <a:solidFill>
+                  <a:srgbClr val="990011"/>
+                </a:solidFill>
+                <a:latin typeface="Times New Roman" pitchFamily="34" charset="0"/>
+                <a:ea typeface="Times New Roman" pitchFamily="34" charset="-122"/>
+                <a:cs typeface="Times New Roman" pitchFamily="34" charset="-120"/>
+              </a:rPr>
+              <a:t>3. Alternate Wetting and Drying (Slaking)</a:t>
+            </a:r>
+            <a:endParaRPr lang="en-US" sz="3600" dirty="0"/>
+          </a:p>
+        </p:txBody>
+      </p:sp>
+      <p:sp>
+        <p:nvSpPr>
+          <p:cNvPr id="4" name="Text 2"/>
+          <p:cNvSpPr/>
+          <p:nvPr/>
+        </p:nvSpPr>
+        <p:spPr>
+          <a:xfrm>
+            <a:off x="365760" y="1783080"/>
+            <a:ext cx="4846320" cy="4617720"/>
+          </a:xfrm>
+          <a:prstGeom prst="rect">
+            <a:avLst/>
+          </a:prstGeom>
+          <a:noFill/>
+          <a:ln/>
+        </p:spPr>
+        <p:txBody>
+          <a:bodyPr wrap="square" lIns="0" tIns="0" rIns="0" bIns="0" rtlCol="0" anchor="t"/>
+          <a:lstStyle/>
+          <a:p>
+            <a:pPr algn="l" indent="0" marL="0">
+              <a:spcAft>
+                <a:spcPts val="800"/>
+              </a:spcAft>
+              <a:buNone/>
+            </a:pPr>
+            <a:r>
+              <a:rPr lang="en-US" sz="3600" b="1" dirty="0">
+                <a:solidFill>
+                  <a:srgbClr val="111111"/>
+                </a:solidFill>
+                <a:latin typeface="Times New Roman" pitchFamily="34" charset="0"/>
+                <a:ea typeface="Times New Roman" pitchFamily="34" charset="-122"/>
+                <a:cs typeface="Times New Roman" pitchFamily="34" charset="-120"/>
+              </a:rPr>
+              <a:t>Products: </a:t>
+            </a:r>
+            <a:pPr algn="l" indent="0" marL="0">
+              <a:spcAft>
+                <a:spcPts val="800"/>
+              </a:spcAft>
+              <a:buNone/>
+            </a:pPr>
+            <a:r>
+              <a:rPr lang="en-US" sz="3600" dirty="0">
+                <a:solidFill>
+                  <a:srgbClr val="111111"/>
+                </a:solidFill>
+                <a:latin typeface="Times New Roman" pitchFamily="34" charset="0"/>
+                <a:ea typeface="Times New Roman" pitchFamily="34" charset="-122"/>
+                <a:cs typeface="Times New Roman" pitchFamily="34" charset="-120"/>
+              </a:rPr>
+              <a:t>Crumbled clay and deep cracks, as in the black soils of the Far North in the dry season.</a:t>
+            </a:r>
+            <a:endParaRPr lang="en-US" sz="3600" dirty="0"/>
           </a:p>
         </p:txBody>
       </p:sp>
       <p:pic>
         <p:nvPicPr>
-          <p:cNvPr id="3" name="Image 0" descr="/home/claude/f4/img/minesec_sheet.png">    </p:cNvPr>
+          <p:cNvPr id="5" name="Image 0" descr="/home/claude/f4/img/v2/f2t_cracked_soil.jpg">    </p:cNvPr>
           <p:cNvPicPr>
             <a:picLocks noChangeAspect="1"/>
           </p:cNvPicPr>
@@ -13046,8 +13940,8 @@
         </p:blipFill>
         <p:spPr>
           <a:xfrm>
-            <a:off x="0" y="658368"/>
-            <a:ext cx="5120640" cy="5833872"/>
+            <a:off x="5349240" y="2071212"/>
+            <a:ext cx="6659575" cy="3693983"/>
           </a:xfrm>
           <a:prstGeom prst="rect">
             <a:avLst/>
@@ -13056,14 +13950,14 @@
       </p:pic>
       <p:sp>
         <p:nvSpPr>
-          <p:cNvPr id="4" name="Text 1"/>
+          <p:cNvPr id="6" name="Text 3"/>
           <p:cNvSpPr/>
           <p:nvPr/>
         </p:nvSpPr>
         <p:spPr>
           <a:xfrm>
-            <a:off x="5349240" y="1005840"/>
-            <a:ext cx="6522415" cy="731520"/>
+            <a:off x="5349240" y="6089904"/>
+            <a:ext cx="6659575" cy="347472"/>
           </a:xfrm>
           <a:prstGeom prst="rect">
             <a:avLst/>
@@ -13072,68 +13966,24 @@
           <a:ln/>
         </p:spPr>
         <p:txBody>
-          <a:bodyPr wrap="square" lIns="0" tIns="0" rIns="0" bIns="0" rtlCol="0" anchor="ctr">
-            <a:normAutofit/>
-          </a:bodyPr>
+          <a:bodyPr wrap="square" lIns="0" tIns="0" rIns="0" bIns="0" rtlCol="0" anchor="ctr"/>
           <a:lstStyle/>
           <a:p>
             <a:pPr algn="ctr" indent="0" marL="0">
               <a:buNone/>
             </a:pPr>
             <a:r>
-              <a:rPr lang="en-US" sz="3600" b="1" dirty="0">
-                <a:solidFill>
-                  <a:srgbClr val="990011"/>
+              <a:rPr lang="en-US" sz="1600" i="1" dirty="0">
+                <a:solidFill>
+                  <a:srgbClr val="555555"/>
                 </a:solidFill>
                 <a:latin typeface="Times New Roman" pitchFamily="34" charset="0"/>
                 <a:ea typeface="Times New Roman" pitchFamily="34" charset="-122"/>
                 <a:cs typeface="Times New Roman" pitchFamily="34" charset="-120"/>
               </a:rPr>
-              <a:t>Expected Answer</a:t>
-            </a:r>
-            <a:endParaRPr lang="en-US" sz="3600" dirty="0"/>
-          </a:p>
-        </p:txBody>
-      </p:sp>
-      <p:sp>
-        <p:nvSpPr>
-          <p:cNvPr id="5" name="Text 2"/>
-          <p:cNvSpPr/>
-          <p:nvPr/>
-        </p:nvSpPr>
-        <p:spPr>
-          <a:xfrm>
-            <a:off x="5349240" y="1783080"/>
-            <a:ext cx="6522415" cy="4663440"/>
-          </a:xfrm>
-          <a:prstGeom prst="rect">
-            <a:avLst/>
-          </a:prstGeom>
-          <a:noFill/>
-          <a:ln/>
-        </p:spPr>
-        <p:txBody>
-          <a:bodyPr wrap="square" lIns="0" tIns="0" rIns="0" bIns="0" rtlCol="0" anchor="t"/>
-          <a:lstStyle/>
-          <a:p>
-            <a:pPr algn="l" indent="0" marL="0">
-              <a:spcAft>
-                <a:spcPts val="800"/>
-              </a:spcAft>
-              <a:buNone/>
-            </a:pPr>
-            <a:r>
-              <a:rPr lang="en-US" sz="4000" dirty="0">
-                <a:solidFill>
-                  <a:srgbClr val="111111"/>
-                </a:solidFill>
-                <a:latin typeface="Times New Roman" pitchFamily="34" charset="0"/>
-                <a:ea typeface="Times New Roman" pitchFamily="34" charset="-122"/>
-                <a:cs typeface="Times New Roman" pitchFamily="34" charset="-120"/>
-              </a:rPr>
-              <a:t>They grow in cracks and push the rock apart.</a:t>
-            </a:r>
-            <a:endParaRPr lang="en-US" sz="4000" dirty="0"/>
+              <a:t>Illustration: cracked soil</a:t>
+            </a:r>
+            <a:endParaRPr lang="en-US" sz="1600" dirty="0"/>
           </a:p>
         </p:txBody>
       </p:sp>
@@ -13243,15 +14093,135 @@
                 <a:ea typeface="Calibri" pitchFamily="34" charset="-122"/>
                 <a:cs typeface="Calibri" pitchFamily="34" charset="-120"/>
               </a:rPr>
-              <a:t>REMEDIATION</a:t>
+              <a:t>BOARD SUMMARY</a:t>
             </a:r>
             <a:endParaRPr lang="en-US" sz="1400" dirty="0"/>
+          </a:p>
+        </p:txBody>
+      </p:sp>
+      <p:sp>
+        <p:nvSpPr>
+          <p:cNvPr id="3" name="Text 1"/>
+          <p:cNvSpPr/>
+          <p:nvPr/>
+        </p:nvSpPr>
+        <p:spPr>
+          <a:xfrm>
+            <a:off x="365760" y="1005840"/>
+            <a:ext cx="11460175" cy="731520"/>
+          </a:xfrm>
+          <a:prstGeom prst="rect">
+            <a:avLst/>
+          </a:prstGeom>
+          <a:noFill/>
+          <a:ln/>
+        </p:spPr>
+        <p:txBody>
+          <a:bodyPr wrap="square" lIns="0" tIns="0" rIns="0" bIns="0" rtlCol="0" anchor="ctr">
+            <a:normAutofit/>
+          </a:bodyPr>
+          <a:lstStyle/>
+          <a:p>
+            <a:pPr algn="ctr" indent="0" marL="0">
+              <a:buNone/>
+            </a:pPr>
+            <a:r>
+              <a:rPr lang="en-US" sz="3600" b="1" dirty="0">
+                <a:solidFill>
+                  <a:srgbClr val="990011"/>
+                </a:solidFill>
+                <a:latin typeface="Times New Roman" pitchFamily="34" charset="0"/>
+                <a:ea typeface="Times New Roman" pitchFamily="34" charset="-122"/>
+                <a:cs typeface="Times New Roman" pitchFamily="34" charset="-120"/>
+              </a:rPr>
+              <a:t>4. Pressure Release (Unloading)</a:t>
+            </a:r>
+            <a:endParaRPr lang="en-US" sz="3600" dirty="0"/>
+          </a:p>
+        </p:txBody>
+      </p:sp>
+      <p:sp>
+        <p:nvSpPr>
+          <p:cNvPr id="4" name="Text 2"/>
+          <p:cNvSpPr/>
+          <p:nvPr/>
+        </p:nvSpPr>
+        <p:spPr>
+          <a:xfrm>
+            <a:off x="365760" y="1783080"/>
+            <a:ext cx="4846320" cy="4617720"/>
+          </a:xfrm>
+          <a:prstGeom prst="rect">
+            <a:avLst/>
+          </a:prstGeom>
+          <a:noFill/>
+          <a:ln/>
+        </p:spPr>
+        <p:txBody>
+          <a:bodyPr wrap="square" lIns="0" tIns="0" rIns="0" bIns="0" rtlCol="0" anchor="t"/>
+          <a:lstStyle/>
+          <a:p>
+            <a:pPr algn="l" indent="0" marL="0">
+              <a:spcAft>
+                <a:spcPts val="800"/>
+              </a:spcAft>
+              <a:buNone/>
+            </a:pPr>
+            <a:r>
+              <a:rPr lang="en-US" sz="3600" i="1" dirty="0">
+                <a:solidFill>
+                  <a:srgbClr val="111111"/>
+                </a:solidFill>
+                <a:latin typeface="Times New Roman" pitchFamily="34" charset="0"/>
+                <a:ea typeface="Times New Roman" pitchFamily="34" charset="-122"/>
+                <a:cs typeface="Times New Roman" pitchFamily="34" charset="-120"/>
+              </a:rPr>
+              <a:t>Pressure release works as follows:</a:t>
+            </a:r>
+            <a:endParaRPr lang="en-US" sz="3600" dirty="0"/>
+          </a:p>
+          <a:p>
+            <a:pPr algn="l" indent="0" marL="0">
+              <a:spcAft>
+                <a:spcPts val="800"/>
+              </a:spcAft>
+              <a:buNone/>
+            </a:pPr>
+            <a:r>
+              <a:rPr lang="en-US" sz="3600" b="1" dirty="0">
+                <a:solidFill>
+                  <a:srgbClr val="111111"/>
+                </a:solidFill>
+                <a:latin typeface="Times New Roman" pitchFamily="34" charset="0"/>
+                <a:ea typeface="Times New Roman" pitchFamily="34" charset="-122"/>
+                <a:cs typeface="Times New Roman" pitchFamily="34" charset="-120"/>
+              </a:rPr>
+              <a:t>Process: </a:t>
+            </a:r>
+            <a:pPr algn="l" indent="0" marL="0">
+              <a:spcAft>
+                <a:spcPts val="800"/>
+              </a:spcAft>
+              <a:buNone/>
+            </a:pPr>
+            <a:r>
+              <a:rPr lang="en-US" sz="3600" dirty="0">
+                <a:solidFill>
+                  <a:srgbClr val="111111"/>
+                </a:solidFill>
+                <a:latin typeface="Times New Roman" pitchFamily="34" charset="0"/>
+                <a:ea typeface="Times New Roman" pitchFamily="34" charset="-122"/>
+                <a:cs typeface="Times New Roman" pitchFamily="34" charset="-120"/>
+              </a:rPr>
+              <a:t>When the rocks above are removed by erosion, the rock below expands and cracks in sheets parallel to the surface.</a:t>
+            </a:r>
+            <a:endParaRPr lang="en-US" sz="3600" dirty="0"/>
           </a:p>
         </p:txBody>
       </p:sp>
       <p:pic>
         <p:nvPicPr>
-          <p:cNvPr id="3" name="Image 0" descr="/home/claude/f4/img/minesec_sheet.png">    </p:cNvPr>
+          <p:cNvPr id="5" name="Image 0" descr="/home/claude/f4/img/physical_weathering.png">    </p:cNvPr>
           <p:cNvPicPr>
             <a:picLocks noChangeAspect="1"/>
           </p:cNvPicPr>
@@ -13265,8 +14235,8 @@
         </p:blipFill>
         <p:spPr>
           <a:xfrm>
-            <a:off x="0" y="658368"/>
-            <a:ext cx="5120640" cy="5833872"/>
+            <a:off x="5349240" y="2845097"/>
+            <a:ext cx="6659575" cy="2146214"/>
           </a:xfrm>
           <a:prstGeom prst="rect">
             <a:avLst/>
@@ -13275,14 +14245,14 @@
       </p:pic>
       <p:sp>
         <p:nvSpPr>
-          <p:cNvPr id="4" name="Text 1"/>
+          <p:cNvPr id="6" name="Text 3"/>
           <p:cNvSpPr/>
           <p:nvPr/>
         </p:nvSpPr>
         <p:spPr>
           <a:xfrm>
-            <a:off x="5349240" y="1005840"/>
-            <a:ext cx="6522415" cy="731520"/>
+            <a:off x="5349240" y="6089904"/>
+            <a:ext cx="6659575" cy="347472"/>
           </a:xfrm>
           <a:prstGeom prst="rect">
             <a:avLst/>
@@ -13291,112 +14261,24 @@
           <a:ln/>
         </p:spPr>
         <p:txBody>
-          <a:bodyPr wrap="square" lIns="0" tIns="0" rIns="0" bIns="0" rtlCol="0" anchor="ctr">
-            <a:normAutofit/>
-          </a:bodyPr>
+          <a:bodyPr wrap="square" lIns="0" tIns="0" rIns="0" bIns="0" rtlCol="0" anchor="ctr"/>
           <a:lstStyle/>
           <a:p>
             <a:pPr algn="ctr" indent="0" marL="0">
               <a:buNone/>
             </a:pPr>
             <a:r>
-              <a:rPr lang="en-US" sz="3600" b="1" dirty="0">
-                <a:solidFill>
-                  <a:srgbClr val="990011"/>
+              <a:rPr lang="en-US" sz="1600" i="1" dirty="0">
+                <a:solidFill>
+                  <a:srgbClr val="555555"/>
                 </a:solidFill>
                 <a:latin typeface="Times New Roman" pitchFamily="34" charset="0"/>
                 <a:ea typeface="Times New Roman" pitchFamily="34" charset="-122"/>
                 <a:cs typeface="Times New Roman" pitchFamily="34" charset="-120"/>
               </a:rPr>
-              <a:t>Remediation</a:t>
-            </a:r>
-            <a:endParaRPr lang="en-US" sz="3600" dirty="0"/>
-          </a:p>
-        </p:txBody>
-      </p:sp>
-      <p:sp>
-        <p:nvSpPr>
-          <p:cNvPr id="5" name="Text 2"/>
-          <p:cNvSpPr/>
-          <p:nvPr/>
-        </p:nvSpPr>
-        <p:spPr>
-          <a:xfrm>
-            <a:off x="5349240" y="1783080"/>
-            <a:ext cx="6522415" cy="4663440"/>
-          </a:xfrm>
-          <a:prstGeom prst="rect">
-            <a:avLst/>
-          </a:prstGeom>
-          <a:noFill/>
-          <a:ln/>
-        </p:spPr>
-        <p:txBody>
-          <a:bodyPr wrap="square" lIns="0" tIns="0" rIns="0" bIns="0" rtlCol="0" anchor="t"/>
-          <a:lstStyle/>
-          <a:p>
-            <a:pPr algn="l" indent="0" marL="0">
-              <a:spcAft>
-                <a:spcPts val="800"/>
-              </a:spcAft>
-              <a:buNone/>
-            </a:pPr>
-            <a:r>
-              <a:rPr lang="en-US" sz="4000" b="1" dirty="0">
-                <a:solidFill>
-                  <a:srgbClr val="111111"/>
-                </a:solidFill>
-                <a:latin typeface="Times New Roman" pitchFamily="34" charset="0"/>
-                <a:ea typeface="Times New Roman" pitchFamily="34" charset="-122"/>
-                <a:cs typeface="Times New Roman" pitchFamily="34" charset="-120"/>
-              </a:rPr>
-              <a:t>Fill in the blanks:</a:t>
-            </a:r>
-            <a:endParaRPr lang="en-US" sz="4000" dirty="0"/>
-          </a:p>
-          <a:p>
-            <a:pPr algn="l" marL="342900" indent="-342900">
-              <a:spcAft>
-                <a:spcPts val="800"/>
-              </a:spcAft>
-              <a:buSzPct val="100000"/>
-              <a:buFont typeface="+mj-lt"/>
-              <a:buAutoNum type="arabicPeriod" startAt="1"/>
-            </a:pPr>
-            <a:r>
-              <a:rPr lang="en-US" sz="4000" dirty="0">
-                <a:solidFill>
-                  <a:srgbClr val="111111"/>
-                </a:solidFill>
-                <a:latin typeface="Times New Roman" pitchFamily="34" charset="0"/>
-                <a:ea typeface="Times New Roman" pitchFamily="34" charset="-122"/>
-                <a:cs typeface="Times New Roman" pitchFamily="34" charset="-120"/>
-              </a:rPr>
-              <a:t>The peeling of rock like an onion is ______.</a:t>
-            </a:r>
-            <a:endParaRPr lang="en-US" sz="4000" dirty="0"/>
-          </a:p>
-          <a:p>
-            <a:pPr algn="l" marL="342900" indent="-342900">
-              <a:spcAft>
-                <a:spcPts val="800"/>
-              </a:spcAft>
-              <a:buSzPct val="100000"/>
-              <a:buFont typeface="+mj-lt"/>
-              <a:buAutoNum type="arabicPeriod" startAt="1"/>
-            </a:pPr>
-            <a:r>
-              <a:rPr lang="en-US" sz="4000" dirty="0">
-                <a:solidFill>
-                  <a:srgbClr val="111111"/>
-                </a:solidFill>
-                <a:latin typeface="Times New Roman" pitchFamily="34" charset="0"/>
-                <a:ea typeface="Times New Roman" pitchFamily="34" charset="-122"/>
-                <a:cs typeface="Times New Roman" pitchFamily="34" charset="-120"/>
-              </a:rPr>
-              <a:t>Water that freezes in cracks causes ______ shattering.</a:t>
-            </a:r>
-            <a:endParaRPr lang="en-US" sz="4000" dirty="0"/>
+              <a:t>Illustration: processes of physical weathering</a:t>
+            </a:r>
+            <a:endParaRPr lang="en-US" sz="1600" dirty="0"/>
           </a:p>
         </p:txBody>
       </p:sp>
@@ -13506,7 +14388,7 @@
                 <a:ea typeface="Calibri" pitchFamily="34" charset="-122"/>
                 <a:cs typeface="Calibri" pitchFamily="34" charset="-120"/>
               </a:rPr>
-              <a:t>REMEDIATION</a:t>
+              <a:t>BOARD SUMMARY</a:t>
             </a:r>
             <a:endParaRPr lang="en-US" sz="1400" dirty="0"/>
           </a:p>
@@ -13571,7 +14453,7 @@
                 <a:ea typeface="Times New Roman" pitchFamily="34" charset="-122"/>
                 <a:cs typeface="Times New Roman" pitchFamily="34" charset="-120"/>
               </a:rPr>
-              <a:t>Remediation (continued)</a:t>
+              <a:t>4. Pressure Release (Unloading)</a:t>
             </a:r>
             <a:endParaRPr lang="en-US" sz="3600" dirty="0"/>
           </a:p>
@@ -13598,16 +14480,14 @@
           <a:bodyPr wrap="square" lIns="0" tIns="0" rIns="0" bIns="0" rtlCol="0" anchor="t"/>
           <a:lstStyle/>
           <a:p>
-            <a:pPr algn="l" marL="342900" indent="-342900">
+            <a:pPr algn="l" indent="0" marL="0">
               <a:spcAft>
                 <a:spcPts val="800"/>
               </a:spcAft>
-              <a:buSzPct val="100000"/>
-              <a:buFont typeface="+mj-lt"/>
-              <a:buAutoNum type="arabicPeriod" startAt="1"/>
+              <a:buNone/>
             </a:pPr>
             <a:r>
-              <a:rPr lang="en-US" sz="4000" dirty="0">
+              <a:rPr lang="en-US" sz="4000" b="1" dirty="0">
                 <a:solidFill>
                   <a:srgbClr val="111111"/>
                 </a:solidFill>
@@ -13615,7 +14495,24 @@
                 <a:ea typeface="Times New Roman" pitchFamily="34" charset="-122"/>
                 <a:cs typeface="Times New Roman" pitchFamily="34" charset="-120"/>
               </a:rPr>
-              <a:t>Physical weathering does not change the ______ of the rock.</a:t>
+              <a:t>Products: </a:t>
+            </a:r>
+            <a:pPr algn="l" indent="0" marL="0">
+              <a:spcAft>
+                <a:spcPts val="800"/>
+              </a:spcAft>
+              <a:buNone/>
+            </a:pPr>
+            <a:r>
+              <a:rPr lang="en-US" sz="4000" dirty="0">
+                <a:solidFill>
+                  <a:srgbClr val="111111"/>
+                </a:solidFill>
+                <a:latin typeface="Times New Roman" pitchFamily="34" charset="0"/>
+                <a:ea typeface="Times New Roman" pitchFamily="34" charset="-122"/>
+                <a:cs typeface="Times New Roman" pitchFamily="34" charset="-120"/>
+              </a:rPr>
+              <a:t>Sheets of rock and dome-shaped hills such as inselbergs.</a:t>
             </a:r>
             <a:endParaRPr lang="en-US" sz="4000" dirty="0"/>
           </a:p>
@@ -13727,15 +14624,135 @@
                 <a:ea typeface="Calibri" pitchFamily="34" charset="-122"/>
                 <a:cs typeface="Calibri" pitchFamily="34" charset="-120"/>
               </a:rPr>
-              <a:t>HOMEWORK</a:t>
+              <a:t>BOARD SUMMARY</a:t>
             </a:r>
             <a:endParaRPr lang="en-US" sz="1400" dirty="0"/>
+          </a:p>
+        </p:txBody>
+      </p:sp>
+      <p:sp>
+        <p:nvSpPr>
+          <p:cNvPr id="3" name="Text 1"/>
+          <p:cNvSpPr/>
+          <p:nvPr/>
+        </p:nvSpPr>
+        <p:spPr>
+          <a:xfrm>
+            <a:off x="365760" y="1005840"/>
+            <a:ext cx="11460175" cy="731520"/>
+          </a:xfrm>
+          <a:prstGeom prst="rect">
+            <a:avLst/>
+          </a:prstGeom>
+          <a:noFill/>
+          <a:ln/>
+        </p:spPr>
+        <p:txBody>
+          <a:bodyPr wrap="square" lIns="0" tIns="0" rIns="0" bIns="0" rtlCol="0" anchor="ctr">
+            <a:normAutofit/>
+          </a:bodyPr>
+          <a:lstStyle/>
+          <a:p>
+            <a:pPr algn="ctr" indent="0" marL="0">
+              <a:buNone/>
+            </a:pPr>
+            <a:r>
+              <a:rPr lang="en-US" sz="3600" b="1" dirty="0">
+                <a:solidFill>
+                  <a:srgbClr val="990011"/>
+                </a:solidFill>
+                <a:latin typeface="Times New Roman" pitchFamily="34" charset="0"/>
+                <a:ea typeface="Times New Roman" pitchFamily="34" charset="-122"/>
+                <a:cs typeface="Times New Roman" pitchFamily="34" charset="-120"/>
+              </a:rPr>
+              <a:t>5. Physically Induced Biological Weathering</a:t>
+            </a:r>
+            <a:endParaRPr lang="en-US" sz="3600" dirty="0"/>
+          </a:p>
+        </p:txBody>
+      </p:sp>
+      <p:sp>
+        <p:nvSpPr>
+          <p:cNvPr id="4" name="Text 2"/>
+          <p:cNvSpPr/>
+          <p:nvPr/>
+        </p:nvSpPr>
+        <p:spPr>
+          <a:xfrm>
+            <a:off x="365760" y="1783080"/>
+            <a:ext cx="4846320" cy="4617720"/>
+          </a:xfrm>
+          <a:prstGeom prst="rect">
+            <a:avLst/>
+          </a:prstGeom>
+          <a:noFill/>
+          <a:ln/>
+        </p:spPr>
+        <p:txBody>
+          <a:bodyPr wrap="square" lIns="0" tIns="0" rIns="0" bIns="0" rtlCol="0" anchor="t"/>
+          <a:lstStyle/>
+          <a:p>
+            <a:pPr algn="l" indent="0" marL="0">
+              <a:spcAft>
+                <a:spcPts val="800"/>
+              </a:spcAft>
+              <a:buNone/>
+            </a:pPr>
+            <a:r>
+              <a:rPr lang="en-US" sz="3600" i="1" dirty="0">
+                <a:solidFill>
+                  <a:srgbClr val="111111"/>
+                </a:solidFill>
+                <a:latin typeface="Times New Roman" pitchFamily="34" charset="0"/>
+                <a:ea typeface="Times New Roman" pitchFamily="34" charset="-122"/>
+                <a:cs typeface="Times New Roman" pitchFamily="34" charset="-120"/>
+              </a:rPr>
+              <a:t>Living things break rocks physically as follows:</a:t>
+            </a:r>
+            <a:endParaRPr lang="en-US" sz="3600" dirty="0"/>
+          </a:p>
+          <a:p>
+            <a:pPr algn="l" indent="0" marL="0">
+              <a:spcAft>
+                <a:spcPts val="800"/>
+              </a:spcAft>
+              <a:buNone/>
+            </a:pPr>
+            <a:r>
+              <a:rPr lang="en-US" sz="3600" b="1" dirty="0">
+                <a:solidFill>
+                  <a:srgbClr val="111111"/>
+                </a:solidFill>
+                <a:latin typeface="Times New Roman" pitchFamily="34" charset="0"/>
+                <a:ea typeface="Times New Roman" pitchFamily="34" charset="-122"/>
+                <a:cs typeface="Times New Roman" pitchFamily="34" charset="-120"/>
+              </a:rPr>
+              <a:t>Plant roots: </a:t>
+            </a:r>
+            <a:pPr algn="l" indent="0" marL="0">
+              <a:spcAft>
+                <a:spcPts val="800"/>
+              </a:spcAft>
+              <a:buNone/>
+            </a:pPr>
+            <a:r>
+              <a:rPr lang="en-US" sz="3600" dirty="0">
+                <a:solidFill>
+                  <a:srgbClr val="111111"/>
+                </a:solidFill>
+                <a:latin typeface="Times New Roman" pitchFamily="34" charset="0"/>
+                <a:ea typeface="Times New Roman" pitchFamily="34" charset="-122"/>
+                <a:cs typeface="Times New Roman" pitchFamily="34" charset="-120"/>
+              </a:rPr>
+              <a:t>Roots grow in cracks, become thicker and push the rock apart.</a:t>
+            </a:r>
+            <a:endParaRPr lang="en-US" sz="3600" dirty="0"/>
           </a:p>
         </p:txBody>
       </p:sp>
       <p:pic>
         <p:nvPicPr>
-          <p:cNvPr id="3" name="Image 0" descr="/home/claude/f4/img/minesec_sheet.png">    </p:cNvPr>
+          <p:cNvPr id="5" name="Image 0" descr="/home/claude/f4/img/v2/f4_roots.jpg">    </p:cNvPr>
           <p:cNvPicPr>
             <a:picLocks noChangeAspect="1"/>
           </p:cNvPicPr>
@@ -13749,8 +14766,8 @@
         </p:blipFill>
         <p:spPr>
           <a:xfrm>
-            <a:off x="0" y="658368"/>
-            <a:ext cx="5120640" cy="5833872"/>
+            <a:off x="5349240" y="2071212"/>
+            <a:ext cx="6659575" cy="3693983"/>
           </a:xfrm>
           <a:prstGeom prst="rect">
             <a:avLst/>
@@ -13759,14 +14776,14 @@
       </p:pic>
       <p:sp>
         <p:nvSpPr>
-          <p:cNvPr id="4" name="Text 1"/>
+          <p:cNvPr id="6" name="Text 3"/>
           <p:cNvSpPr/>
           <p:nvPr/>
         </p:nvSpPr>
         <p:spPr>
           <a:xfrm>
-            <a:off x="5349240" y="1005840"/>
-            <a:ext cx="6522415" cy="731520"/>
+            <a:off x="5349240" y="6089904"/>
+            <a:ext cx="6659575" cy="347472"/>
           </a:xfrm>
           <a:prstGeom prst="rect">
             <a:avLst/>
@@ -13775,68 +14792,24 @@
           <a:ln/>
         </p:spPr>
         <p:txBody>
-          <a:bodyPr wrap="square" lIns="0" tIns="0" rIns="0" bIns="0" rtlCol="0" anchor="ctr">
-            <a:normAutofit/>
-          </a:bodyPr>
+          <a:bodyPr wrap="square" lIns="0" tIns="0" rIns="0" bIns="0" rtlCol="0" anchor="ctr"/>
           <a:lstStyle/>
           <a:p>
             <a:pPr algn="ctr" indent="0" marL="0">
               <a:buNone/>
             </a:pPr>
             <a:r>
-              <a:rPr lang="en-US" sz="3600" b="1" dirty="0">
-                <a:solidFill>
-                  <a:srgbClr val="990011"/>
+              <a:rPr lang="en-US" sz="1600" i="1" dirty="0">
+                <a:solidFill>
+                  <a:srgbClr val="555555"/>
                 </a:solidFill>
                 <a:latin typeface="Times New Roman" pitchFamily="34" charset="0"/>
                 <a:ea typeface="Times New Roman" pitchFamily="34" charset="-122"/>
                 <a:cs typeface="Times New Roman" pitchFamily="34" charset="-120"/>
               </a:rPr>
-              <a:t>Homework</a:t>
-            </a:r>
-            <a:endParaRPr lang="en-US" sz="3600" dirty="0"/>
-          </a:p>
-        </p:txBody>
-      </p:sp>
-      <p:sp>
-        <p:nvSpPr>
-          <p:cNvPr id="5" name="Text 2"/>
-          <p:cNvSpPr/>
-          <p:nvPr/>
-        </p:nvSpPr>
-        <p:spPr>
-          <a:xfrm>
-            <a:off x="5349240" y="1783080"/>
-            <a:ext cx="6522415" cy="4663440"/>
-          </a:xfrm>
-          <a:prstGeom prst="rect">
-            <a:avLst/>
-          </a:prstGeom>
-          <a:noFill/>
-          <a:ln/>
-        </p:spPr>
-        <p:txBody>
-          <a:bodyPr wrap="square" lIns="0" tIns="0" rIns="0" bIns="0" rtlCol="0" anchor="t"/>
-          <a:lstStyle/>
-          <a:p>
-            <a:pPr algn="l" indent="0" marL="0">
-              <a:spcAft>
-                <a:spcPts val="800"/>
-              </a:spcAft>
-              <a:buNone/>
-            </a:pPr>
-            <a:r>
-              <a:rPr lang="en-US" sz="4000" dirty="0">
-                <a:solidFill>
-                  <a:srgbClr val="111111"/>
-                </a:solidFill>
-                <a:latin typeface="Times New Roman" pitchFamily="34" charset="0"/>
-                <a:ea typeface="Times New Roman" pitchFamily="34" charset="-122"/>
-                <a:cs typeface="Times New Roman" pitchFamily="34" charset="-120"/>
-              </a:rPr>
-              <a:t>Look at an old iron gate, a roofing sheet or a nail left in the rain. Write what happened to it and what colour it became.</a:t>
-            </a:r>
-            <a:endParaRPr lang="en-US" sz="4000" dirty="0"/>
+              <a:t>Illustration: roots in a rock</a:t>
+            </a:r>
+            <a:endParaRPr lang="en-US" sz="1600" dirty="0"/>
           </a:p>
         </p:txBody>
       </p:sp>
@@ -13946,7 +14919,7 @@
                 <a:ea typeface="Calibri" pitchFamily="34" charset="-122"/>
                 <a:cs typeface="Calibri" pitchFamily="34" charset="-120"/>
               </a:rPr>
-              <a:t>NEXT LESSON</a:t>
+              <a:t>BOARD SUMMARY</a:t>
             </a:r>
             <a:endParaRPr lang="en-US" sz="1400" dirty="0"/>
           </a:p>
@@ -14011,7 +14984,7 @@
                 <a:ea typeface="Times New Roman" pitchFamily="34" charset="-122"/>
                 <a:cs typeface="Times New Roman" pitchFamily="34" charset="-120"/>
               </a:rPr>
-              <a:t>Next Lesson</a:t>
+              <a:t>5. Physically Induced Biological Weathering</a:t>
             </a:r>
             <a:endParaRPr lang="en-US" sz="3600" dirty="0"/>
           </a:p>
@@ -14035,10 +15008,10 @@
           <a:ln/>
         </p:spPr>
         <p:txBody>
-          <a:bodyPr wrap="square" lIns="0" tIns="0" rIns="0" bIns="0" rtlCol="0" anchor="ctr"/>
-          <a:lstStyle/>
-          <a:p>
-            <a:pPr algn="ctr" indent="0" marL="0">
+          <a:bodyPr wrap="square" lIns="0" tIns="0" rIns="0" bIns="0" rtlCol="0" anchor="t"/>
+          <a:lstStyle/>
+          <a:p>
+            <a:pPr algn="l" indent="0" marL="0">
               <a:spcAft>
                 <a:spcPts val="800"/>
               </a:spcAft>
@@ -14053,27 +15026,61 @@
                 <a:ea typeface="Times New Roman" pitchFamily="34" charset="-122"/>
                 <a:cs typeface="Times New Roman" pitchFamily="34" charset="-120"/>
               </a:rPr>
-              <a:t>Our next lesson will be on:</a:t>
-            </a:r>
-            <a:endParaRPr lang="en-US" sz="4000" dirty="0"/>
-          </a:p>
-          <a:p>
-            <a:pPr algn="ctr" indent="0" marL="0">
+              <a:t>Burrowing animals: </a:t>
+            </a:r>
+            <a:pPr algn="l" indent="0" marL="0">
               <a:spcAft>
                 <a:spcPts val="800"/>
               </a:spcAft>
               <a:buNone/>
             </a:pPr>
             <a:r>
-              <a:rPr lang="en-US" sz="4000" b="1" dirty="0">
-                <a:solidFill>
-                  <a:srgbClr val="990011"/>
+              <a:rPr lang="en-US" sz="4000" dirty="0">
+                <a:solidFill>
+                  <a:srgbClr val="111111"/>
                 </a:solidFill>
                 <a:latin typeface="Times New Roman" pitchFamily="34" charset="0"/>
                 <a:ea typeface="Times New Roman" pitchFamily="34" charset="-122"/>
                 <a:cs typeface="Times New Roman" pitchFamily="34" charset="-120"/>
               </a:rPr>
-              <a:t>Lesson 17: Chemical Weathering Processes and Products</a:t>
+              <a:t>Termites, worms and rodents dig holes and bring broken rock to the surface.</a:t>
+            </a:r>
+            <a:endParaRPr lang="en-US" sz="4000" dirty="0"/>
+          </a:p>
+          <a:p>
+            <a:pPr algn="l" indent="0" marL="0">
+              <a:spcAft>
+                <a:spcPts val="800"/>
+              </a:spcAft>
+              <a:buNone/>
+            </a:pPr>
+            <a:r>
+              <a:rPr lang="en-US" sz="4000" b="1" dirty="0">
+                <a:solidFill>
+                  <a:srgbClr val="111111"/>
+                </a:solidFill>
+                <a:latin typeface="Times New Roman" pitchFamily="34" charset="0"/>
+                <a:ea typeface="Times New Roman" pitchFamily="34" charset="-122"/>
+                <a:cs typeface="Times New Roman" pitchFamily="34" charset="-120"/>
+              </a:rPr>
+              <a:t>Products: </a:t>
+            </a:r>
+            <a:pPr algn="l" indent="0" marL="0">
+              <a:spcAft>
+                <a:spcPts val="800"/>
+              </a:spcAft>
+              <a:buNone/>
+            </a:pPr>
+            <a:r>
+              <a:rPr lang="en-US" sz="4000" dirty="0">
+                <a:solidFill>
+                  <a:srgbClr val="111111"/>
+                </a:solidFill>
+                <a:latin typeface="Times New Roman" pitchFamily="34" charset="0"/>
+                <a:ea typeface="Times New Roman" pitchFamily="34" charset="-122"/>
+                <a:cs typeface="Times New Roman" pitchFamily="34" charset="-120"/>
+              </a:rPr>
+              <a:t>Broken blocks of rock and loose, crumbly material.</a:t>
             </a:r>
             <a:endParaRPr lang="en-US" sz="4000" dirty="0"/>
           </a:p>
@@ -14424,6 +15431,1824 @@
                 <a:ea typeface="Calibri" pitchFamily="34" charset="-122"/>
                 <a:cs typeface="Calibri" pitchFamily="34" charset="-120"/>
               </a:rPr>
+              <a:t>FORMATIVE EVALUATION</a:t>
+            </a:r>
+            <a:endParaRPr lang="en-US" sz="1400" dirty="0"/>
+          </a:p>
+        </p:txBody>
+      </p:sp>
+      <p:pic>
+        <p:nvPicPr>
+          <p:cNvPr id="3" name="Image 0" descr="/home/claude/f4/img/minesec_sheet.png">    </p:cNvPr>
+          <p:cNvPicPr>
+            <a:picLocks noChangeAspect="1"/>
+          </p:cNvPicPr>
+          <p:nvPr/>
+        </p:nvPicPr>
+        <p:blipFill>
+          <a:blip r:embed="rId1"/>
+          <a:stretch>
+            <a:fillRect/>
+          </a:stretch>
+        </p:blipFill>
+        <p:spPr>
+          <a:xfrm>
+            <a:off x="0" y="658368"/>
+            <a:ext cx="5120640" cy="5833872"/>
+          </a:xfrm>
+          <a:prstGeom prst="rect">
+            <a:avLst/>
+          </a:prstGeom>
+        </p:spPr>
+      </p:pic>
+      <p:sp>
+        <p:nvSpPr>
+          <p:cNvPr id="4" name="Text 1"/>
+          <p:cNvSpPr/>
+          <p:nvPr/>
+        </p:nvSpPr>
+        <p:spPr>
+          <a:xfrm>
+            <a:off x="5349240" y="1005840"/>
+            <a:ext cx="6522415" cy="731520"/>
+          </a:xfrm>
+          <a:prstGeom prst="rect">
+            <a:avLst/>
+          </a:prstGeom>
+          <a:noFill/>
+          <a:ln/>
+        </p:spPr>
+        <p:txBody>
+          <a:bodyPr wrap="square" lIns="0" tIns="0" rIns="0" bIns="0" rtlCol="0" anchor="ctr">
+            <a:normAutofit/>
+          </a:bodyPr>
+          <a:lstStyle/>
+          <a:p>
+            <a:pPr algn="ctr" indent="0" marL="0">
+              <a:buNone/>
+            </a:pPr>
+            <a:r>
+              <a:rPr lang="en-US" sz="3600" b="1" dirty="0">
+                <a:solidFill>
+                  <a:srgbClr val="990011"/>
+                </a:solidFill>
+                <a:latin typeface="Times New Roman" pitchFamily="34" charset="0"/>
+                <a:ea typeface="Times New Roman" pitchFamily="34" charset="-122"/>
+                <a:cs typeface="Times New Roman" pitchFamily="34" charset="-120"/>
+              </a:rPr>
+              <a:t>Evaluation 1</a:t>
+            </a:r>
+            <a:endParaRPr lang="en-US" sz="3600" dirty="0"/>
+          </a:p>
+        </p:txBody>
+      </p:sp>
+      <p:sp>
+        <p:nvSpPr>
+          <p:cNvPr id="5" name="Text 2"/>
+          <p:cNvSpPr/>
+          <p:nvPr/>
+        </p:nvSpPr>
+        <p:spPr>
+          <a:xfrm>
+            <a:off x="5349240" y="1783080"/>
+            <a:ext cx="6522415" cy="4663440"/>
+          </a:xfrm>
+          <a:prstGeom prst="rect">
+            <a:avLst/>
+          </a:prstGeom>
+          <a:noFill/>
+          <a:ln/>
+        </p:spPr>
+        <p:txBody>
+          <a:bodyPr wrap="square" lIns="0" tIns="0" rIns="0" bIns="0" rtlCol="0" anchor="t"/>
+          <a:lstStyle/>
+          <a:p>
+            <a:pPr algn="l" indent="0" marL="0">
+              <a:spcAft>
+                <a:spcPts val="800"/>
+              </a:spcAft>
+              <a:buNone/>
+            </a:pPr>
+            <a:r>
+              <a:rPr lang="en-US" sz="4000" dirty="0">
+                <a:solidFill>
+                  <a:srgbClr val="111111"/>
+                </a:solidFill>
+                <a:latin typeface="Times New Roman" pitchFamily="34" charset="0"/>
+                <a:ea typeface="Times New Roman" pitchFamily="34" charset="-122"/>
+                <a:cs typeface="Times New Roman" pitchFamily="34" charset="-120"/>
+              </a:rPr>
+              <a:t>Why does granite peel off in hot deserts?</a:t>
+            </a:r>
+            <a:endParaRPr lang="en-US" sz="4000" dirty="0"/>
+          </a:p>
+        </p:txBody>
+      </p:sp>
+      <p:sp>
+        <p:nvSpPr>
+          <p:cNvPr id="25" name="Slide Number Placeholder 0"/>
+          <p:cNvSpPr>
+            <a:spLocks noGrp="1"/>
+          </p:cNvSpPr>
+          <p:nvPr>
+            <p:ph type="sldNum" sz="quarter" idx="4294967295"/>
+          </p:nvPr>
+        </p:nvSpPr>
+        <p:spPr>
+          <a:xfrm>
+            <a:off x="27432" y="91440"/>
+            <a:ext cx="585216" cy="475488"/>
+          </a:xfrm>
+          <a:prstGeom prst="rect">
+            <a:avLst/>
+          </a:prstGeom>
+          <a:extLst>
+            <a:ext uri="{C572A759-6A51-4108-AA02-DFA0A04FC94B}">
+              <ma14:wrappingTextBoxFlag xmlns:ma14="http://schemas.microsoft.com/office/mac/drawingml/2011/main" val="0"/>
+            </a:ext>
+          </a:extLst>
+        </p:spPr>
+        <p:txBody>
+          <a:bodyPr/>
+          <a:lstStyle>
+            <a:lvl1pPr>
+              <a:defRPr sz="2000">
+                <a:solidFill>
+                  <a:srgbClr val="FFFFFF"/>
+                </a:solidFill>
+                <a:latin typeface="Calibri"/>
+                <a:ea typeface="Calibri"/>
+                <a:cs typeface="Calibri"/>
+              </a:defRPr>
+            </a:lvl1pPr>
+          </a:lstStyle>
+          <a:p>
+            <a:pPr algn="ctr"/>
+            <a:fld id="{F7021451-1387-4CA6-816F-3879F97B5CBC}" type="slidenum">
+              <a:rPr b="1" lang="en-US"/>
+              <a:t>40</a:t>
+            </a:fld>
+            <a:endParaRPr lang="en-US"/>
+          </a:p>
+        </p:txBody>
+      </p:sp>
+    </p:spTree>
+  </p:cSld>
+  <p:clrMapOvr>
+    <a:masterClrMapping/>
+  </p:clrMapOvr>
+</p:sld>
+</file>
+
+<file path=ppt/slides/slide41.xml><?xml version="1.0" encoding="utf-8"?>
+<p:sld xmlns:a="http://schemas.openxmlformats.org/drawingml/2006/main" xmlns:r="http://schemas.openxmlformats.org/officeDocument/2006/relationships" xmlns:p="http://schemas.openxmlformats.org/presentationml/2006/main">
+  <p:cSld name="Slide 41">
+    <p:spTree>
+      <p:nvGrpSpPr>
+        <p:cNvPr id="1" name=""/>
+        <p:cNvGrpSpPr/>
+        <p:nvPr/>
+      </p:nvGrpSpPr>
+      <p:grpSpPr>
+        <a:xfrm>
+          <a:off x="0" y="0"/>
+          <a:ext cx="0" cy="0"/>
+          <a:chOff x="0" y="0"/>
+          <a:chExt cx="0" cy="0"/>
+        </a:xfrm>
+      </p:grpSpPr>
+      <p:sp>
+        <p:nvSpPr>
+          <p:cNvPr id="2" name="Text 0"/>
+          <p:cNvSpPr/>
+          <p:nvPr/>
+        </p:nvSpPr>
+        <p:spPr>
+          <a:xfrm>
+            <a:off x="457200" y="713232"/>
+            <a:ext cx="11368735" cy="274320"/>
+          </a:xfrm>
+          <a:prstGeom prst="rect">
+            <a:avLst/>
+          </a:prstGeom>
+          <a:noFill/>
+          <a:ln/>
+        </p:spPr>
+        <p:txBody>
+          <a:bodyPr wrap="square" lIns="0" tIns="0" rIns="0" bIns="0" rtlCol="0" anchor="ctr"/>
+          <a:lstStyle/>
+          <a:p>
+            <a:pPr algn="r" indent="0" marL="0">
+              <a:buNone/>
+            </a:pPr>
+            <a:r>
+              <a:rPr lang="en-US" sz="1400" b="1" dirty="0">
+                <a:solidFill>
+                  <a:srgbClr val="1C3F6E"/>
+                </a:solidFill>
+                <a:latin typeface="Calibri" pitchFamily="34" charset="0"/>
+                <a:ea typeface="Calibri" pitchFamily="34" charset="-122"/>
+                <a:cs typeface="Calibri" pitchFamily="34" charset="-120"/>
+              </a:rPr>
+              <a:t>FORMATIVE EVALUATION</a:t>
+            </a:r>
+            <a:endParaRPr lang="en-US" sz="1400" dirty="0"/>
+          </a:p>
+        </p:txBody>
+      </p:sp>
+      <p:pic>
+        <p:nvPicPr>
+          <p:cNvPr id="3" name="Image 0" descr="/home/claude/f4/img/minesec_sheet.png">    </p:cNvPr>
+          <p:cNvPicPr>
+            <a:picLocks noChangeAspect="1"/>
+          </p:cNvPicPr>
+          <p:nvPr/>
+        </p:nvPicPr>
+        <p:blipFill>
+          <a:blip r:embed="rId1"/>
+          <a:stretch>
+            <a:fillRect/>
+          </a:stretch>
+        </p:blipFill>
+        <p:spPr>
+          <a:xfrm>
+            <a:off x="0" y="658368"/>
+            <a:ext cx="5120640" cy="5833872"/>
+          </a:xfrm>
+          <a:prstGeom prst="rect">
+            <a:avLst/>
+          </a:prstGeom>
+        </p:spPr>
+      </p:pic>
+      <p:sp>
+        <p:nvSpPr>
+          <p:cNvPr id="4" name="Text 1"/>
+          <p:cNvSpPr/>
+          <p:nvPr/>
+        </p:nvSpPr>
+        <p:spPr>
+          <a:xfrm>
+            <a:off x="5349240" y="1005840"/>
+            <a:ext cx="6522415" cy="731520"/>
+          </a:xfrm>
+          <a:prstGeom prst="rect">
+            <a:avLst/>
+          </a:prstGeom>
+          <a:noFill/>
+          <a:ln/>
+        </p:spPr>
+        <p:txBody>
+          <a:bodyPr wrap="square" lIns="0" tIns="0" rIns="0" bIns="0" rtlCol="0" anchor="ctr">
+            <a:normAutofit/>
+          </a:bodyPr>
+          <a:lstStyle/>
+          <a:p>
+            <a:pPr algn="ctr" indent="0" marL="0">
+              <a:buNone/>
+            </a:pPr>
+            <a:r>
+              <a:rPr lang="en-US" sz="3600" b="1" dirty="0">
+                <a:solidFill>
+                  <a:srgbClr val="990011"/>
+                </a:solidFill>
+                <a:latin typeface="Times New Roman" pitchFamily="34" charset="0"/>
+                <a:ea typeface="Times New Roman" pitchFamily="34" charset="-122"/>
+                <a:cs typeface="Times New Roman" pitchFamily="34" charset="-120"/>
+              </a:rPr>
+              <a:t>Expected Answer</a:t>
+            </a:r>
+            <a:endParaRPr lang="en-US" sz="3600" dirty="0"/>
+          </a:p>
+        </p:txBody>
+      </p:sp>
+      <p:sp>
+        <p:nvSpPr>
+          <p:cNvPr id="5" name="Text 2"/>
+          <p:cNvSpPr/>
+          <p:nvPr/>
+        </p:nvSpPr>
+        <p:spPr>
+          <a:xfrm>
+            <a:off x="5349240" y="1783080"/>
+            <a:ext cx="6522415" cy="4663440"/>
+          </a:xfrm>
+          <a:prstGeom prst="rect">
+            <a:avLst/>
+          </a:prstGeom>
+          <a:noFill/>
+          <a:ln/>
+        </p:spPr>
+        <p:txBody>
+          <a:bodyPr wrap="square" lIns="0" tIns="0" rIns="0" bIns="0" rtlCol="0" anchor="t"/>
+          <a:lstStyle/>
+          <a:p>
+            <a:pPr algn="l" indent="0" marL="0">
+              <a:spcAft>
+                <a:spcPts val="800"/>
+              </a:spcAft>
+              <a:buNone/>
+            </a:pPr>
+            <a:r>
+              <a:rPr lang="en-US" sz="4000" dirty="0">
+                <a:solidFill>
+                  <a:srgbClr val="111111"/>
+                </a:solidFill>
+                <a:latin typeface="Times New Roman" pitchFamily="34" charset="0"/>
+                <a:ea typeface="Times New Roman" pitchFamily="34" charset="-122"/>
+                <a:cs typeface="Times New Roman" pitchFamily="34" charset="-120"/>
+              </a:rPr>
+              <a:t>It gets hot by day and cold at night, again and again.</a:t>
+            </a:r>
+            <a:endParaRPr lang="en-US" sz="4000" dirty="0"/>
+          </a:p>
+        </p:txBody>
+      </p:sp>
+      <p:sp>
+        <p:nvSpPr>
+          <p:cNvPr id="25" name="Slide Number Placeholder 0"/>
+          <p:cNvSpPr>
+            <a:spLocks noGrp="1"/>
+          </p:cNvSpPr>
+          <p:nvPr>
+            <p:ph type="sldNum" sz="quarter" idx="4294967295"/>
+          </p:nvPr>
+        </p:nvSpPr>
+        <p:spPr>
+          <a:xfrm>
+            <a:off x="27432" y="91440"/>
+            <a:ext cx="585216" cy="475488"/>
+          </a:xfrm>
+          <a:prstGeom prst="rect">
+            <a:avLst/>
+          </a:prstGeom>
+          <a:extLst>
+            <a:ext uri="{C572A759-6A51-4108-AA02-DFA0A04FC94B}">
+              <ma14:wrappingTextBoxFlag xmlns:ma14="http://schemas.microsoft.com/office/mac/drawingml/2011/main" val="0"/>
+            </a:ext>
+          </a:extLst>
+        </p:spPr>
+        <p:txBody>
+          <a:bodyPr/>
+          <a:lstStyle>
+            <a:lvl1pPr>
+              <a:defRPr sz="2000">
+                <a:solidFill>
+                  <a:srgbClr val="FFFFFF"/>
+                </a:solidFill>
+                <a:latin typeface="Calibri"/>
+                <a:ea typeface="Calibri"/>
+                <a:cs typeface="Calibri"/>
+              </a:defRPr>
+            </a:lvl1pPr>
+          </a:lstStyle>
+          <a:p>
+            <a:pPr algn="ctr"/>
+            <a:fld id="{F7021451-1387-4CA6-816F-3879F97B5CBC}" type="slidenum">
+              <a:rPr b="1" lang="en-US"/>
+              <a:t>41</a:t>
+            </a:fld>
+            <a:endParaRPr lang="en-US"/>
+          </a:p>
+        </p:txBody>
+      </p:sp>
+    </p:spTree>
+  </p:cSld>
+  <p:clrMapOvr>
+    <a:masterClrMapping/>
+  </p:clrMapOvr>
+</p:sld>
+</file>
+
+<file path=ppt/slides/slide42.xml><?xml version="1.0" encoding="utf-8"?>
+<p:sld xmlns:a="http://schemas.openxmlformats.org/drawingml/2006/main" xmlns:r="http://schemas.openxmlformats.org/officeDocument/2006/relationships" xmlns:p="http://schemas.openxmlformats.org/presentationml/2006/main">
+  <p:cSld name="Slide 42">
+    <p:spTree>
+      <p:nvGrpSpPr>
+        <p:cNvPr id="1" name=""/>
+        <p:cNvGrpSpPr/>
+        <p:nvPr/>
+      </p:nvGrpSpPr>
+      <p:grpSpPr>
+        <a:xfrm>
+          <a:off x="0" y="0"/>
+          <a:ext cx="0" cy="0"/>
+          <a:chOff x="0" y="0"/>
+          <a:chExt cx="0" cy="0"/>
+        </a:xfrm>
+      </p:grpSpPr>
+      <p:sp>
+        <p:nvSpPr>
+          <p:cNvPr id="2" name="Text 0"/>
+          <p:cNvSpPr/>
+          <p:nvPr/>
+        </p:nvSpPr>
+        <p:spPr>
+          <a:xfrm>
+            <a:off x="457200" y="713232"/>
+            <a:ext cx="11368735" cy="274320"/>
+          </a:xfrm>
+          <a:prstGeom prst="rect">
+            <a:avLst/>
+          </a:prstGeom>
+          <a:noFill/>
+          <a:ln/>
+        </p:spPr>
+        <p:txBody>
+          <a:bodyPr wrap="square" lIns="0" tIns="0" rIns="0" bIns="0" rtlCol="0" anchor="ctr"/>
+          <a:lstStyle/>
+          <a:p>
+            <a:pPr algn="r" indent="0" marL="0">
+              <a:buNone/>
+            </a:pPr>
+            <a:r>
+              <a:rPr lang="en-US" sz="1400" b="1" dirty="0">
+                <a:solidFill>
+                  <a:srgbClr val="1C3F6E"/>
+                </a:solidFill>
+                <a:latin typeface="Calibri" pitchFamily="34" charset="0"/>
+                <a:ea typeface="Calibri" pitchFamily="34" charset="-122"/>
+                <a:cs typeface="Calibri" pitchFamily="34" charset="-120"/>
+              </a:rPr>
+              <a:t>FORMATIVE EVALUATION</a:t>
+            </a:r>
+            <a:endParaRPr lang="en-US" sz="1400" dirty="0"/>
+          </a:p>
+        </p:txBody>
+      </p:sp>
+      <p:pic>
+        <p:nvPicPr>
+          <p:cNvPr id="3" name="Image 0" descr="/home/claude/f4/img/minesec_sheet.png">    </p:cNvPr>
+          <p:cNvPicPr>
+            <a:picLocks noChangeAspect="1"/>
+          </p:cNvPicPr>
+          <p:nvPr/>
+        </p:nvPicPr>
+        <p:blipFill>
+          <a:blip r:embed="rId1"/>
+          <a:stretch>
+            <a:fillRect/>
+          </a:stretch>
+        </p:blipFill>
+        <p:spPr>
+          <a:xfrm>
+            <a:off x="0" y="658368"/>
+            <a:ext cx="5120640" cy="5833872"/>
+          </a:xfrm>
+          <a:prstGeom prst="rect">
+            <a:avLst/>
+          </a:prstGeom>
+        </p:spPr>
+      </p:pic>
+      <p:sp>
+        <p:nvSpPr>
+          <p:cNvPr id="4" name="Text 1"/>
+          <p:cNvSpPr/>
+          <p:nvPr/>
+        </p:nvSpPr>
+        <p:spPr>
+          <a:xfrm>
+            <a:off x="5349240" y="1005840"/>
+            <a:ext cx="6522415" cy="731520"/>
+          </a:xfrm>
+          <a:prstGeom prst="rect">
+            <a:avLst/>
+          </a:prstGeom>
+          <a:noFill/>
+          <a:ln/>
+        </p:spPr>
+        <p:txBody>
+          <a:bodyPr wrap="square" lIns="0" tIns="0" rIns="0" bIns="0" rtlCol="0" anchor="ctr">
+            <a:normAutofit/>
+          </a:bodyPr>
+          <a:lstStyle/>
+          <a:p>
+            <a:pPr algn="ctr" indent="0" marL="0">
+              <a:buNone/>
+            </a:pPr>
+            <a:r>
+              <a:rPr lang="en-US" sz="3600" b="1" dirty="0">
+                <a:solidFill>
+                  <a:srgbClr val="990011"/>
+                </a:solidFill>
+                <a:latin typeface="Times New Roman" pitchFamily="34" charset="0"/>
+                <a:ea typeface="Times New Roman" pitchFamily="34" charset="-122"/>
+                <a:cs typeface="Times New Roman" pitchFamily="34" charset="-120"/>
+              </a:rPr>
+              <a:t>Evaluation 2</a:t>
+            </a:r>
+            <a:endParaRPr lang="en-US" sz="3600" dirty="0"/>
+          </a:p>
+        </p:txBody>
+      </p:sp>
+      <p:sp>
+        <p:nvSpPr>
+          <p:cNvPr id="5" name="Text 2"/>
+          <p:cNvSpPr/>
+          <p:nvPr/>
+        </p:nvSpPr>
+        <p:spPr>
+          <a:xfrm>
+            <a:off x="5349240" y="1783080"/>
+            <a:ext cx="6522415" cy="4663440"/>
+          </a:xfrm>
+          <a:prstGeom prst="rect">
+            <a:avLst/>
+          </a:prstGeom>
+          <a:noFill/>
+          <a:ln/>
+        </p:spPr>
+        <p:txBody>
+          <a:bodyPr wrap="square" lIns="0" tIns="0" rIns="0" bIns="0" rtlCol="0" anchor="t"/>
+          <a:lstStyle/>
+          <a:p>
+            <a:pPr algn="l" indent="0" marL="0">
+              <a:spcAft>
+                <a:spcPts val="800"/>
+              </a:spcAft>
+              <a:buNone/>
+            </a:pPr>
+            <a:r>
+              <a:rPr lang="en-US" sz="4000" dirty="0">
+                <a:solidFill>
+                  <a:srgbClr val="111111"/>
+                </a:solidFill>
+                <a:latin typeface="Times New Roman" pitchFamily="34" charset="0"/>
+                <a:ea typeface="Times New Roman" pitchFamily="34" charset="-122"/>
+                <a:cs typeface="Times New Roman" pitchFamily="34" charset="-120"/>
+              </a:rPr>
+              <a:t>How do roots break rocks?</a:t>
+            </a:r>
+            <a:endParaRPr lang="en-US" sz="4000" dirty="0"/>
+          </a:p>
+        </p:txBody>
+      </p:sp>
+      <p:sp>
+        <p:nvSpPr>
+          <p:cNvPr id="25" name="Slide Number Placeholder 0"/>
+          <p:cNvSpPr>
+            <a:spLocks noGrp="1"/>
+          </p:cNvSpPr>
+          <p:nvPr>
+            <p:ph type="sldNum" sz="quarter" idx="4294967295"/>
+          </p:nvPr>
+        </p:nvSpPr>
+        <p:spPr>
+          <a:xfrm>
+            <a:off x="27432" y="91440"/>
+            <a:ext cx="585216" cy="475488"/>
+          </a:xfrm>
+          <a:prstGeom prst="rect">
+            <a:avLst/>
+          </a:prstGeom>
+          <a:extLst>
+            <a:ext uri="{C572A759-6A51-4108-AA02-DFA0A04FC94B}">
+              <ma14:wrappingTextBoxFlag xmlns:ma14="http://schemas.microsoft.com/office/mac/drawingml/2011/main" val="0"/>
+            </a:ext>
+          </a:extLst>
+        </p:spPr>
+        <p:txBody>
+          <a:bodyPr/>
+          <a:lstStyle>
+            <a:lvl1pPr>
+              <a:defRPr sz="2000">
+                <a:solidFill>
+                  <a:srgbClr val="FFFFFF"/>
+                </a:solidFill>
+                <a:latin typeface="Calibri"/>
+                <a:ea typeface="Calibri"/>
+                <a:cs typeface="Calibri"/>
+              </a:defRPr>
+            </a:lvl1pPr>
+          </a:lstStyle>
+          <a:p>
+            <a:pPr algn="ctr"/>
+            <a:fld id="{F7021451-1387-4CA6-816F-3879F97B5CBC}" type="slidenum">
+              <a:rPr b="1" lang="en-US"/>
+              <a:t>42</a:t>
+            </a:fld>
+            <a:endParaRPr lang="en-US"/>
+          </a:p>
+        </p:txBody>
+      </p:sp>
+    </p:spTree>
+  </p:cSld>
+  <p:clrMapOvr>
+    <a:masterClrMapping/>
+  </p:clrMapOvr>
+</p:sld>
+</file>
+
+<file path=ppt/slides/slide43.xml><?xml version="1.0" encoding="utf-8"?>
+<p:sld xmlns:a="http://schemas.openxmlformats.org/drawingml/2006/main" xmlns:r="http://schemas.openxmlformats.org/officeDocument/2006/relationships" xmlns:p="http://schemas.openxmlformats.org/presentationml/2006/main">
+  <p:cSld name="Slide 43">
+    <p:spTree>
+      <p:nvGrpSpPr>
+        <p:cNvPr id="1" name=""/>
+        <p:cNvGrpSpPr/>
+        <p:nvPr/>
+      </p:nvGrpSpPr>
+      <p:grpSpPr>
+        <a:xfrm>
+          <a:off x="0" y="0"/>
+          <a:ext cx="0" cy="0"/>
+          <a:chOff x="0" y="0"/>
+          <a:chExt cx="0" cy="0"/>
+        </a:xfrm>
+      </p:grpSpPr>
+      <p:sp>
+        <p:nvSpPr>
+          <p:cNvPr id="2" name="Text 0"/>
+          <p:cNvSpPr/>
+          <p:nvPr/>
+        </p:nvSpPr>
+        <p:spPr>
+          <a:xfrm>
+            <a:off x="457200" y="713232"/>
+            <a:ext cx="11368735" cy="274320"/>
+          </a:xfrm>
+          <a:prstGeom prst="rect">
+            <a:avLst/>
+          </a:prstGeom>
+          <a:noFill/>
+          <a:ln/>
+        </p:spPr>
+        <p:txBody>
+          <a:bodyPr wrap="square" lIns="0" tIns="0" rIns="0" bIns="0" rtlCol="0" anchor="ctr"/>
+          <a:lstStyle/>
+          <a:p>
+            <a:pPr algn="r" indent="0" marL="0">
+              <a:buNone/>
+            </a:pPr>
+            <a:r>
+              <a:rPr lang="en-US" sz="1400" b="1" dirty="0">
+                <a:solidFill>
+                  <a:srgbClr val="1C3F6E"/>
+                </a:solidFill>
+                <a:latin typeface="Calibri" pitchFamily="34" charset="0"/>
+                <a:ea typeface="Calibri" pitchFamily="34" charset="-122"/>
+                <a:cs typeface="Calibri" pitchFamily="34" charset="-120"/>
+              </a:rPr>
+              <a:t>FORMATIVE EVALUATION</a:t>
+            </a:r>
+            <a:endParaRPr lang="en-US" sz="1400" dirty="0"/>
+          </a:p>
+        </p:txBody>
+      </p:sp>
+      <p:pic>
+        <p:nvPicPr>
+          <p:cNvPr id="3" name="Image 0" descr="/home/claude/f4/img/minesec_sheet.png">    </p:cNvPr>
+          <p:cNvPicPr>
+            <a:picLocks noChangeAspect="1"/>
+          </p:cNvPicPr>
+          <p:nvPr/>
+        </p:nvPicPr>
+        <p:blipFill>
+          <a:blip r:embed="rId1"/>
+          <a:stretch>
+            <a:fillRect/>
+          </a:stretch>
+        </p:blipFill>
+        <p:spPr>
+          <a:xfrm>
+            <a:off x="0" y="658368"/>
+            <a:ext cx="5120640" cy="5833872"/>
+          </a:xfrm>
+          <a:prstGeom prst="rect">
+            <a:avLst/>
+          </a:prstGeom>
+        </p:spPr>
+      </p:pic>
+      <p:sp>
+        <p:nvSpPr>
+          <p:cNvPr id="4" name="Text 1"/>
+          <p:cNvSpPr/>
+          <p:nvPr/>
+        </p:nvSpPr>
+        <p:spPr>
+          <a:xfrm>
+            <a:off x="5349240" y="1005840"/>
+            <a:ext cx="6522415" cy="731520"/>
+          </a:xfrm>
+          <a:prstGeom prst="rect">
+            <a:avLst/>
+          </a:prstGeom>
+          <a:noFill/>
+          <a:ln/>
+        </p:spPr>
+        <p:txBody>
+          <a:bodyPr wrap="square" lIns="0" tIns="0" rIns="0" bIns="0" rtlCol="0" anchor="ctr">
+            <a:normAutofit/>
+          </a:bodyPr>
+          <a:lstStyle/>
+          <a:p>
+            <a:pPr algn="ctr" indent="0" marL="0">
+              <a:buNone/>
+            </a:pPr>
+            <a:r>
+              <a:rPr lang="en-US" sz="3600" b="1" dirty="0">
+                <a:solidFill>
+                  <a:srgbClr val="990011"/>
+                </a:solidFill>
+                <a:latin typeface="Times New Roman" pitchFamily="34" charset="0"/>
+                <a:ea typeface="Times New Roman" pitchFamily="34" charset="-122"/>
+                <a:cs typeface="Times New Roman" pitchFamily="34" charset="-120"/>
+              </a:rPr>
+              <a:t>Expected Answer</a:t>
+            </a:r>
+            <a:endParaRPr lang="en-US" sz="3600" dirty="0"/>
+          </a:p>
+        </p:txBody>
+      </p:sp>
+      <p:sp>
+        <p:nvSpPr>
+          <p:cNvPr id="5" name="Text 2"/>
+          <p:cNvSpPr/>
+          <p:nvPr/>
+        </p:nvSpPr>
+        <p:spPr>
+          <a:xfrm>
+            <a:off x="5349240" y="1783080"/>
+            <a:ext cx="6522415" cy="4663440"/>
+          </a:xfrm>
+          <a:prstGeom prst="rect">
+            <a:avLst/>
+          </a:prstGeom>
+          <a:noFill/>
+          <a:ln/>
+        </p:spPr>
+        <p:txBody>
+          <a:bodyPr wrap="square" lIns="0" tIns="0" rIns="0" bIns="0" rtlCol="0" anchor="t"/>
+          <a:lstStyle/>
+          <a:p>
+            <a:pPr algn="l" indent="0" marL="0">
+              <a:spcAft>
+                <a:spcPts val="800"/>
+              </a:spcAft>
+              <a:buNone/>
+            </a:pPr>
+            <a:r>
+              <a:rPr lang="en-US" sz="4000" dirty="0">
+                <a:solidFill>
+                  <a:srgbClr val="111111"/>
+                </a:solidFill>
+                <a:latin typeface="Times New Roman" pitchFamily="34" charset="0"/>
+                <a:ea typeface="Times New Roman" pitchFamily="34" charset="-122"/>
+                <a:cs typeface="Times New Roman" pitchFamily="34" charset="-120"/>
+              </a:rPr>
+              <a:t>They grow in cracks and push the rock apart.</a:t>
+            </a:r>
+            <a:endParaRPr lang="en-US" sz="4000" dirty="0"/>
+          </a:p>
+        </p:txBody>
+      </p:sp>
+      <p:sp>
+        <p:nvSpPr>
+          <p:cNvPr id="25" name="Slide Number Placeholder 0"/>
+          <p:cNvSpPr>
+            <a:spLocks noGrp="1"/>
+          </p:cNvSpPr>
+          <p:nvPr>
+            <p:ph type="sldNum" sz="quarter" idx="4294967295"/>
+          </p:nvPr>
+        </p:nvSpPr>
+        <p:spPr>
+          <a:xfrm>
+            <a:off x="27432" y="91440"/>
+            <a:ext cx="585216" cy="475488"/>
+          </a:xfrm>
+          <a:prstGeom prst="rect">
+            <a:avLst/>
+          </a:prstGeom>
+          <a:extLst>
+            <a:ext uri="{C572A759-6A51-4108-AA02-DFA0A04FC94B}">
+              <ma14:wrappingTextBoxFlag xmlns:ma14="http://schemas.microsoft.com/office/mac/drawingml/2011/main" val="0"/>
+            </a:ext>
+          </a:extLst>
+        </p:spPr>
+        <p:txBody>
+          <a:bodyPr/>
+          <a:lstStyle>
+            <a:lvl1pPr>
+              <a:defRPr sz="2000">
+                <a:solidFill>
+                  <a:srgbClr val="FFFFFF"/>
+                </a:solidFill>
+                <a:latin typeface="Calibri"/>
+                <a:ea typeface="Calibri"/>
+                <a:cs typeface="Calibri"/>
+              </a:defRPr>
+            </a:lvl1pPr>
+          </a:lstStyle>
+          <a:p>
+            <a:pPr algn="ctr"/>
+            <a:fld id="{F7021451-1387-4CA6-816F-3879F97B5CBC}" type="slidenum">
+              <a:rPr b="1" lang="en-US"/>
+              <a:t>43</a:t>
+            </a:fld>
+            <a:endParaRPr lang="en-US"/>
+          </a:p>
+        </p:txBody>
+      </p:sp>
+    </p:spTree>
+  </p:cSld>
+  <p:clrMapOvr>
+    <a:masterClrMapping/>
+  </p:clrMapOvr>
+</p:sld>
+</file>
+
+<file path=ppt/slides/slide44.xml><?xml version="1.0" encoding="utf-8"?>
+<p:sld xmlns:a="http://schemas.openxmlformats.org/drawingml/2006/main" xmlns:r="http://schemas.openxmlformats.org/officeDocument/2006/relationships" xmlns:p="http://schemas.openxmlformats.org/presentationml/2006/main">
+  <p:cSld name="Slide 44">
+    <p:spTree>
+      <p:nvGrpSpPr>
+        <p:cNvPr id="1" name=""/>
+        <p:cNvGrpSpPr/>
+        <p:nvPr/>
+      </p:nvGrpSpPr>
+      <p:grpSpPr>
+        <a:xfrm>
+          <a:off x="0" y="0"/>
+          <a:ext cx="0" cy="0"/>
+          <a:chOff x="0" y="0"/>
+          <a:chExt cx="0" cy="0"/>
+        </a:xfrm>
+      </p:grpSpPr>
+      <p:sp>
+        <p:nvSpPr>
+          <p:cNvPr id="2" name="Text 0"/>
+          <p:cNvSpPr/>
+          <p:nvPr/>
+        </p:nvSpPr>
+        <p:spPr>
+          <a:xfrm>
+            <a:off x="457200" y="713232"/>
+            <a:ext cx="11368735" cy="274320"/>
+          </a:xfrm>
+          <a:prstGeom prst="rect">
+            <a:avLst/>
+          </a:prstGeom>
+          <a:noFill/>
+          <a:ln/>
+        </p:spPr>
+        <p:txBody>
+          <a:bodyPr wrap="square" lIns="0" tIns="0" rIns="0" bIns="0" rtlCol="0" anchor="ctr"/>
+          <a:lstStyle/>
+          <a:p>
+            <a:pPr algn="r" indent="0" marL="0">
+              <a:buNone/>
+            </a:pPr>
+            <a:r>
+              <a:rPr lang="en-US" sz="1400" b="1" dirty="0">
+                <a:solidFill>
+                  <a:srgbClr val="1C3F6E"/>
+                </a:solidFill>
+                <a:latin typeface="Calibri" pitchFamily="34" charset="0"/>
+                <a:ea typeface="Calibri" pitchFamily="34" charset="-122"/>
+                <a:cs typeface="Calibri" pitchFamily="34" charset="-120"/>
+              </a:rPr>
+              <a:t>REMEDIATION</a:t>
+            </a:r>
+            <a:endParaRPr lang="en-US" sz="1400" dirty="0"/>
+          </a:p>
+        </p:txBody>
+      </p:sp>
+      <p:pic>
+        <p:nvPicPr>
+          <p:cNvPr id="3" name="Image 0" descr="/home/claude/f4/img/minesec_sheet.png">    </p:cNvPr>
+          <p:cNvPicPr>
+            <a:picLocks noChangeAspect="1"/>
+          </p:cNvPicPr>
+          <p:nvPr/>
+        </p:nvPicPr>
+        <p:blipFill>
+          <a:blip r:embed="rId1"/>
+          <a:stretch>
+            <a:fillRect/>
+          </a:stretch>
+        </p:blipFill>
+        <p:spPr>
+          <a:xfrm>
+            <a:off x="0" y="658368"/>
+            <a:ext cx="5120640" cy="5833872"/>
+          </a:xfrm>
+          <a:prstGeom prst="rect">
+            <a:avLst/>
+          </a:prstGeom>
+        </p:spPr>
+      </p:pic>
+      <p:sp>
+        <p:nvSpPr>
+          <p:cNvPr id="4" name="Text 1"/>
+          <p:cNvSpPr/>
+          <p:nvPr/>
+        </p:nvSpPr>
+        <p:spPr>
+          <a:xfrm>
+            <a:off x="5349240" y="1005840"/>
+            <a:ext cx="6522415" cy="731520"/>
+          </a:xfrm>
+          <a:prstGeom prst="rect">
+            <a:avLst/>
+          </a:prstGeom>
+          <a:noFill/>
+          <a:ln/>
+        </p:spPr>
+        <p:txBody>
+          <a:bodyPr wrap="square" lIns="0" tIns="0" rIns="0" bIns="0" rtlCol="0" anchor="ctr">
+            <a:normAutofit/>
+          </a:bodyPr>
+          <a:lstStyle/>
+          <a:p>
+            <a:pPr algn="ctr" indent="0" marL="0">
+              <a:buNone/>
+            </a:pPr>
+            <a:r>
+              <a:rPr lang="en-US" sz="3600" b="1" dirty="0">
+                <a:solidFill>
+                  <a:srgbClr val="990011"/>
+                </a:solidFill>
+                <a:latin typeface="Times New Roman" pitchFamily="34" charset="0"/>
+                <a:ea typeface="Times New Roman" pitchFamily="34" charset="-122"/>
+                <a:cs typeface="Times New Roman" pitchFamily="34" charset="-120"/>
+              </a:rPr>
+              <a:t>Remediation</a:t>
+            </a:r>
+            <a:endParaRPr lang="en-US" sz="3600" dirty="0"/>
+          </a:p>
+        </p:txBody>
+      </p:sp>
+      <p:sp>
+        <p:nvSpPr>
+          <p:cNvPr id="5" name="Text 2"/>
+          <p:cNvSpPr/>
+          <p:nvPr/>
+        </p:nvSpPr>
+        <p:spPr>
+          <a:xfrm>
+            <a:off x="5349240" y="1783080"/>
+            <a:ext cx="6522415" cy="4663440"/>
+          </a:xfrm>
+          <a:prstGeom prst="rect">
+            <a:avLst/>
+          </a:prstGeom>
+          <a:noFill/>
+          <a:ln/>
+        </p:spPr>
+        <p:txBody>
+          <a:bodyPr wrap="square" lIns="0" tIns="0" rIns="0" bIns="0" rtlCol="0" anchor="t"/>
+          <a:lstStyle/>
+          <a:p>
+            <a:pPr algn="l" indent="0" marL="0">
+              <a:spcAft>
+                <a:spcPts val="800"/>
+              </a:spcAft>
+              <a:buNone/>
+            </a:pPr>
+            <a:r>
+              <a:rPr lang="en-US" sz="4000" b="1" dirty="0">
+                <a:solidFill>
+                  <a:srgbClr val="111111"/>
+                </a:solidFill>
+                <a:latin typeface="Times New Roman" pitchFamily="34" charset="0"/>
+                <a:ea typeface="Times New Roman" pitchFamily="34" charset="-122"/>
+                <a:cs typeface="Times New Roman" pitchFamily="34" charset="-120"/>
+              </a:rPr>
+              <a:t>Fill in the blanks:</a:t>
+            </a:r>
+            <a:endParaRPr lang="en-US" sz="4000" dirty="0"/>
+          </a:p>
+          <a:p>
+            <a:pPr algn="l" marL="342900" indent="-342900">
+              <a:spcAft>
+                <a:spcPts val="800"/>
+              </a:spcAft>
+              <a:buSzPct val="100000"/>
+              <a:buFont typeface="+mj-lt"/>
+              <a:buAutoNum type="arabicPeriod" startAt="1"/>
+            </a:pPr>
+            <a:r>
+              <a:rPr lang="en-US" sz="4000" dirty="0">
+                <a:solidFill>
+                  <a:srgbClr val="111111"/>
+                </a:solidFill>
+                <a:latin typeface="Times New Roman" pitchFamily="34" charset="0"/>
+                <a:ea typeface="Times New Roman" pitchFamily="34" charset="-122"/>
+                <a:cs typeface="Times New Roman" pitchFamily="34" charset="-120"/>
+              </a:rPr>
+              <a:t>The peeling of rock like an onion is ______.</a:t>
+            </a:r>
+            <a:endParaRPr lang="en-US" sz="4000" dirty="0"/>
+          </a:p>
+          <a:p>
+            <a:pPr algn="l" marL="342900" indent="-342900">
+              <a:spcAft>
+                <a:spcPts val="800"/>
+              </a:spcAft>
+              <a:buSzPct val="100000"/>
+              <a:buFont typeface="+mj-lt"/>
+              <a:buAutoNum type="arabicPeriod" startAt="1"/>
+            </a:pPr>
+            <a:r>
+              <a:rPr lang="en-US" sz="4000" dirty="0">
+                <a:solidFill>
+                  <a:srgbClr val="111111"/>
+                </a:solidFill>
+                <a:latin typeface="Times New Roman" pitchFamily="34" charset="0"/>
+                <a:ea typeface="Times New Roman" pitchFamily="34" charset="-122"/>
+                <a:cs typeface="Times New Roman" pitchFamily="34" charset="-120"/>
+              </a:rPr>
+              <a:t>Water that freezes in cracks causes ______ shattering.</a:t>
+            </a:r>
+            <a:endParaRPr lang="en-US" sz="4000" dirty="0"/>
+          </a:p>
+        </p:txBody>
+      </p:sp>
+      <p:sp>
+        <p:nvSpPr>
+          <p:cNvPr id="25" name="Slide Number Placeholder 0"/>
+          <p:cNvSpPr>
+            <a:spLocks noGrp="1"/>
+          </p:cNvSpPr>
+          <p:nvPr>
+            <p:ph type="sldNum" sz="quarter" idx="4294967295"/>
+          </p:nvPr>
+        </p:nvSpPr>
+        <p:spPr>
+          <a:xfrm>
+            <a:off x="27432" y="91440"/>
+            <a:ext cx="585216" cy="475488"/>
+          </a:xfrm>
+          <a:prstGeom prst="rect">
+            <a:avLst/>
+          </a:prstGeom>
+          <a:extLst>
+            <a:ext uri="{C572A759-6A51-4108-AA02-DFA0A04FC94B}">
+              <ma14:wrappingTextBoxFlag xmlns:ma14="http://schemas.microsoft.com/office/mac/drawingml/2011/main" val="0"/>
+            </a:ext>
+          </a:extLst>
+        </p:spPr>
+        <p:txBody>
+          <a:bodyPr/>
+          <a:lstStyle>
+            <a:lvl1pPr>
+              <a:defRPr sz="2000">
+                <a:solidFill>
+                  <a:srgbClr val="FFFFFF"/>
+                </a:solidFill>
+                <a:latin typeface="Calibri"/>
+                <a:ea typeface="Calibri"/>
+                <a:cs typeface="Calibri"/>
+              </a:defRPr>
+            </a:lvl1pPr>
+          </a:lstStyle>
+          <a:p>
+            <a:pPr algn="ctr"/>
+            <a:fld id="{F7021451-1387-4CA6-816F-3879F97B5CBC}" type="slidenum">
+              <a:rPr b="1" lang="en-US"/>
+              <a:t>44</a:t>
+            </a:fld>
+            <a:endParaRPr lang="en-US"/>
+          </a:p>
+        </p:txBody>
+      </p:sp>
+    </p:spTree>
+  </p:cSld>
+  <p:clrMapOvr>
+    <a:masterClrMapping/>
+  </p:clrMapOvr>
+</p:sld>
+</file>
+
+<file path=ppt/slides/slide45.xml><?xml version="1.0" encoding="utf-8"?>
+<p:sld xmlns:a="http://schemas.openxmlformats.org/drawingml/2006/main" xmlns:r="http://schemas.openxmlformats.org/officeDocument/2006/relationships" xmlns:p="http://schemas.openxmlformats.org/presentationml/2006/main">
+  <p:cSld name="Slide 45">
+    <p:spTree>
+      <p:nvGrpSpPr>
+        <p:cNvPr id="1" name=""/>
+        <p:cNvGrpSpPr/>
+        <p:nvPr/>
+      </p:nvGrpSpPr>
+      <p:grpSpPr>
+        <a:xfrm>
+          <a:off x="0" y="0"/>
+          <a:ext cx="0" cy="0"/>
+          <a:chOff x="0" y="0"/>
+          <a:chExt cx="0" cy="0"/>
+        </a:xfrm>
+      </p:grpSpPr>
+      <p:sp>
+        <p:nvSpPr>
+          <p:cNvPr id="2" name="Text 0"/>
+          <p:cNvSpPr/>
+          <p:nvPr/>
+        </p:nvSpPr>
+        <p:spPr>
+          <a:xfrm>
+            <a:off x="457200" y="713232"/>
+            <a:ext cx="11368735" cy="274320"/>
+          </a:xfrm>
+          <a:prstGeom prst="rect">
+            <a:avLst/>
+          </a:prstGeom>
+          <a:noFill/>
+          <a:ln/>
+        </p:spPr>
+        <p:txBody>
+          <a:bodyPr wrap="square" lIns="0" tIns="0" rIns="0" bIns="0" rtlCol="0" anchor="ctr"/>
+          <a:lstStyle/>
+          <a:p>
+            <a:pPr algn="r" indent="0" marL="0">
+              <a:buNone/>
+            </a:pPr>
+            <a:r>
+              <a:rPr lang="en-US" sz="1400" b="1" dirty="0">
+                <a:solidFill>
+                  <a:srgbClr val="1C3F6E"/>
+                </a:solidFill>
+                <a:latin typeface="Calibri" pitchFamily="34" charset="0"/>
+                <a:ea typeface="Calibri" pitchFamily="34" charset="-122"/>
+                <a:cs typeface="Calibri" pitchFamily="34" charset="-120"/>
+              </a:rPr>
+              <a:t>REMEDIATION</a:t>
+            </a:r>
+            <a:endParaRPr lang="en-US" sz="1400" dirty="0"/>
+          </a:p>
+        </p:txBody>
+      </p:sp>
+      <p:pic>
+        <p:nvPicPr>
+          <p:cNvPr id="3" name="Image 0" descr="/home/claude/f4/img/minesec_sheet.png">    </p:cNvPr>
+          <p:cNvPicPr>
+            <a:picLocks noChangeAspect="1"/>
+          </p:cNvPicPr>
+          <p:nvPr/>
+        </p:nvPicPr>
+        <p:blipFill>
+          <a:blip r:embed="rId1"/>
+          <a:stretch>
+            <a:fillRect/>
+          </a:stretch>
+        </p:blipFill>
+        <p:spPr>
+          <a:xfrm>
+            <a:off x="0" y="658368"/>
+            <a:ext cx="5120640" cy="5833872"/>
+          </a:xfrm>
+          <a:prstGeom prst="rect">
+            <a:avLst/>
+          </a:prstGeom>
+        </p:spPr>
+      </p:pic>
+      <p:sp>
+        <p:nvSpPr>
+          <p:cNvPr id="4" name="Text 1"/>
+          <p:cNvSpPr/>
+          <p:nvPr/>
+        </p:nvSpPr>
+        <p:spPr>
+          <a:xfrm>
+            <a:off x="5349240" y="1005840"/>
+            <a:ext cx="6522415" cy="731520"/>
+          </a:xfrm>
+          <a:prstGeom prst="rect">
+            <a:avLst/>
+          </a:prstGeom>
+          <a:noFill/>
+          <a:ln/>
+        </p:spPr>
+        <p:txBody>
+          <a:bodyPr wrap="square" lIns="0" tIns="0" rIns="0" bIns="0" rtlCol="0" anchor="ctr">
+            <a:normAutofit/>
+          </a:bodyPr>
+          <a:lstStyle/>
+          <a:p>
+            <a:pPr algn="ctr" indent="0" marL="0">
+              <a:buNone/>
+            </a:pPr>
+            <a:r>
+              <a:rPr lang="en-US" sz="3600" b="1" dirty="0">
+                <a:solidFill>
+                  <a:srgbClr val="990011"/>
+                </a:solidFill>
+                <a:latin typeface="Times New Roman" pitchFamily="34" charset="0"/>
+                <a:ea typeface="Times New Roman" pitchFamily="34" charset="-122"/>
+                <a:cs typeface="Times New Roman" pitchFamily="34" charset="-120"/>
+              </a:rPr>
+              <a:t>Remediation (continued)</a:t>
+            </a:r>
+            <a:endParaRPr lang="en-US" sz="3600" dirty="0"/>
+          </a:p>
+        </p:txBody>
+      </p:sp>
+      <p:sp>
+        <p:nvSpPr>
+          <p:cNvPr id="5" name="Text 2"/>
+          <p:cNvSpPr/>
+          <p:nvPr/>
+        </p:nvSpPr>
+        <p:spPr>
+          <a:xfrm>
+            <a:off x="5349240" y="1783080"/>
+            <a:ext cx="6522415" cy="4663440"/>
+          </a:xfrm>
+          <a:prstGeom prst="rect">
+            <a:avLst/>
+          </a:prstGeom>
+          <a:noFill/>
+          <a:ln/>
+        </p:spPr>
+        <p:txBody>
+          <a:bodyPr wrap="square" lIns="0" tIns="0" rIns="0" bIns="0" rtlCol="0" anchor="t"/>
+          <a:lstStyle/>
+          <a:p>
+            <a:pPr algn="l" marL="342900" indent="-342900">
+              <a:spcAft>
+                <a:spcPts val="800"/>
+              </a:spcAft>
+              <a:buSzPct val="100000"/>
+              <a:buFont typeface="+mj-lt"/>
+              <a:buAutoNum type="arabicPeriod" startAt="1"/>
+            </a:pPr>
+            <a:r>
+              <a:rPr lang="en-US" sz="4000" dirty="0">
+                <a:solidFill>
+                  <a:srgbClr val="111111"/>
+                </a:solidFill>
+                <a:latin typeface="Times New Roman" pitchFamily="34" charset="0"/>
+                <a:ea typeface="Times New Roman" pitchFamily="34" charset="-122"/>
+                <a:cs typeface="Times New Roman" pitchFamily="34" charset="-120"/>
+              </a:rPr>
+              <a:t>Physical weathering does not change the ______ of the rock.</a:t>
+            </a:r>
+            <a:endParaRPr lang="en-US" sz="4000" dirty="0"/>
+          </a:p>
+        </p:txBody>
+      </p:sp>
+      <p:sp>
+        <p:nvSpPr>
+          <p:cNvPr id="25" name="Slide Number Placeholder 0"/>
+          <p:cNvSpPr>
+            <a:spLocks noGrp="1"/>
+          </p:cNvSpPr>
+          <p:nvPr>
+            <p:ph type="sldNum" sz="quarter" idx="4294967295"/>
+          </p:nvPr>
+        </p:nvSpPr>
+        <p:spPr>
+          <a:xfrm>
+            <a:off x="27432" y="91440"/>
+            <a:ext cx="585216" cy="475488"/>
+          </a:xfrm>
+          <a:prstGeom prst="rect">
+            <a:avLst/>
+          </a:prstGeom>
+          <a:extLst>
+            <a:ext uri="{C572A759-6A51-4108-AA02-DFA0A04FC94B}">
+              <ma14:wrappingTextBoxFlag xmlns:ma14="http://schemas.microsoft.com/office/mac/drawingml/2011/main" val="0"/>
+            </a:ext>
+          </a:extLst>
+        </p:spPr>
+        <p:txBody>
+          <a:bodyPr/>
+          <a:lstStyle>
+            <a:lvl1pPr>
+              <a:defRPr sz="2000">
+                <a:solidFill>
+                  <a:srgbClr val="FFFFFF"/>
+                </a:solidFill>
+                <a:latin typeface="Calibri"/>
+                <a:ea typeface="Calibri"/>
+                <a:cs typeface="Calibri"/>
+              </a:defRPr>
+            </a:lvl1pPr>
+          </a:lstStyle>
+          <a:p>
+            <a:pPr algn="ctr"/>
+            <a:fld id="{F7021451-1387-4CA6-816F-3879F97B5CBC}" type="slidenum">
+              <a:rPr b="1" lang="en-US"/>
+              <a:t>45</a:t>
+            </a:fld>
+            <a:endParaRPr lang="en-US"/>
+          </a:p>
+        </p:txBody>
+      </p:sp>
+    </p:spTree>
+  </p:cSld>
+  <p:clrMapOvr>
+    <a:masterClrMapping/>
+  </p:clrMapOvr>
+</p:sld>
+</file>
+
+<file path=ppt/slides/slide46.xml><?xml version="1.0" encoding="utf-8"?>
+<p:sld xmlns:a="http://schemas.openxmlformats.org/drawingml/2006/main" xmlns:r="http://schemas.openxmlformats.org/officeDocument/2006/relationships" xmlns:p="http://schemas.openxmlformats.org/presentationml/2006/main">
+  <p:cSld name="Slide 46">
+    <p:spTree>
+      <p:nvGrpSpPr>
+        <p:cNvPr id="1" name=""/>
+        <p:cNvGrpSpPr/>
+        <p:nvPr/>
+      </p:nvGrpSpPr>
+      <p:grpSpPr>
+        <a:xfrm>
+          <a:off x="0" y="0"/>
+          <a:ext cx="0" cy="0"/>
+          <a:chOff x="0" y="0"/>
+          <a:chExt cx="0" cy="0"/>
+        </a:xfrm>
+      </p:grpSpPr>
+      <p:sp>
+        <p:nvSpPr>
+          <p:cNvPr id="2" name="Text 0"/>
+          <p:cNvSpPr/>
+          <p:nvPr/>
+        </p:nvSpPr>
+        <p:spPr>
+          <a:xfrm>
+            <a:off x="457200" y="713232"/>
+            <a:ext cx="11368735" cy="274320"/>
+          </a:xfrm>
+          <a:prstGeom prst="rect">
+            <a:avLst/>
+          </a:prstGeom>
+          <a:noFill/>
+          <a:ln/>
+        </p:spPr>
+        <p:txBody>
+          <a:bodyPr wrap="square" lIns="0" tIns="0" rIns="0" bIns="0" rtlCol="0" anchor="ctr"/>
+          <a:lstStyle/>
+          <a:p>
+            <a:pPr algn="r" indent="0" marL="0">
+              <a:buNone/>
+            </a:pPr>
+            <a:r>
+              <a:rPr lang="en-US" sz="1400" b="1" dirty="0">
+                <a:solidFill>
+                  <a:srgbClr val="1C3F6E"/>
+                </a:solidFill>
+                <a:latin typeface="Calibri" pitchFamily="34" charset="0"/>
+                <a:ea typeface="Calibri" pitchFamily="34" charset="-122"/>
+                <a:cs typeface="Calibri" pitchFamily="34" charset="-120"/>
+              </a:rPr>
+              <a:t>HOMEWORK</a:t>
+            </a:r>
+            <a:endParaRPr lang="en-US" sz="1400" dirty="0"/>
+          </a:p>
+        </p:txBody>
+      </p:sp>
+      <p:pic>
+        <p:nvPicPr>
+          <p:cNvPr id="3" name="Image 0" descr="/home/claude/f4/img/minesec_sheet.png">    </p:cNvPr>
+          <p:cNvPicPr>
+            <a:picLocks noChangeAspect="1"/>
+          </p:cNvPicPr>
+          <p:nvPr/>
+        </p:nvPicPr>
+        <p:blipFill>
+          <a:blip r:embed="rId1"/>
+          <a:stretch>
+            <a:fillRect/>
+          </a:stretch>
+        </p:blipFill>
+        <p:spPr>
+          <a:xfrm>
+            <a:off x="0" y="658368"/>
+            <a:ext cx="5120640" cy="5833872"/>
+          </a:xfrm>
+          <a:prstGeom prst="rect">
+            <a:avLst/>
+          </a:prstGeom>
+        </p:spPr>
+      </p:pic>
+      <p:sp>
+        <p:nvSpPr>
+          <p:cNvPr id="4" name="Text 1"/>
+          <p:cNvSpPr/>
+          <p:nvPr/>
+        </p:nvSpPr>
+        <p:spPr>
+          <a:xfrm>
+            <a:off x="5349240" y="1005840"/>
+            <a:ext cx="6522415" cy="731520"/>
+          </a:xfrm>
+          <a:prstGeom prst="rect">
+            <a:avLst/>
+          </a:prstGeom>
+          <a:noFill/>
+          <a:ln/>
+        </p:spPr>
+        <p:txBody>
+          <a:bodyPr wrap="square" lIns="0" tIns="0" rIns="0" bIns="0" rtlCol="0" anchor="ctr">
+            <a:normAutofit/>
+          </a:bodyPr>
+          <a:lstStyle/>
+          <a:p>
+            <a:pPr algn="ctr" indent="0" marL="0">
+              <a:buNone/>
+            </a:pPr>
+            <a:r>
+              <a:rPr lang="en-US" sz="3600" b="1" dirty="0">
+                <a:solidFill>
+                  <a:srgbClr val="990011"/>
+                </a:solidFill>
+                <a:latin typeface="Times New Roman" pitchFamily="34" charset="0"/>
+                <a:ea typeface="Times New Roman" pitchFamily="34" charset="-122"/>
+                <a:cs typeface="Times New Roman" pitchFamily="34" charset="-120"/>
+              </a:rPr>
+              <a:t>Homework</a:t>
+            </a:r>
+            <a:endParaRPr lang="en-US" sz="3600" dirty="0"/>
+          </a:p>
+        </p:txBody>
+      </p:sp>
+      <p:sp>
+        <p:nvSpPr>
+          <p:cNvPr id="5" name="Text 2"/>
+          <p:cNvSpPr/>
+          <p:nvPr/>
+        </p:nvSpPr>
+        <p:spPr>
+          <a:xfrm>
+            <a:off x="5349240" y="1783080"/>
+            <a:ext cx="6522415" cy="4663440"/>
+          </a:xfrm>
+          <a:prstGeom prst="rect">
+            <a:avLst/>
+          </a:prstGeom>
+          <a:noFill/>
+          <a:ln/>
+        </p:spPr>
+        <p:txBody>
+          <a:bodyPr wrap="square" lIns="0" tIns="0" rIns="0" bIns="0" rtlCol="0" anchor="t"/>
+          <a:lstStyle/>
+          <a:p>
+            <a:pPr algn="l" indent="0" marL="0">
+              <a:spcAft>
+                <a:spcPts val="800"/>
+              </a:spcAft>
+              <a:buNone/>
+            </a:pPr>
+            <a:r>
+              <a:rPr lang="en-US" sz="4000" dirty="0">
+                <a:solidFill>
+                  <a:srgbClr val="111111"/>
+                </a:solidFill>
+                <a:latin typeface="Times New Roman" pitchFamily="34" charset="0"/>
+                <a:ea typeface="Times New Roman" pitchFamily="34" charset="-122"/>
+                <a:cs typeface="Times New Roman" pitchFamily="34" charset="-120"/>
+              </a:rPr>
+              <a:t>Look at an old iron gate, a roofing sheet or a nail left in the rain. Write what happened to it and what colour it became.</a:t>
+            </a:r>
+            <a:endParaRPr lang="en-US" sz="4000" dirty="0"/>
+          </a:p>
+        </p:txBody>
+      </p:sp>
+      <p:sp>
+        <p:nvSpPr>
+          <p:cNvPr id="25" name="Slide Number Placeholder 0"/>
+          <p:cNvSpPr>
+            <a:spLocks noGrp="1"/>
+          </p:cNvSpPr>
+          <p:nvPr>
+            <p:ph type="sldNum" sz="quarter" idx="4294967295"/>
+          </p:nvPr>
+        </p:nvSpPr>
+        <p:spPr>
+          <a:xfrm>
+            <a:off x="27432" y="91440"/>
+            <a:ext cx="585216" cy="475488"/>
+          </a:xfrm>
+          <a:prstGeom prst="rect">
+            <a:avLst/>
+          </a:prstGeom>
+          <a:extLst>
+            <a:ext uri="{C572A759-6A51-4108-AA02-DFA0A04FC94B}">
+              <ma14:wrappingTextBoxFlag xmlns:ma14="http://schemas.microsoft.com/office/mac/drawingml/2011/main" val="0"/>
+            </a:ext>
+          </a:extLst>
+        </p:spPr>
+        <p:txBody>
+          <a:bodyPr/>
+          <a:lstStyle>
+            <a:lvl1pPr>
+              <a:defRPr sz="2000">
+                <a:solidFill>
+                  <a:srgbClr val="FFFFFF"/>
+                </a:solidFill>
+                <a:latin typeface="Calibri"/>
+                <a:ea typeface="Calibri"/>
+                <a:cs typeface="Calibri"/>
+              </a:defRPr>
+            </a:lvl1pPr>
+          </a:lstStyle>
+          <a:p>
+            <a:pPr algn="ctr"/>
+            <a:fld id="{F7021451-1387-4CA6-816F-3879F97B5CBC}" type="slidenum">
+              <a:rPr b="1" lang="en-US"/>
+              <a:t>46</a:t>
+            </a:fld>
+            <a:endParaRPr lang="en-US"/>
+          </a:p>
+        </p:txBody>
+      </p:sp>
+    </p:spTree>
+  </p:cSld>
+  <p:clrMapOvr>
+    <a:masterClrMapping/>
+  </p:clrMapOvr>
+</p:sld>
+</file>
+
+<file path=ppt/slides/slide47.xml><?xml version="1.0" encoding="utf-8"?>
+<p:sld xmlns:a="http://schemas.openxmlformats.org/drawingml/2006/main" xmlns:r="http://schemas.openxmlformats.org/officeDocument/2006/relationships" xmlns:p="http://schemas.openxmlformats.org/presentationml/2006/main">
+  <p:cSld name="Slide 47">
+    <p:spTree>
+      <p:nvGrpSpPr>
+        <p:cNvPr id="1" name=""/>
+        <p:cNvGrpSpPr/>
+        <p:nvPr/>
+      </p:nvGrpSpPr>
+      <p:grpSpPr>
+        <a:xfrm>
+          <a:off x="0" y="0"/>
+          <a:ext cx="0" cy="0"/>
+          <a:chOff x="0" y="0"/>
+          <a:chExt cx="0" cy="0"/>
+        </a:xfrm>
+      </p:grpSpPr>
+      <p:sp>
+        <p:nvSpPr>
+          <p:cNvPr id="2" name="Text 0"/>
+          <p:cNvSpPr/>
+          <p:nvPr/>
+        </p:nvSpPr>
+        <p:spPr>
+          <a:xfrm>
+            <a:off x="457200" y="713232"/>
+            <a:ext cx="11368735" cy="274320"/>
+          </a:xfrm>
+          <a:prstGeom prst="rect">
+            <a:avLst/>
+          </a:prstGeom>
+          <a:noFill/>
+          <a:ln/>
+        </p:spPr>
+        <p:txBody>
+          <a:bodyPr wrap="square" lIns="0" tIns="0" rIns="0" bIns="0" rtlCol="0" anchor="ctr"/>
+          <a:lstStyle/>
+          <a:p>
+            <a:pPr algn="r" indent="0" marL="0">
+              <a:buNone/>
+            </a:pPr>
+            <a:r>
+              <a:rPr lang="en-US" sz="1400" b="1" dirty="0">
+                <a:solidFill>
+                  <a:srgbClr val="1C3F6E"/>
+                </a:solidFill>
+                <a:latin typeface="Calibri" pitchFamily="34" charset="0"/>
+                <a:ea typeface="Calibri" pitchFamily="34" charset="-122"/>
+                <a:cs typeface="Calibri" pitchFamily="34" charset="-120"/>
+              </a:rPr>
+              <a:t>NEXT LESSON</a:t>
+            </a:r>
+            <a:endParaRPr lang="en-US" sz="1400" dirty="0"/>
+          </a:p>
+        </p:txBody>
+      </p:sp>
+      <p:pic>
+        <p:nvPicPr>
+          <p:cNvPr id="3" name="Image 0" descr="/home/claude/f4/img/minesec_sheet.png">    </p:cNvPr>
+          <p:cNvPicPr>
+            <a:picLocks noChangeAspect="1"/>
+          </p:cNvPicPr>
+          <p:nvPr/>
+        </p:nvPicPr>
+        <p:blipFill>
+          <a:blip r:embed="rId1"/>
+          <a:stretch>
+            <a:fillRect/>
+          </a:stretch>
+        </p:blipFill>
+        <p:spPr>
+          <a:xfrm>
+            <a:off x="0" y="658368"/>
+            <a:ext cx="5120640" cy="5833872"/>
+          </a:xfrm>
+          <a:prstGeom prst="rect">
+            <a:avLst/>
+          </a:prstGeom>
+        </p:spPr>
+      </p:pic>
+      <p:sp>
+        <p:nvSpPr>
+          <p:cNvPr id="4" name="Text 1"/>
+          <p:cNvSpPr/>
+          <p:nvPr/>
+        </p:nvSpPr>
+        <p:spPr>
+          <a:xfrm>
+            <a:off x="5349240" y="1005840"/>
+            <a:ext cx="6522415" cy="731520"/>
+          </a:xfrm>
+          <a:prstGeom prst="rect">
+            <a:avLst/>
+          </a:prstGeom>
+          <a:noFill/>
+          <a:ln/>
+        </p:spPr>
+        <p:txBody>
+          <a:bodyPr wrap="square" lIns="0" tIns="0" rIns="0" bIns="0" rtlCol="0" anchor="ctr">
+            <a:normAutofit/>
+          </a:bodyPr>
+          <a:lstStyle/>
+          <a:p>
+            <a:pPr algn="ctr" indent="0" marL="0">
+              <a:buNone/>
+            </a:pPr>
+            <a:r>
+              <a:rPr lang="en-US" sz="3600" b="1" dirty="0">
+                <a:solidFill>
+                  <a:srgbClr val="990011"/>
+                </a:solidFill>
+                <a:latin typeface="Times New Roman" pitchFamily="34" charset="0"/>
+                <a:ea typeface="Times New Roman" pitchFamily="34" charset="-122"/>
+                <a:cs typeface="Times New Roman" pitchFamily="34" charset="-120"/>
+              </a:rPr>
+              <a:t>Next Lesson</a:t>
+            </a:r>
+            <a:endParaRPr lang="en-US" sz="3600" dirty="0"/>
+          </a:p>
+        </p:txBody>
+      </p:sp>
+      <p:sp>
+        <p:nvSpPr>
+          <p:cNvPr id="5" name="Text 2"/>
+          <p:cNvSpPr/>
+          <p:nvPr/>
+        </p:nvSpPr>
+        <p:spPr>
+          <a:xfrm>
+            <a:off x="5349240" y="1783080"/>
+            <a:ext cx="6522415" cy="4663440"/>
+          </a:xfrm>
+          <a:prstGeom prst="rect">
+            <a:avLst/>
+          </a:prstGeom>
+          <a:noFill/>
+          <a:ln/>
+        </p:spPr>
+        <p:txBody>
+          <a:bodyPr wrap="square" lIns="0" tIns="0" rIns="0" bIns="0" rtlCol="0" anchor="ctr"/>
+          <a:lstStyle/>
+          <a:p>
+            <a:pPr algn="ctr" indent="0" marL="0">
+              <a:spcAft>
+                <a:spcPts val="800"/>
+              </a:spcAft>
+              <a:buNone/>
+            </a:pPr>
+            <a:r>
+              <a:rPr lang="en-US" sz="4000" b="1" dirty="0">
+                <a:solidFill>
+                  <a:srgbClr val="111111"/>
+                </a:solidFill>
+                <a:latin typeface="Times New Roman" pitchFamily="34" charset="0"/>
+                <a:ea typeface="Times New Roman" pitchFamily="34" charset="-122"/>
+                <a:cs typeface="Times New Roman" pitchFamily="34" charset="-120"/>
+              </a:rPr>
+              <a:t>Our next lesson will be on:</a:t>
+            </a:r>
+            <a:endParaRPr lang="en-US" sz="4000" dirty="0"/>
+          </a:p>
+          <a:p>
+            <a:pPr algn="ctr" indent="0" marL="0">
+              <a:spcAft>
+                <a:spcPts val="800"/>
+              </a:spcAft>
+              <a:buNone/>
+            </a:pPr>
+            <a:r>
+              <a:rPr lang="en-US" sz="4000" b="1" dirty="0">
+                <a:solidFill>
+                  <a:srgbClr val="990011"/>
+                </a:solidFill>
+                <a:latin typeface="Times New Roman" pitchFamily="34" charset="0"/>
+                <a:ea typeface="Times New Roman" pitchFamily="34" charset="-122"/>
+                <a:cs typeface="Times New Roman" pitchFamily="34" charset="-120"/>
+              </a:rPr>
+              <a:t>Lesson 17: Chemical Weathering Processes and Products</a:t>
+            </a:r>
+            <a:endParaRPr lang="en-US" sz="4000" dirty="0"/>
+          </a:p>
+        </p:txBody>
+      </p:sp>
+      <p:sp>
+        <p:nvSpPr>
+          <p:cNvPr id="25" name="Slide Number Placeholder 0"/>
+          <p:cNvSpPr>
+            <a:spLocks noGrp="1"/>
+          </p:cNvSpPr>
+          <p:nvPr>
+            <p:ph type="sldNum" sz="quarter" idx="4294967295"/>
+          </p:nvPr>
+        </p:nvSpPr>
+        <p:spPr>
+          <a:xfrm>
+            <a:off x="27432" y="91440"/>
+            <a:ext cx="585216" cy="475488"/>
+          </a:xfrm>
+          <a:prstGeom prst="rect">
+            <a:avLst/>
+          </a:prstGeom>
+          <a:extLst>
+            <a:ext uri="{C572A759-6A51-4108-AA02-DFA0A04FC94B}">
+              <ma14:wrappingTextBoxFlag xmlns:ma14="http://schemas.microsoft.com/office/mac/drawingml/2011/main" val="0"/>
+            </a:ext>
+          </a:extLst>
+        </p:spPr>
+        <p:txBody>
+          <a:bodyPr/>
+          <a:lstStyle>
+            <a:lvl1pPr>
+              <a:defRPr sz="2000">
+                <a:solidFill>
+                  <a:srgbClr val="FFFFFF"/>
+                </a:solidFill>
+                <a:latin typeface="Calibri"/>
+                <a:ea typeface="Calibri"/>
+                <a:cs typeface="Calibri"/>
+              </a:defRPr>
+            </a:lvl1pPr>
+          </a:lstStyle>
+          <a:p>
+            <a:pPr algn="ctr"/>
+            <a:fld id="{F7021451-1387-4CA6-816F-3879F97B5CBC}" type="slidenum">
+              <a:rPr b="1" lang="en-US"/>
+              <a:t>47</a:t>
+            </a:fld>
+            <a:endParaRPr lang="en-US"/>
+          </a:p>
+        </p:txBody>
+      </p:sp>
+    </p:spTree>
+  </p:cSld>
+  <p:clrMapOvr>
+    <a:masterClrMapping/>
+  </p:clrMapOvr>
+</p:sld>
+</file>
+
+<file path=ppt/slides/slide48.xml><?xml version="1.0" encoding="utf-8"?>
+<p:sld xmlns:a="http://schemas.openxmlformats.org/drawingml/2006/main" xmlns:r="http://schemas.openxmlformats.org/officeDocument/2006/relationships" xmlns:p="http://schemas.openxmlformats.org/presentationml/2006/main">
+  <p:cSld name="Slide 48">
+    <p:spTree>
+      <p:nvGrpSpPr>
+        <p:cNvPr id="1" name=""/>
+        <p:cNvGrpSpPr/>
+        <p:nvPr/>
+      </p:nvGrpSpPr>
+      <p:grpSpPr>
+        <a:xfrm>
+          <a:off x="0" y="0"/>
+          <a:ext cx="0" cy="0"/>
+          <a:chOff x="0" y="0"/>
+          <a:chExt cx="0" cy="0"/>
+        </a:xfrm>
+      </p:grpSpPr>
+      <p:sp>
+        <p:nvSpPr>
+          <p:cNvPr id="2" name="Text 0"/>
+          <p:cNvSpPr/>
+          <p:nvPr/>
+        </p:nvSpPr>
+        <p:spPr>
+          <a:xfrm>
+            <a:off x="457200" y="713232"/>
+            <a:ext cx="11368735" cy="274320"/>
+          </a:xfrm>
+          <a:prstGeom prst="rect">
+            <a:avLst/>
+          </a:prstGeom>
+          <a:noFill/>
+          <a:ln/>
+        </p:spPr>
+        <p:txBody>
+          <a:bodyPr wrap="square" lIns="0" tIns="0" rIns="0" bIns="0" rtlCol="0" anchor="ctr"/>
+          <a:lstStyle/>
+          <a:p>
+            <a:pPr algn="r" indent="0" marL="0">
+              <a:buNone/>
+            </a:pPr>
+            <a:r>
+              <a:rPr lang="en-US" sz="1400" b="1" dirty="0">
+                <a:solidFill>
+                  <a:srgbClr val="1C3F6E"/>
+                </a:solidFill>
+                <a:latin typeface="Calibri" pitchFamily="34" charset="0"/>
+                <a:ea typeface="Calibri" pitchFamily="34" charset="-122"/>
+                <a:cs typeface="Calibri" pitchFamily="34" charset="-120"/>
+              </a:rPr>
               <a:t>BILINGUAL GAME</a:t>
             </a:r>
             <a:endParaRPr lang="en-US" sz="1400" dirty="0"/>
@@ -14471,7 +17296,7 @@
       </p:sp>
       <p:graphicFrame>
         <p:nvGraphicFramePr>
-          <p:cNvPr id="41" name="Table 0"/>
+          <p:cNvPr id="49" name="Table 0"/>
           <p:cNvGraphicFramePr>
             <a:graphicFrameLocks noGrp="1"/>
           </p:cNvGraphicFramePr>
@@ -15783,7 +18608,7 @@
             <a:pPr algn="ctr"/>
             <a:fld id="{F7021451-1387-4CA6-816F-3879F97B5CBC}" type="slidenum">
               <a:rPr b="1" lang="en-US"/>
-              <a:t>40</a:t>
+              <a:t>48</a:t>
             </a:fld>
             <a:endParaRPr lang="en-US"/>
           </a:p>
@@ -15797,9 +18622,9 @@
 </p:sld>
 </file>
 
-<file path=ppt/slides/slide41.xml><?xml version="1.0" encoding="utf-8"?>
+<file path=ppt/slides/slide49.xml><?xml version="1.0" encoding="utf-8"?>
 <p:sld xmlns:a="http://schemas.openxmlformats.org/drawingml/2006/main" xmlns:r="http://schemas.openxmlformats.org/officeDocument/2006/relationships" xmlns:p="http://schemas.openxmlformats.org/presentationml/2006/main">
-  <p:cSld name="Slide 41">
+  <p:cSld name="Slide 49">
     <p:spTree>
       <p:nvGrpSpPr>
         <p:cNvPr id="1" name=""/>
@@ -15894,7 +18719,7 @@
       </p:sp>
       <p:graphicFrame>
         <p:nvGraphicFramePr>
-          <p:cNvPr id="42" name="Table 0"/>
+          <p:cNvPr id="50" name="Table 0"/>
           <p:cNvGraphicFramePr>
             <a:graphicFrameLocks noGrp="1"/>
           </p:cNvGraphicFramePr>
@@ -16516,7 +19341,7 @@
             <a:pPr algn="ctr"/>
             <a:fld id="{F7021451-1387-4CA6-816F-3879F97B5CBC}" type="slidenum">
               <a:rPr b="1" lang="en-US"/>
-              <a:t>41</a:t>
+              <a:t>49</a:t>
             </a:fld>
             <a:endParaRPr lang="en-US"/>
           </a:p>
@@ -16530,9 +19355,9 @@
 </p:sld>
 </file>
 
-<file path=ppt/slides/slide42.xml><?xml version="1.0" encoding="utf-8"?>
+<file path=ppt/slides/slide5.xml><?xml version="1.0" encoding="utf-8"?>
 <p:sld xmlns:a="http://schemas.openxmlformats.org/drawingml/2006/main" xmlns:r="http://schemas.openxmlformats.org/officeDocument/2006/relationships" xmlns:p="http://schemas.openxmlformats.org/presentationml/2006/main">
-  <p:cSld name="Slide 42">
+  <p:cSld name="Slide 5">
     <p:spTree>
       <p:nvGrpSpPr>
         <p:cNvPr id="1" name=""/>
@@ -16580,6 +19405,225 @@
                 <a:ea typeface="Calibri" pitchFamily="34" charset="-122"/>
                 <a:cs typeface="Calibri" pitchFamily="34" charset="-120"/>
               </a:rPr>
+              <a:t>HOMEWORK CORRECTION</a:t>
+            </a:r>
+            <a:endParaRPr lang="en-US" sz="1400" dirty="0"/>
+          </a:p>
+        </p:txBody>
+      </p:sp>
+      <p:pic>
+        <p:nvPicPr>
+          <p:cNvPr id="3" name="Image 0" descr="/home/claude/f4/img/minesec_sheet.png">    </p:cNvPr>
+          <p:cNvPicPr>
+            <a:picLocks noChangeAspect="1"/>
+          </p:cNvPicPr>
+          <p:nvPr/>
+        </p:nvPicPr>
+        <p:blipFill>
+          <a:blip r:embed="rId1"/>
+          <a:stretch>
+            <a:fillRect/>
+          </a:stretch>
+        </p:blipFill>
+        <p:spPr>
+          <a:xfrm>
+            <a:off x="0" y="658368"/>
+            <a:ext cx="3840480" cy="5833872"/>
+          </a:xfrm>
+          <a:prstGeom prst="rect">
+            <a:avLst/>
+          </a:prstGeom>
+        </p:spPr>
+      </p:pic>
+      <p:sp>
+        <p:nvSpPr>
+          <p:cNvPr id="4" name="Text 1"/>
+          <p:cNvSpPr/>
+          <p:nvPr/>
+        </p:nvSpPr>
+        <p:spPr>
+          <a:xfrm>
+            <a:off x="4069080" y="1005840"/>
+            <a:ext cx="7802575" cy="731520"/>
+          </a:xfrm>
+          <a:prstGeom prst="rect">
+            <a:avLst/>
+          </a:prstGeom>
+          <a:noFill/>
+          <a:ln/>
+        </p:spPr>
+        <p:txBody>
+          <a:bodyPr wrap="square" lIns="0" tIns="0" rIns="0" bIns="0" rtlCol="0" anchor="ctr">
+            <a:normAutofit/>
+          </a:bodyPr>
+          <a:lstStyle/>
+          <a:p>
+            <a:pPr algn="ctr" indent="0" marL="0">
+              <a:buNone/>
+            </a:pPr>
+            <a:r>
+              <a:rPr lang="en-US" sz="3600" b="1" dirty="0">
+                <a:solidFill>
+                  <a:srgbClr val="990011"/>
+                </a:solidFill>
+                <a:latin typeface="Times New Roman" pitchFamily="34" charset="0"/>
+                <a:ea typeface="Times New Roman" pitchFamily="34" charset="-122"/>
+                <a:cs typeface="Times New Roman" pitchFamily="34" charset="-120"/>
+              </a:rPr>
+              <a:t>Correction: Possible Answer</a:t>
+            </a:r>
+            <a:endParaRPr lang="en-US" sz="3600" dirty="0"/>
+          </a:p>
+        </p:txBody>
+      </p:sp>
+      <p:sp>
+        <p:nvSpPr>
+          <p:cNvPr id="5" name="Text 2"/>
+          <p:cNvSpPr/>
+          <p:nvPr/>
+        </p:nvSpPr>
+        <p:spPr>
+          <a:xfrm>
+            <a:off x="4069080" y="1783080"/>
+            <a:ext cx="7802575" cy="4663440"/>
+          </a:xfrm>
+          <a:prstGeom prst="rect">
+            <a:avLst/>
+          </a:prstGeom>
+          <a:noFill/>
+          <a:ln/>
+        </p:spPr>
+        <p:txBody>
+          <a:bodyPr wrap="square" lIns="0" tIns="0" rIns="0" bIns="0" rtlCol="0" anchor="t"/>
+          <a:lstStyle/>
+          <a:p>
+            <a:pPr algn="l" indent="0" marL="0">
+              <a:spcAft>
+                <a:spcPts val="800"/>
+              </a:spcAft>
+              <a:buNone/>
+            </a:pPr>
+            <a:r>
+              <a:rPr lang="en-US" sz="4000" dirty="0">
+                <a:solidFill>
+                  <a:srgbClr val="111111"/>
+                </a:solidFill>
+                <a:latin typeface="Times New Roman" pitchFamily="34" charset="0"/>
+                <a:ea typeface="Times New Roman" pitchFamily="34" charset="-122"/>
+                <a:cs typeface="Times New Roman" pitchFamily="34" charset="-120"/>
+              </a:rPr>
+              <a:t>At 1 p.m. the rock is hot, and at 7 p.m. it is cooler. Daily heating makes the outer layer expand and cooling makes it contract; after many years this breaks the rock (thermal shattering).</a:t>
+            </a:r>
+            <a:endParaRPr lang="en-US" sz="4000" dirty="0"/>
+          </a:p>
+        </p:txBody>
+      </p:sp>
+      <p:sp>
+        <p:nvSpPr>
+          <p:cNvPr id="25" name="Slide Number Placeholder 0"/>
+          <p:cNvSpPr>
+            <a:spLocks noGrp="1"/>
+          </p:cNvSpPr>
+          <p:nvPr>
+            <p:ph type="sldNum" sz="quarter" idx="4294967295"/>
+          </p:nvPr>
+        </p:nvSpPr>
+        <p:spPr>
+          <a:xfrm>
+            <a:off x="27432" y="91440"/>
+            <a:ext cx="585216" cy="475488"/>
+          </a:xfrm>
+          <a:prstGeom prst="rect">
+            <a:avLst/>
+          </a:prstGeom>
+          <a:extLst>
+            <a:ext uri="{C572A759-6A51-4108-AA02-DFA0A04FC94B}">
+              <ma14:wrappingTextBoxFlag xmlns:ma14="http://schemas.microsoft.com/office/mac/drawingml/2011/main" val="0"/>
+            </a:ext>
+          </a:extLst>
+        </p:spPr>
+        <p:txBody>
+          <a:bodyPr/>
+          <a:lstStyle>
+            <a:lvl1pPr>
+              <a:defRPr sz="2000">
+                <a:solidFill>
+                  <a:srgbClr val="FFFFFF"/>
+                </a:solidFill>
+                <a:latin typeface="Calibri"/>
+                <a:ea typeface="Calibri"/>
+                <a:cs typeface="Calibri"/>
+              </a:defRPr>
+            </a:lvl1pPr>
+          </a:lstStyle>
+          <a:p>
+            <a:pPr algn="ctr"/>
+            <a:fld id="{F7021451-1387-4CA6-816F-3879F97B5CBC}" type="slidenum">
+              <a:rPr b="1" lang="en-US"/>
+              <a:t>5</a:t>
+            </a:fld>
+            <a:endParaRPr lang="en-US"/>
+          </a:p>
+        </p:txBody>
+      </p:sp>
+    </p:spTree>
+  </p:cSld>
+  <p:clrMapOvr>
+    <a:masterClrMapping/>
+  </p:clrMapOvr>
+</p:sld>
+</file>
+
+<file path=ppt/slides/slide50.xml><?xml version="1.0" encoding="utf-8"?>
+<p:sld xmlns:a="http://schemas.openxmlformats.org/drawingml/2006/main" xmlns:r="http://schemas.openxmlformats.org/officeDocument/2006/relationships" xmlns:p="http://schemas.openxmlformats.org/presentationml/2006/main">
+  <p:cSld name="Slide 50">
+    <p:spTree>
+      <p:nvGrpSpPr>
+        <p:cNvPr id="1" name=""/>
+        <p:cNvGrpSpPr/>
+        <p:nvPr/>
+      </p:nvGrpSpPr>
+      <p:grpSpPr>
+        <a:xfrm>
+          <a:off x="0" y="0"/>
+          <a:ext cx="0" cy="0"/>
+          <a:chOff x="0" y="0"/>
+          <a:chExt cx="0" cy="0"/>
+        </a:xfrm>
+      </p:grpSpPr>
+      <p:sp>
+        <p:nvSpPr>
+          <p:cNvPr id="2" name="Text 0"/>
+          <p:cNvSpPr/>
+          <p:nvPr/>
+        </p:nvSpPr>
+        <p:spPr>
+          <a:xfrm>
+            <a:off x="457200" y="713232"/>
+            <a:ext cx="11368735" cy="274320"/>
+          </a:xfrm>
+          <a:prstGeom prst="rect">
+            <a:avLst/>
+          </a:prstGeom>
+          <a:noFill/>
+          <a:ln/>
+        </p:spPr>
+        <p:txBody>
+          <a:bodyPr wrap="square" lIns="0" tIns="0" rIns="0" bIns="0" rtlCol="0" anchor="ctr"/>
+          <a:lstStyle/>
+          <a:p>
+            <a:pPr algn="r" indent="0" marL="0">
+              <a:buNone/>
+            </a:pPr>
+            <a:r>
+              <a:rPr lang="en-US" sz="1400" b="1" dirty="0">
+                <a:solidFill>
+                  <a:srgbClr val="1C3F6E"/>
+                </a:solidFill>
+                <a:latin typeface="Calibri" pitchFamily="34" charset="0"/>
+                <a:ea typeface="Calibri" pitchFamily="34" charset="-122"/>
+                <a:cs typeface="Calibri" pitchFamily="34" charset="-120"/>
+              </a:rPr>
               <a:t>LOGBOOK</a:t>
             </a:r>
             <a:endParaRPr lang="en-US" sz="1400" dirty="0"/>
@@ -16627,7 +19671,7 @@
       </p:sp>
       <p:graphicFrame>
         <p:nvGraphicFramePr>
-          <p:cNvPr id="43" name="Table 0"/>
+          <p:cNvPr id="51" name="Table 0"/>
           <p:cNvGraphicFramePr>
             <a:graphicFrameLocks noGrp="1"/>
           </p:cNvGraphicFramePr>
@@ -16737,7 +19781,7 @@
                           <a:ea typeface="Calibri" pitchFamily="34" charset="-122"/>
                           <a:cs typeface="Calibri" pitchFamily="34" charset="-120"/>
                         </a:rPr>
-                        <a:t>DEFINITIONS; Processes and Products of Physical Weathering.</a:t>
+                        <a:t>DEFINITIONS; Thermal Shattering; Frost Shattering; Alternate Wetting and Drying (Slaking); Pressure Release (Unloading); Physically Induced Biological Weathering.</a:t>
                       </a:r>
                       <a:endParaRPr lang="en-US" sz="1600" dirty="0">
                         <a:latin typeface="Calibri" charset="0"/>
@@ -17387,7 +20431,7 @@
             <a:pPr algn="ctr"/>
             <a:fld id="{F7021451-1387-4CA6-816F-3879F97B5CBC}" type="slidenum">
               <a:rPr b="1" lang="en-US"/>
-              <a:t>42</a:t>
+              <a:t>50</a:t>
             </a:fld>
             <a:endParaRPr lang="en-US"/>
           </a:p>
@@ -17401,9 +20445,9 @@
 </p:sld>
 </file>
 
-<file path=ppt/slides/slide43.xml><?xml version="1.0" encoding="utf-8"?>
+<file path=ppt/slides/slide51.xml><?xml version="1.0" encoding="utf-8"?>
 <p:sld xmlns:a="http://schemas.openxmlformats.org/drawingml/2006/main" xmlns:r="http://schemas.openxmlformats.org/officeDocument/2006/relationships" xmlns:p="http://schemas.openxmlformats.org/presentationml/2006/main">
-  <p:cSld name="Slide 43">
+  <p:cSld name="Slide 51">
     <p:spTree>
       <p:nvGrpSpPr>
         <p:cNvPr id="1" name=""/>
@@ -17601,7 +20645,7 @@
                 <a:ea typeface="Calibri" pitchFamily="34" charset="-122"/>
                 <a:cs typeface="Calibri" pitchFamily="34" charset="-120"/>
               </a:rPr>
-              <a:t>Without the projector (Activity 1): compare with a glass that breaks when hot water is poured in it.</a:t>
+              <a:t>Without the projector (Activity 1): draw a rock with curved layers peeling off.</a:t>
             </a:r>
             <a:endParaRPr lang="en-US" sz="2000" dirty="0"/>
           </a:p>
@@ -17622,7 +20666,7 @@
                 <a:ea typeface="Calibri" pitchFamily="34" charset="-122"/>
                 <a:cs typeface="Calibri" pitchFamily="34" charset="-120"/>
               </a:rPr>
-              <a:t>Without the projector (Activity 2): ask learners about big granite rocks near Garoua.</a:t>
+              <a:t>Without the projector (Activity 2): describe the rocks of Mount Tinguelin.</a:t>
             </a:r>
             <a:endParaRPr lang="en-US" sz="2000" dirty="0"/>
           </a:p>
@@ -17643,7 +20687,7 @@
                 <a:ea typeface="Calibri" pitchFamily="34" charset="-122"/>
                 <a:cs typeface="Calibri" pitchFamily="34" charset="-120"/>
               </a:rPr>
-              <a:t>Without the projector (Activity 3): show a road cracked by tree roots.</a:t>
+              <a:t>Without the projector (Activity 3): show a tree root lifting a pavement.</a:t>
             </a:r>
             <a:endParaRPr lang="en-US" sz="2000" dirty="0"/>
           </a:p>
@@ -17691,7 +20735,7 @@
             <a:pPr algn="ctr"/>
             <a:fld id="{F7021451-1387-4CA6-816F-3879F97B5CBC}" type="slidenum">
               <a:rPr b="1" lang="en-US"/>
-              <a:t>43</a:t>
+              <a:t>51</a:t>
             </a:fld>
             <a:endParaRPr lang="en-US"/>
           </a:p>
@@ -17705,9 +20749,9 @@
 </p:sld>
 </file>
 
-<file path=ppt/slides/slide44.xml><?xml version="1.0" encoding="utf-8"?>
+<file path=ppt/slides/slide52.xml><?xml version="1.0" encoding="utf-8"?>
 <p:sld xmlns:a="http://schemas.openxmlformats.org/drawingml/2006/main" xmlns:r="http://schemas.openxmlformats.org/officeDocument/2006/relationships" xmlns:p="http://schemas.openxmlformats.org/presentationml/2006/main">
-  <p:cSld name="Slide 44">
+  <p:cSld name="Slide 52">
     <p:spTree>
       <p:nvGrpSpPr>
         <p:cNvPr id="1" name=""/>
@@ -17778,7 +20822,7 @@
         <p:spPr>
           <a:xfrm>
             <a:off x="0" y="658368"/>
-            <a:ext cx="5120640" cy="5833872"/>
+            <a:ext cx="2468880" cy="5833872"/>
           </a:xfrm>
           <a:prstGeom prst="rect">
             <a:avLst/>
@@ -17793,8 +20837,8 @@
         </p:nvSpPr>
         <p:spPr>
           <a:xfrm>
-            <a:off x="5349240" y="1005840"/>
-            <a:ext cx="6522415" cy="731520"/>
+            <a:off x="2697480" y="1005840"/>
+            <a:ext cx="9174175" cy="731520"/>
           </a:xfrm>
           <a:prstGeom prst="rect">
             <a:avLst/>
@@ -17834,8 +20878,8 @@
         </p:nvSpPr>
         <p:spPr>
           <a:xfrm>
-            <a:off x="5349240" y="1783080"/>
-            <a:ext cx="6522415" cy="4663440"/>
+            <a:off x="2697480" y="1783080"/>
+            <a:ext cx="9174175" cy="4663440"/>
           </a:xfrm>
           <a:prstGeom prst="rect">
             <a:avLst/>
@@ -17947,6 +20991,48 @@
                 <a:ea typeface="Calibri" pitchFamily="34" charset="-122"/>
                 <a:cs typeface="Calibri" pitchFamily="34" charset="-120"/>
               </a:rPr>
+              <a:t>Photo, board summary (Process): “Frosty Morning” by Tom Gill., CC BY-NC-ND 2.0, via Flickr (https://www.flickr.com/photos/10199807@N00/4283143427)</a:t>
+            </a:r>
+            <a:endParaRPr lang="en-US" sz="1800" dirty="0"/>
+          </a:p>
+          <a:p>
+            <a:pPr algn="l" marL="342900" indent="-342900">
+              <a:spcAft>
+                <a:spcPts val="800"/>
+              </a:spcAft>
+              <a:buSzPct val="100000"/>
+              <a:buChar char="•"/>
+            </a:pPr>
+            <a:r>
+              <a:rPr lang="en-US" sz="1800" dirty="0">
+                <a:solidFill>
+                  <a:srgbClr val="111111"/>
+                </a:solidFill>
+                <a:latin typeface="Calibri" pitchFamily="34" charset="0"/>
+                <a:ea typeface="Calibri" pitchFamily="34" charset="-122"/>
+                <a:cs typeface="Calibri" pitchFamily="34" charset="-120"/>
+              </a:rPr>
+              <a:t>Photo, board summary (Products): “Cracked Earth” by Aleatoric Consonance, CC BY 2.0, via Flickr (https://www.flickr.com/photos/93921318@N00/3772011444)</a:t>
+            </a:r>
+            <a:endParaRPr lang="en-US" sz="1800" dirty="0"/>
+          </a:p>
+          <a:p>
+            <a:pPr algn="l" marL="342900" indent="-342900">
+              <a:spcAft>
+                <a:spcPts val="800"/>
+              </a:spcAft>
+              <a:buSzPct val="100000"/>
+              <a:buChar char="•"/>
+            </a:pPr>
+            <a:r>
+              <a:rPr lang="en-US" sz="1800" dirty="0">
+                <a:solidFill>
+                  <a:srgbClr val="111111"/>
+                </a:solidFill>
+                <a:latin typeface="Calibri" pitchFamily="34" charset="0"/>
+                <a:ea typeface="Calibri" pitchFamily="34" charset="-122"/>
+                <a:cs typeface="Calibri" pitchFamily="34" charset="-120"/>
+              </a:rPr>
               <a:t>Diagrams and animations: drawn for this lesson (Geography Department).</a:t>
             </a:r>
             <a:endParaRPr lang="en-US" sz="1800" dirty="0"/>
@@ -17995,226 +21081,7 @@
             <a:pPr algn="ctr"/>
             <a:fld id="{F7021451-1387-4CA6-816F-3879F97B5CBC}" type="slidenum">
               <a:rPr b="1" lang="en-US"/>
-              <a:t>44</a:t>
-            </a:fld>
-            <a:endParaRPr lang="en-US"/>
-          </a:p>
-        </p:txBody>
-      </p:sp>
-    </p:spTree>
-  </p:cSld>
-  <p:clrMapOvr>
-    <a:masterClrMapping/>
-  </p:clrMapOvr>
-</p:sld>
-</file>
-
-<file path=ppt/slides/slide5.xml><?xml version="1.0" encoding="utf-8"?>
-<p:sld xmlns:a="http://schemas.openxmlformats.org/drawingml/2006/main" xmlns:r="http://schemas.openxmlformats.org/officeDocument/2006/relationships" xmlns:p="http://schemas.openxmlformats.org/presentationml/2006/main">
-  <p:cSld name="Slide 5">
-    <p:spTree>
-      <p:nvGrpSpPr>
-        <p:cNvPr id="1" name=""/>
-        <p:cNvGrpSpPr/>
-        <p:nvPr/>
-      </p:nvGrpSpPr>
-      <p:grpSpPr>
-        <a:xfrm>
-          <a:off x="0" y="0"/>
-          <a:ext cx="0" cy="0"/>
-          <a:chOff x="0" y="0"/>
-          <a:chExt cx="0" cy="0"/>
-        </a:xfrm>
-      </p:grpSpPr>
-      <p:sp>
-        <p:nvSpPr>
-          <p:cNvPr id="2" name="Text 0"/>
-          <p:cNvSpPr/>
-          <p:nvPr/>
-        </p:nvSpPr>
-        <p:spPr>
-          <a:xfrm>
-            <a:off x="457200" y="713232"/>
-            <a:ext cx="11368735" cy="274320"/>
-          </a:xfrm>
-          <a:prstGeom prst="rect">
-            <a:avLst/>
-          </a:prstGeom>
-          <a:noFill/>
-          <a:ln/>
-        </p:spPr>
-        <p:txBody>
-          <a:bodyPr wrap="square" lIns="0" tIns="0" rIns="0" bIns="0" rtlCol="0" anchor="ctr"/>
-          <a:lstStyle/>
-          <a:p>
-            <a:pPr algn="r" indent="0" marL="0">
-              <a:buNone/>
-            </a:pPr>
-            <a:r>
-              <a:rPr lang="en-US" sz="1400" b="1" dirty="0">
-                <a:solidFill>
-                  <a:srgbClr val="1C3F6E"/>
-                </a:solidFill>
-                <a:latin typeface="Calibri" pitchFamily="34" charset="0"/>
-                <a:ea typeface="Calibri" pitchFamily="34" charset="-122"/>
-                <a:cs typeface="Calibri" pitchFamily="34" charset="-120"/>
-              </a:rPr>
-              <a:t>HOMEWORK CORRECTION</a:t>
-            </a:r>
-            <a:endParaRPr lang="en-US" sz="1400" dirty="0"/>
-          </a:p>
-        </p:txBody>
-      </p:sp>
-      <p:pic>
-        <p:nvPicPr>
-          <p:cNvPr id="3" name="Image 0" descr="/home/claude/f4/img/minesec_sheet.png">    </p:cNvPr>
-          <p:cNvPicPr>
-            <a:picLocks noChangeAspect="1"/>
-          </p:cNvPicPr>
-          <p:nvPr/>
-        </p:nvPicPr>
-        <p:blipFill>
-          <a:blip r:embed="rId1"/>
-          <a:stretch>
-            <a:fillRect/>
-          </a:stretch>
-        </p:blipFill>
-        <p:spPr>
-          <a:xfrm>
-            <a:off x="0" y="658368"/>
-            <a:ext cx="3840480" cy="5833872"/>
-          </a:xfrm>
-          <a:prstGeom prst="rect">
-            <a:avLst/>
-          </a:prstGeom>
-        </p:spPr>
-      </p:pic>
-      <p:sp>
-        <p:nvSpPr>
-          <p:cNvPr id="4" name="Text 1"/>
-          <p:cNvSpPr/>
-          <p:nvPr/>
-        </p:nvSpPr>
-        <p:spPr>
-          <a:xfrm>
-            <a:off x="4069080" y="1005840"/>
-            <a:ext cx="7802575" cy="731520"/>
-          </a:xfrm>
-          <a:prstGeom prst="rect">
-            <a:avLst/>
-          </a:prstGeom>
-          <a:noFill/>
-          <a:ln/>
-        </p:spPr>
-        <p:txBody>
-          <a:bodyPr wrap="square" lIns="0" tIns="0" rIns="0" bIns="0" rtlCol="0" anchor="ctr">
-            <a:normAutofit/>
-          </a:bodyPr>
-          <a:lstStyle/>
-          <a:p>
-            <a:pPr algn="ctr" indent="0" marL="0">
-              <a:buNone/>
-            </a:pPr>
-            <a:r>
-              <a:rPr lang="en-US" sz="3600" b="1" dirty="0">
-                <a:solidFill>
-                  <a:srgbClr val="990011"/>
-                </a:solidFill>
-                <a:latin typeface="Times New Roman" pitchFamily="34" charset="0"/>
-                <a:ea typeface="Times New Roman" pitchFamily="34" charset="-122"/>
-                <a:cs typeface="Times New Roman" pitchFamily="34" charset="-120"/>
-              </a:rPr>
-              <a:t>Correction: Possible Answer</a:t>
-            </a:r>
-            <a:endParaRPr lang="en-US" sz="3600" dirty="0"/>
-          </a:p>
-        </p:txBody>
-      </p:sp>
-      <p:sp>
-        <p:nvSpPr>
-          <p:cNvPr id="5" name="Text 2"/>
-          <p:cNvSpPr/>
-          <p:nvPr/>
-        </p:nvSpPr>
-        <p:spPr>
-          <a:xfrm>
-            <a:off x="4069080" y="1783080"/>
-            <a:ext cx="7802575" cy="4663440"/>
-          </a:xfrm>
-          <a:prstGeom prst="rect">
-            <a:avLst/>
-          </a:prstGeom>
-          <a:noFill/>
-          <a:ln/>
-        </p:spPr>
-        <p:txBody>
-          <a:bodyPr wrap="square" lIns="0" tIns="0" rIns="0" bIns="0" rtlCol="0" anchor="t"/>
-          <a:lstStyle/>
-          <a:p>
-            <a:pPr algn="l" indent="0" marL="0">
-              <a:spcAft>
-                <a:spcPts val="800"/>
-              </a:spcAft>
-              <a:buNone/>
-            </a:pPr>
-            <a:r>
-              <a:rPr lang="en-US" sz="4000" dirty="0">
-                <a:solidFill>
-                  <a:srgbClr val="111111"/>
-                </a:solidFill>
-                <a:latin typeface="Times New Roman" pitchFamily="34" charset="0"/>
-                <a:ea typeface="Times New Roman" pitchFamily="34" charset="-122"/>
-                <a:cs typeface="Times New Roman" pitchFamily="34" charset="-120"/>
-              </a:rPr>
-              <a:t>At 1 p.m. the rock is hot, and at 7 p.m. it is cooler. Daily heating makes the outer layer expand and cooling makes it contract; after many years this breaks the rock (thermal shattering).</a:t>
-            </a:r>
-            <a:endParaRPr lang="en-US" sz="4000" dirty="0"/>
-          </a:p>
-        </p:txBody>
-      </p:sp>
-      <p:sp>
-        <p:nvSpPr>
-          <p:cNvPr id="25" name="Slide Number Placeholder 0"/>
-          <p:cNvSpPr>
-            <a:spLocks noGrp="1"/>
-          </p:cNvSpPr>
-          <p:nvPr>
-            <p:ph type="sldNum" sz="quarter" idx="4294967295"/>
-          </p:nvPr>
-        </p:nvSpPr>
-        <p:spPr>
-          <a:xfrm>
-            <a:off x="27432" y="91440"/>
-            <a:ext cx="585216" cy="475488"/>
-          </a:xfrm>
-          <a:prstGeom prst="rect">
-            <a:avLst/>
-          </a:prstGeom>
-          <a:extLst>
-            <a:ext uri="{C572A759-6A51-4108-AA02-DFA0A04FC94B}">
-              <ma14:wrappingTextBoxFlag xmlns:ma14="http://schemas.microsoft.com/office/mac/drawingml/2011/main" val="0"/>
-            </a:ext>
-          </a:extLst>
-        </p:spPr>
-        <p:txBody>
-          <a:bodyPr/>
-          <a:lstStyle>
-            <a:lvl1pPr>
-              <a:defRPr sz="2000">
-                <a:solidFill>
-                  <a:srgbClr val="FFFFFF"/>
-                </a:solidFill>
-                <a:latin typeface="Calibri"/>
-                <a:ea typeface="Calibri"/>
-                <a:cs typeface="Calibri"/>
-              </a:defRPr>
-            </a:lvl1pPr>
-          </a:lstStyle>
-          <a:p>
-            <a:pPr algn="ctr"/>
-            <a:fld id="{F7021451-1387-4CA6-816F-3879F97B5CBC}" type="slidenum">
-              <a:rPr b="1" lang="en-US"/>
-              <a:t>5</a:t>
+              <a:t>52</a:t>
             </a:fld>
             <a:endParaRPr lang="en-US"/>
           </a:p>
@@ -19179,7 +22046,7 @@
         <p:spPr>
           <a:xfrm>
             <a:off x="0" y="658368"/>
-            <a:ext cx="5120640" cy="5833872"/>
+            <a:ext cx="3840480" cy="5833872"/>
           </a:xfrm>
           <a:prstGeom prst="rect">
             <a:avLst/>
@@ -19194,8 +22061,8 @@
         </p:nvSpPr>
         <p:spPr>
           <a:xfrm>
-            <a:off x="5349240" y="1005840"/>
-            <a:ext cx="6522415" cy="731520"/>
+            <a:off x="4069080" y="1005840"/>
+            <a:ext cx="7802575" cy="731520"/>
           </a:xfrm>
           <a:prstGeom prst="rect">
             <a:avLst/>
@@ -19235,8 +22102,8 @@
         </p:nvSpPr>
         <p:spPr>
           <a:xfrm>
-            <a:off x="5349240" y="1783080"/>
-            <a:ext cx="6522415" cy="4663440"/>
+            <a:off x="4069080" y="1783080"/>
+            <a:ext cx="7802575" cy="4663440"/>
           </a:xfrm>
           <a:prstGeom prst="rect">
             <a:avLst/>
@@ -19263,7 +22130,7 @@
                 <a:ea typeface="Times New Roman" pitchFamily="34" charset="-122"/>
                 <a:cs typeface="Times New Roman" pitchFamily="34" charset="-120"/>
               </a:rPr>
-              <a:t>In the dry season, Yaya walks past a big granite rock. At midday, it is too hot to touch. Its outer surface peels off in thin layers, like an onion.</a:t>
+              <a:t>In the dry season, Yaya walks past a big granite rock. At midday it is too hot to touch, and at night it is cool; its outer surface peels off in thin layers, like an onion. He asks: "How can the Sun alone break such a hard rock?"</a:t>
             </a:r>
             <a:endParaRPr lang="en-US" sz="4000" dirty="0"/>
           </a:p>

--- a/lecons/F3/19_FORM4_LESSON16_Physical_Weathering.pptx
+++ b/lecons/F3/19_FORM4_LESSON16_Physical_Weathering.pptx
@@ -10724,7 +10724,7 @@
         <p:spPr>
           <a:xfrm>
             <a:off x="0" y="658368"/>
-            <a:ext cx="3840480" cy="5833872"/>
+            <a:ext cx="5120640" cy="5833872"/>
           </a:xfrm>
           <a:prstGeom prst="rect">
             <a:avLst/>
@@ -10739,8 +10739,8 @@
         </p:nvSpPr>
         <p:spPr>
           <a:xfrm>
-            <a:off x="4069080" y="1005840"/>
-            <a:ext cx="7802575" cy="731520"/>
+            <a:off x="5349240" y="1005840"/>
+            <a:ext cx="6522415" cy="731520"/>
           </a:xfrm>
           <a:prstGeom prst="rect">
             <a:avLst/>
@@ -10780,8 +10780,8 @@
         </p:nvSpPr>
         <p:spPr>
           <a:xfrm>
-            <a:off x="4069080" y="1783080"/>
-            <a:ext cx="7802575" cy="4663440"/>
+            <a:off x="5349240" y="1783080"/>
+            <a:ext cx="6522415" cy="4663440"/>
           </a:xfrm>
           <a:prstGeom prst="rect">
             <a:avLst/>
@@ -10800,7 +10800,7 @@
               <a:buNone/>
             </a:pPr>
             <a:r>
-              <a:rPr lang="en-US" sz="4000" b="1" dirty="0">
+              <a:rPr lang="en-US" sz="3200" b="1" dirty="0">
                 <a:solidFill>
                   <a:srgbClr val="111111"/>
                 </a:solidFill>
@@ -10810,7 +10810,7 @@
               </a:rPr>
               <a:t>Topic: Denudation Processes, Landforms and Impacts on Man</a:t>
             </a:r>
-            <a:endParaRPr lang="en-US" sz="4000" dirty="0"/>
+            <a:endParaRPr lang="en-US" sz="3200" dirty="0"/>
           </a:p>
           <a:p>
             <a:pPr algn="l" indent="0" marL="0">
@@ -10820,7 +10820,7 @@
               <a:buNone/>
             </a:pPr>
             <a:r>
-              <a:rPr lang="en-US" sz="4000" b="1" dirty="0">
+              <a:rPr lang="en-US" sz="3200" b="1" dirty="0">
                 <a:solidFill>
                   <a:srgbClr val="111111"/>
                 </a:solidFill>
@@ -10830,7 +10830,7 @@
               </a:rPr>
               <a:t>Sub-topic: Weathering Processes: The Products and Impacts on Man</a:t>
             </a:r>
-            <a:endParaRPr lang="en-US" sz="4000" dirty="0"/>
+            <a:endParaRPr lang="en-US" sz="3200" dirty="0"/>
           </a:p>
           <a:p>
             <a:pPr algn="l" indent="0" marL="0">
@@ -10840,7 +10840,7 @@
               <a:buNone/>
             </a:pPr>
             <a:r>
-              <a:rPr lang="en-US" sz="4000" b="1" dirty="0">
+              <a:rPr lang="en-US" sz="3200" b="1" dirty="0">
                 <a:solidFill>
                   <a:srgbClr val="990011"/>
                 </a:solidFill>
@@ -10850,7 +10850,7 @@
               </a:rPr>
               <a:t>Lesson 16: Physical Weathering Processes and Products</a:t>
             </a:r>
-            <a:endParaRPr lang="en-US" sz="4000" dirty="0"/>
+            <a:endParaRPr lang="en-US" sz="3200" dirty="0"/>
           </a:p>
         </p:txBody>
       </p:sp>

--- a/lecons/F3/19_FORM4_LESSON16_Physical_Weathering.pptx
+++ b/lecons/F3/19_FORM4_LESSON16_Physical_Weathering.pptx
@@ -3457,7 +3457,7 @@
           <a:p>
             <a:r>
               <a:rPr lang="en-US" dirty="0"/>
-              <a:t>Before we start the new lesson, let us correct the homework I gave you at the end of Lesson 15: Weathering. The question was: Touch a big rock or a cement wall at 1 p.m. and again at 7 p.m. Write what you feel, and why this could break the rock after many years. Take out your exercise books.</a:t>
+              <a:t>Before we start the new lesson, let us correct the homework I gave you at the end of Lesson 15: Weathering. The question was: Name two processes of physical weathering. Take out your exercise books.</a:t>
             </a:r>
             <a:endParaRPr lang="en-US" dirty="0"/>
           </a:p>
@@ -4073,7 +4073,7 @@
           <a:p>
             <a:r>
               <a:rPr lang="en-US" dirty="0"/>
-              <a:t>For your homework: Look at an old iron gate, a roofing sheet or a nail left in the rain. Write what happened to it and what colour it became. We shall correct it at the beginning of our next lesson.</a:t>
+              <a:t>For your homework: Name two processes of chemical weathering. We shall correct it at the beginning of our next lesson.</a:t>
             </a:r>
             <a:endParaRPr lang="en-US" dirty="0"/>
           </a:p>
@@ -4425,7 +4425,7 @@
           <a:p>
             <a:r>
               <a:rPr lang="en-US" dirty="0"/>
-              <a:t>Here is a good answer. At 1 p.m. the rock is hot, and at 7 p.m. it is cooler. Daily heating makes the outer layer expand and cooling makes it contract; after many years this breaks the rock (thermal shattering). Compare it with your own answer and correct your work in red.</a:t>
+              <a:t>Here is a good answer. Thermal shattering and frost shattering (also wetting and drying, pressure release). Compare it with your own answer and correct your work in red.</a:t>
             </a:r>
             <a:endParaRPr lang="en-US" dirty="0"/>
           </a:p>
@@ -15319,7 +15319,7 @@
                 <a:ea typeface="Times New Roman" pitchFamily="34" charset="-122"/>
                 <a:cs typeface="Times New Roman" pitchFamily="34" charset="-120"/>
               </a:rPr>
-              <a:t>Touch a big rock or a cement wall at 1 p.m. and again at 7 p.m. Write what you feel, and why this could break the rock after many years.</a:t>
+              <a:t>Name two processes of physical weathering.</a:t>
             </a:r>
             <a:endParaRPr lang="en-US" sz="4000" dirty="0"/>
           </a:p>
@@ -16898,7 +16898,7 @@
                 <a:ea typeface="Times New Roman" pitchFamily="34" charset="-122"/>
                 <a:cs typeface="Times New Roman" pitchFamily="34" charset="-120"/>
               </a:rPr>
-              <a:t>Look at an old iron gate, a roofing sheet or a nail left in the rain. Write what happened to it and what colour it became.</a:t>
+              <a:t>Name two processes of chemical weathering.</a:t>
             </a:r>
             <a:endParaRPr lang="en-US" sz="4000" dirty="0"/>
           </a:p>
@@ -19428,7 +19428,7 @@
         <p:spPr>
           <a:xfrm>
             <a:off x="0" y="658368"/>
-            <a:ext cx="3840480" cy="5833872"/>
+            <a:ext cx="5120640" cy="5833872"/>
           </a:xfrm>
           <a:prstGeom prst="rect">
             <a:avLst/>
@@ -19443,8 +19443,8 @@
         </p:nvSpPr>
         <p:spPr>
           <a:xfrm>
-            <a:off x="4069080" y="1005840"/>
-            <a:ext cx="7802575" cy="731520"/>
+            <a:off x="5349240" y="1005840"/>
+            <a:ext cx="6522415" cy="731520"/>
           </a:xfrm>
           <a:prstGeom prst="rect">
             <a:avLst/>
@@ -19484,8 +19484,8 @@
         </p:nvSpPr>
         <p:spPr>
           <a:xfrm>
-            <a:off x="4069080" y="1783080"/>
-            <a:ext cx="7802575" cy="4663440"/>
+            <a:off x="5349240" y="1783080"/>
+            <a:ext cx="6522415" cy="4663440"/>
           </a:xfrm>
           <a:prstGeom prst="rect">
             <a:avLst/>
@@ -19512,7 +19512,7 @@
                 <a:ea typeface="Times New Roman" pitchFamily="34" charset="-122"/>
                 <a:cs typeface="Times New Roman" pitchFamily="34" charset="-120"/>
               </a:rPr>
-              <a:t>At 1 p.m. the rock is hot, and at 7 p.m. it is cooler. Daily heating makes the outer layer expand and cooling makes it contract; after many years this breaks the rock (thermal shattering).</a:t>
+              <a:t>Thermal shattering and frost shattering (also wetting and drying, pressure release).</a:t>
             </a:r>
             <a:endParaRPr lang="en-US" sz="4000" dirty="0"/>
           </a:p>
@@ -20057,7 +20057,7 @@
                           <a:ea typeface="Calibri" pitchFamily="34" charset="-122"/>
                           <a:cs typeface="Calibri" pitchFamily="34" charset="-120"/>
                         </a:rPr>
-                        <a:t>Look at an old iron gate, a roofing sheet or a nail left in the rain. Write what happened to it and what colour it became.</a:t>
+                        <a:t>Name two processes of chemical weathering.</a:t>
                       </a:r>
                       <a:endParaRPr lang="en-US" sz="1600" dirty="0">
                         <a:latin typeface="Calibri" charset="0"/>
